--- a/system-design-101/vi/lessons/sd-10-024/slides/sd-10-024.pptx
+++ b/system-design-101/vi/lessons/sd-10-024/slides/sd-10-024.pptx
@@ -1883,7 +1883,7 @@
               <a:buNone/>
             </a:pPr>
             <a:r>
-              <a:rPr lang="en-US" sz="5400" dirty="0" spc="1" kern="0">
+              <a:rPr lang="en-US" sz="5400" dirty="0" spc="2" kern="0">
                 <a:solidFill>
                   <a:srgbClr val="F3EEE3"/>
                 </a:solidFill>
@@ -1891,7 +1891,7 @@
                 <a:ea typeface="Bricolage Grotesque ExtraBold" pitchFamily="34" charset="-122"/>
                 <a:cs typeface="Bricolage Grotesque ExtraBold" pitchFamily="34" charset="-120"/>
               </a:rPr>
-              <a:t>5</a:t>
+              <a:t>7</a:t>
             </a:r>
             <a:endParaRPr lang="en-US" sz="5400" dirty="0"/>
           </a:p>
@@ -1922,7 +1922,7 @@
               <a:buNone/>
             </a:pPr>
             <a:r>
-              <a:rPr lang="en-US" sz="5400" dirty="0" spc="-1" kern="0">
+              <a:rPr lang="en-US" sz="5400" dirty="0" kern="0">
                 <a:solidFill>
                   <a:srgbClr val="F3EEE3"/>
                 </a:solidFill>
@@ -1930,7 +1930,7 @@
                 <a:ea typeface="Bricolage Grotesque ExtraBold" pitchFamily="34" charset="-122"/>
                 <a:cs typeface="Bricolage Grotesque ExtraBold" pitchFamily="34" charset="-120"/>
               </a:rPr>
-              <a:t>1</a:t>
+              <a:t>2</a:t>
             </a:r>
             <a:endParaRPr lang="en-US" sz="5400" dirty="0"/>
           </a:p>
@@ -2047,7 +2047,18 @@
                 <a:ea typeface="Be Vietnam Pro" pitchFamily="34" charset="-122"/>
                 <a:cs typeface="Be Vietnam Pro" pitchFamily="34" charset="-120"/>
               </a:rPr>
-              <a:t>thư viện</a:t>
+              <a:t>phép</a:t>
+            </a:r>
+            <a:r>
+              <a:rPr lang="en-US" sz="1800" dirty="0" spc="0" kern="0">
+                <a:solidFill>
+                  <a:srgbClr val="9AA0B5"/>
+                </a:solidFill>
+                <a:latin typeface="Be Vietnam Pro" pitchFamily="34" charset="0"/>
+                <a:ea typeface="Be Vietnam Pro" pitchFamily="34" charset="-122"/>
+                <a:cs typeface="Be Vietnam Pro" pitchFamily="34" charset="-120"/>
+              </a:rPr>
+              <a:t> thử</a:t>
             </a:r>
             <a:endParaRPr lang="en-US" sz="1800" dirty="0"/>
           </a:p>
@@ -2089,7 +2100,7 @@
               <a:t>chỉ</a:t>
             </a:r>
             <a:r>
-              <a:rPr lang="en-US" sz="1800" dirty="0" spc="1" kern="0">
+              <a:rPr lang="en-US" sz="1800" dirty="0" spc="9" kern="0">
                 <a:solidFill>
                   <a:srgbClr val="9AA0B5"/>
                 </a:solidFill>
@@ -2097,10 +2108,10 @@
                 <a:ea typeface="Be Vietnam Pro" pitchFamily="34" charset="-122"/>
                 <a:cs typeface="Be Vietnam Pro" pitchFamily="34" charset="-120"/>
               </a:rPr>
-              <a:t> có</a:t>
-            </a:r>
-            <a:r>
-              <a:rPr lang="en-US" sz="1800" dirty="0" spc="-12" kern="0">
+              <a:t> đọc</a:t>
+            </a:r>
+            <a:r>
+              <a:rPr lang="en-US" sz="1800" dirty="0" spc="-10" kern="0">
                 <a:solidFill>
                   <a:srgbClr val="9AA0B5"/>
                 </a:solidFill>
@@ -2108,7 +2119,18 @@
                 <a:ea typeface="Be Vietnam Pro" pitchFamily="34" charset="-122"/>
                 <a:cs typeface="Be Vietnam Pro" pitchFamily="34" charset="-120"/>
               </a:rPr>
-              <a:t> tên</a:t>
+              <a:t> tài</a:t>
+            </a:r>
+            <a:r>
+              <a:rPr lang="en-US" sz="1800" dirty="0" spc="-2" kern="0">
+                <a:solidFill>
+                  <a:srgbClr val="9AA0B5"/>
+                </a:solidFill>
+                <a:latin typeface="Be Vietnam Pro" pitchFamily="34" charset="0"/>
+                <a:ea typeface="Be Vietnam Pro" pitchFamily="34" charset="-122"/>
+                <a:cs typeface="Be Vietnam Pro" pitchFamily="34" charset="-120"/>
+              </a:rPr>
+              <a:t> liệu</a:t>
             </a:r>
             <a:endParaRPr lang="en-US" sz="1800" dirty="0"/>
           </a:p>
@@ -3206,6 +3228,28 @@
               <a:buNone/>
             </a:pPr>
             <a:r>
+              <a:rPr lang="en-US" sz="3000" dirty="0" spc="-1" kern="0">
+                <a:solidFill>
+                  <a:srgbClr val="C4C8D6"/>
+                </a:solidFill>
+                <a:latin typeface="Be Vietnam Pro" pitchFamily="34" charset="0"/>
+                <a:ea typeface="Be Vietnam Pro" pitchFamily="34" charset="-122"/>
+                <a:cs typeface="Be Vietnam Pro" pitchFamily="34" charset="-120"/>
+              </a:rPr>
+              <a:t>Chín</a:t>
+            </a:r>
+            <a:r>
+              <a:rPr lang="en-US" sz="3000" dirty="0" spc="-14" kern="0">
+                <a:solidFill>
+                  <a:srgbClr val="C4C8D6"/>
+                </a:solidFill>
+                <a:latin typeface="Be Vietnam Pro" pitchFamily="34" charset="0"/>
+                <a:ea typeface="Be Vietnam Pro" pitchFamily="34" charset="-122"/>
+                <a:cs typeface="Be Vietnam Pro" pitchFamily="34" charset="-120"/>
+              </a:rPr>
+              <a:t> tên,</a:t>
+            </a:r>
+            <a:r>
               <a:rPr lang="en-US" sz="3000" dirty="0" spc="0" kern="0">
                 <a:solidFill>
                   <a:srgbClr val="C4C8D6"/>
@@ -3214,10 +3258,10 @@
                 <a:ea typeface="Be Vietnam Pro" pitchFamily="34" charset="-122"/>
                 <a:cs typeface="Be Vietnam Pro" pitchFamily="34" charset="-120"/>
               </a:rPr>
-              <a:t>Nguồn</a:t>
-            </a:r>
-            <a:r>
-              <a:rPr lang="en-US" sz="3000" dirty="0" spc="-43" kern="0">
+              <a:t> chín</a:t>
+            </a:r>
+            <a:r>
+              <a:rPr lang="en-US" sz="3000" dirty="0" spc="3" kern="0">
                 <a:solidFill>
                   <a:srgbClr val="C4C8D6"/>
                 </a:solidFill>
@@ -3225,10 +3269,10 @@
                 <a:ea typeface="Be Vietnam Pro" pitchFamily="34" charset="-122"/>
                 <a:cs typeface="Be Vietnam Pro" pitchFamily="34" charset="-120"/>
               </a:rPr>
-              <a:t> kể</a:t>
-            </a:r>
-            <a:r>
-              <a:rPr lang="en-US" sz="3000" dirty="0" spc="-17" kern="0">
+              <a:t> phép</a:t>
+            </a:r>
+            <a:r>
+              <a:rPr lang="en-US" sz="3000" dirty="0" spc="-1" kern="0">
                 <a:solidFill>
                   <a:srgbClr val="C4C8D6"/>
                 </a:solidFill>
@@ -3236,7 +3280,7 @@
                 <a:ea typeface="Be Vietnam Pro" pitchFamily="34" charset="-122"/>
                 <a:cs typeface="Be Vietnam Pro" pitchFamily="34" charset="-120"/>
               </a:rPr>
-              <a:t> tên</a:t>
+              <a:t> thử</a:t>
             </a:r>
             <a:r>
               <a:rPr lang="en-US" sz="3000" dirty="0" spc="0" kern="0">
@@ -3247,29 +3291,7 @@
                 <a:ea typeface="Be Vietnam Pro" pitchFamily="34" charset="-122"/>
                 <a:cs typeface="Be Vietnam Pro" pitchFamily="34" charset="-120"/>
               </a:rPr>
-              <a:t> chín</a:t>
-            </a:r>
-            <a:r>
-              <a:rPr lang="en-US" sz="3000" dirty="0" spc="-12" kern="0">
-                <a:solidFill>
-                  <a:srgbClr val="C4C8D6"/>
-                </a:solidFill>
-                <a:latin typeface="Be Vietnam Pro" pitchFamily="34" charset="0"/>
-                <a:ea typeface="Be Vietnam Pro" pitchFamily="34" charset="-122"/>
-                <a:cs typeface="Be Vietnam Pro" pitchFamily="34" charset="-120"/>
-              </a:rPr>
-              <a:t> thuật</a:t>
-            </a:r>
-            <a:r>
-              <a:rPr lang="en-US" sz="3000" dirty="0" spc="-14" kern="0">
-                <a:solidFill>
-                  <a:srgbClr val="C4C8D6"/>
-                </a:solidFill>
-                <a:latin typeface="Be Vietnam Pro" pitchFamily="34" charset="0"/>
-                <a:ea typeface="Be Vietnam Pro" pitchFamily="34" charset="-122"/>
-                <a:cs typeface="Be Vietnam Pro" pitchFamily="34" charset="-120"/>
-              </a:rPr>
-              <a:t> toán.</a:t>
+              <a:t> nhỏ.</a:t>
             </a:r>
             <a:endParaRPr lang="en-US" sz="3000" dirty="0"/>
           </a:p>
@@ -4839,6 +4861,105 @@
               <a:buNone/>
             </a:pPr>
             <a:r>
+              <a:rPr lang="en-US" sz="2850" dirty="0" spc="-16" kern="0">
+                <a:solidFill>
+                  <a:srgbClr val="14161C"/>
+                </a:solidFill>
+                <a:latin typeface="Be Vietnam Pro" pitchFamily="34" charset="0"/>
+                <a:ea typeface="Be Vietnam Pro" pitchFamily="34" charset="-122"/>
+                <a:cs typeface="Be Vietnam Pro" pitchFamily="34" charset="-120"/>
+              </a:rPr>
+              <a:t>Bảy</a:t>
+            </a:r>
+            <a:r>
+              <a:rPr lang="en-US" sz="2850" dirty="0" spc="-19" kern="0">
+                <a:solidFill>
+                  <a:srgbClr val="14161C"/>
+                </a:solidFill>
+                <a:latin typeface="Be Vietnam Pro" pitchFamily="34" charset="0"/>
+                <a:ea typeface="Be Vietnam Pro" pitchFamily="34" charset="-122"/>
+                <a:cs typeface="Be Vietnam Pro" pitchFamily="34" charset="-120"/>
+              </a:rPr>
+              <a:t> trong</a:t>
+            </a:r>
+            <a:r>
+              <a:rPr lang="en-US" sz="2850" dirty="0" spc="-1" kern="0">
+                <a:solidFill>
+                  <a:srgbClr val="14161C"/>
+                </a:solidFill>
+                <a:latin typeface="Be Vietnam Pro" pitchFamily="34" charset="0"/>
+                <a:ea typeface="Be Vietnam Pro" pitchFamily="34" charset="-122"/>
+                <a:cs typeface="Be Vietnam Pro" pitchFamily="34" charset="-120"/>
+              </a:rPr>
+              <a:t> chín</a:t>
+            </a:r>
+            <a:r>
+              <a:rPr lang="en-US" sz="2850" dirty="0" spc="-11" kern="0">
+                <a:solidFill>
+                  <a:srgbClr val="14161C"/>
+                </a:solidFill>
+                <a:latin typeface="Be Vietnam Pro" pitchFamily="34" charset="0"/>
+                <a:ea typeface="Be Vietnam Pro" pitchFamily="34" charset="-122"/>
+                <a:cs typeface="Be Vietnam Pro" pitchFamily="34" charset="-120"/>
+              </a:rPr>
+              <a:t> thuật</a:t>
+            </a:r>
+            <a:r>
+              <a:rPr lang="en-US" sz="2850" dirty="0" spc="-14" kern="0">
+                <a:solidFill>
+                  <a:srgbClr val="14161C"/>
+                </a:solidFill>
+                <a:latin typeface="Be Vietnam Pro" pitchFamily="34" charset="0"/>
+                <a:ea typeface="Be Vietnam Pro" pitchFamily="34" charset="-122"/>
+                <a:cs typeface="Be Vietnam Pro" pitchFamily="34" charset="-120"/>
+              </a:rPr>
+              <a:t> toán</a:t>
+            </a:r>
+            <a:r>
+              <a:rPr lang="en-US" sz="2850" dirty="0" spc="-1" kern="0">
+                <a:solidFill>
+                  <a:srgbClr val="14161C"/>
+                </a:solidFill>
+                <a:latin typeface="Be Vietnam Pro" pitchFamily="34" charset="0"/>
+                <a:ea typeface="Be Vietnam Pro" pitchFamily="34" charset="-122"/>
+                <a:cs typeface="Be Vietnam Pro" pitchFamily="34" charset="-120"/>
+              </a:rPr>
+              <a:t> thử</a:t>
+            </a:r>
+            <a:r>
+              <a:rPr lang="en-US" sz="2850" dirty="0" spc="9" kern="0">
+                <a:solidFill>
+                  <a:srgbClr val="14161C"/>
+                </a:solidFill>
+                <a:latin typeface="Be Vietnam Pro" pitchFamily="34" charset="0"/>
+                <a:ea typeface="Be Vietnam Pro" pitchFamily="34" charset="-122"/>
+                <a:cs typeface="Be Vietnam Pro" pitchFamily="34" charset="-120"/>
+              </a:rPr>
+              <a:t> được</a:t>
+            </a:r>
+            <a:r>
+              <a:rPr lang="en-US" sz="2850" dirty="0" spc="-5" kern="0">
+                <a:solidFill>
+                  <a:srgbClr val="14161C"/>
+                </a:solidFill>
+                <a:latin typeface="Be Vietnam Pro" pitchFamily="34" charset="0"/>
+                <a:ea typeface="Be Vietnam Pro" pitchFamily="34" charset="-122"/>
+                <a:cs typeface="Be Vietnam Pro" pitchFamily="34" charset="-120"/>
+              </a:rPr>
+              <a:t> bằng</a:t>
+            </a:r>
+            <a:r>
+              <a:rPr lang="en-US" sz="2850" dirty="0" spc="-11" kern="0">
+                <a:solidFill>
+                  <a:srgbClr val="14161C"/>
+                </a:solidFill>
+                <a:latin typeface="Be Vietnam Pro" pitchFamily="34" charset="0"/>
+                <a:ea typeface="Be Vietnam Pro" pitchFamily="34" charset="-122"/>
+                <a:cs typeface="Be Vietnam Pro" pitchFamily="34" charset="-120"/>
+              </a:rPr>
+              <a:t> vài</a:t>
+            </a:r>
+            <a:r>
               <a:rPr lang="en-US" sz="2850" dirty="0" spc="-3" kern="0">
                 <a:solidFill>
                   <a:srgbClr val="14161C"/>
@@ -4847,117 +4968,18 @@
                 <a:ea typeface="Be Vietnam Pro" pitchFamily="34" charset="-122"/>
                 <a:cs typeface="Be Vietnam Pro" pitchFamily="34" charset="-120"/>
               </a:rPr>
-              <a:t>Nguồn</a:t>
-            </a:r>
-            <a:r>
-              <a:rPr lang="en-US" sz="2850" dirty="0" spc="0" kern="0">
-                <a:solidFill>
-                  <a:srgbClr val="14161C"/>
-                </a:solidFill>
-                <a:latin typeface="Be Vietnam Pro" pitchFamily="34" charset="0"/>
-                <a:ea typeface="Be Vietnam Pro" pitchFamily="34" charset="-122"/>
-                <a:cs typeface="Be Vietnam Pro" pitchFamily="34" charset="-120"/>
-              </a:rPr>
-              <a:t> nêu</a:t>
-            </a:r>
-            <a:r>
-              <a:rPr lang="en-US" sz="2850" dirty="0" spc="-1" kern="0">
-                <a:solidFill>
-                  <a:srgbClr val="14161C"/>
-                </a:solidFill>
-                <a:latin typeface="Be Vietnam Pro" pitchFamily="34" charset="0"/>
-                <a:ea typeface="Be Vietnam Pro" pitchFamily="34" charset="-122"/>
-                <a:cs typeface="Be Vietnam Pro" pitchFamily="34" charset="-120"/>
-              </a:rPr>
-              <a:t> chín</a:t>
-            </a:r>
-            <a:r>
-              <a:rPr lang="en-US" sz="2850" dirty="0" spc="-10" kern="0">
-                <a:solidFill>
-                  <a:srgbClr val="14161C"/>
-                </a:solidFill>
-                <a:latin typeface="Be Vietnam Pro" pitchFamily="34" charset="0"/>
-                <a:ea typeface="Be Vietnam Pro" pitchFamily="34" charset="-122"/>
-                <a:cs typeface="Be Vietnam Pro" pitchFamily="34" charset="-120"/>
-              </a:rPr>
-              <a:t> thuật</a:t>
-            </a:r>
-            <a:r>
-              <a:rPr lang="en-US" sz="2850" dirty="0" spc="-12" kern="0">
-                <a:solidFill>
-                  <a:srgbClr val="14161C"/>
-                </a:solidFill>
-                <a:latin typeface="Be Vietnam Pro" pitchFamily="34" charset="0"/>
-                <a:ea typeface="Be Vietnam Pro" pitchFamily="34" charset="-122"/>
-                <a:cs typeface="Be Vietnam Pro" pitchFamily="34" charset="-120"/>
-              </a:rPr>
-              <a:t> toán,</a:t>
-            </a:r>
-            <a:r>
-              <a:rPr lang="en-US" sz="2850" dirty="0" spc="-1" kern="0">
-                <a:solidFill>
-                  <a:srgbClr val="14161C"/>
-                </a:solidFill>
-                <a:latin typeface="Be Vietnam Pro" pitchFamily="34" charset="0"/>
-                <a:ea typeface="Be Vietnam Pro" pitchFamily="34" charset="-122"/>
-                <a:cs typeface="Be Vietnam Pro" pitchFamily="34" charset="-120"/>
-              </a:rPr>
-              <a:t> từ</a:t>
-            </a:r>
-            <a:r>
-              <a:rPr lang="en-US" sz="2850" dirty="0" spc="-2" kern="0">
-                <a:solidFill>
-                  <a:srgbClr val="14161C"/>
-                </a:solidFill>
-                <a:latin typeface="Be Vietnam Pro" pitchFamily="34" charset="0"/>
-                <a:ea typeface="Be Vietnam Pro" pitchFamily="34" charset="-122"/>
-                <a:cs typeface="Be Vietnam Pro" pitchFamily="34" charset="-120"/>
-              </a:rPr>
-              <a:t> công</a:t>
-            </a:r>
-            <a:r>
-              <a:rPr lang="en-US" sz="2850" dirty="0" spc="-1" kern="0">
-                <a:solidFill>
-                  <a:srgbClr val="14161C"/>
-                </a:solidFill>
-                <a:latin typeface="Be Vietnam Pro" pitchFamily="34" charset="0"/>
-                <a:ea typeface="Be Vietnam Pro" pitchFamily="34" charset="-122"/>
-                <a:cs typeface="Be Vietnam Pro" pitchFamily="34" charset="-120"/>
-              </a:rPr>
-              <a:t> cụ tìm kiếm</a:t>
-            </a:r>
-            <a:r>
-              <a:rPr lang="en-US" sz="2850" dirty="0" spc="-15" kern="0">
-                <a:solidFill>
-                  <a:srgbClr val="14161C"/>
-                </a:solidFill>
-                <a:latin typeface="Be Vietnam Pro" pitchFamily="34" charset="0"/>
-                <a:ea typeface="Be Vietnam Pro" pitchFamily="34" charset="-122"/>
-                <a:cs typeface="Be Vietnam Pro" pitchFamily="34" charset="-120"/>
-              </a:rPr>
-              <a:t> tới</a:t>
-            </a:r>
-            <a:r>
-              <a:rPr lang="en-US" sz="2850" dirty="0" spc="-16" kern="0">
-                <a:solidFill>
-                  <a:srgbClr val="14161C"/>
-                </a:solidFill>
-                <a:latin typeface="Be Vietnam Pro" pitchFamily="34" charset="0"/>
-                <a:ea typeface="Be Vietnam Pro" pitchFamily="34" charset="-122"/>
-                <a:cs typeface="Be Vietnam Pro" pitchFamily="34" charset="-120"/>
-              </a:rPr>
-              <a:t> vệ</a:t>
-            </a:r>
-            <a:r>
-              <a:rPr lang="en-US" sz="2850" dirty="0" spc="0" kern="0">
-                <a:solidFill>
-                  <a:srgbClr val="14161C"/>
-                </a:solidFill>
-                <a:latin typeface="Be Vietnam Pro" pitchFamily="34" charset="0"/>
-                <a:ea typeface="Be Vietnam Pro" pitchFamily="34" charset="-122"/>
-                <a:cs typeface="Be Vietnam Pro" pitchFamily="34" charset="-120"/>
-              </a:rPr>
-              <a:t> tinh.</a:t>
+              <a:t> dòng</a:t>
+            </a:r>
+            <a:r>
+              <a:rPr lang="en-US" sz="2850" dirty="0" spc="1" kern="0">
+                <a:solidFill>
+                  <a:srgbClr val="14161C"/>
+                </a:solidFill>
+                <a:latin typeface="Be Vietnam Pro" pitchFamily="34" charset="0"/>
+                <a:ea typeface="Be Vietnam Pro" pitchFamily="34" charset="-122"/>
+                <a:cs typeface="Be Vietnam Pro" pitchFamily="34" charset="-120"/>
+              </a:rPr>
+              <a:t> mã.</a:t>
             </a:r>
             <a:endParaRPr lang="en-US" sz="2850" dirty="0"/>
           </a:p>
@@ -4977,62 +4999,18 @@
                 <a:ea typeface="Be Vietnam Pro" pitchFamily="34" charset="-122"/>
                 <a:cs typeface="Be Vietnam Pro" pitchFamily="34" charset="-120"/>
               </a:rPr>
-              <a:t>Mỗi</a:t>
-            </a:r>
-            <a:r>
-              <a:rPr lang="en-US" sz="2850" dirty="0" spc="-15" kern="0">
-                <a:solidFill>
-                  <a:srgbClr val="14161C"/>
-                </a:solidFill>
-                <a:latin typeface="Be Vietnam Pro" pitchFamily="34" charset="0"/>
-                <a:ea typeface="Be Vietnam Pro" pitchFamily="34" charset="-122"/>
-                <a:cs typeface="Be Vietnam Pro" pitchFamily="34" charset="-120"/>
-              </a:rPr>
-              <a:t> tên</a:t>
-            </a:r>
-            <a:r>
-              <a:rPr lang="en-US" sz="2850" dirty="0" spc="-1" kern="0">
-                <a:solidFill>
-                  <a:srgbClr val="14161C"/>
-                </a:solidFill>
-                <a:latin typeface="Be Vietnam Pro" pitchFamily="34" charset="0"/>
-                <a:ea typeface="Be Vietnam Pro" pitchFamily="34" charset="-122"/>
-                <a:cs typeface="Be Vietnam Pro" pitchFamily="34" charset="-120"/>
-              </a:rPr>
-              <a:t> có</a:t>
-            </a:r>
-            <a:r>
-              <a:rPr lang="en-US" sz="2850" dirty="0" spc="-10" kern="0">
-                <a:solidFill>
-                  <a:srgbClr val="14161C"/>
-                </a:solidFill>
-                <a:latin typeface="Be Vietnam Pro" pitchFamily="34" charset="0"/>
-                <a:ea typeface="Be Vietnam Pro" pitchFamily="34" charset="-122"/>
-                <a:cs typeface="Be Vietnam Pro" pitchFamily="34" charset="-120"/>
-              </a:rPr>
-              <a:t> một</a:t>
-            </a:r>
-            <a:r>
-              <a:rPr lang="en-US" sz="2850" dirty="0" spc="-2" kern="0">
-                <a:solidFill>
-                  <a:srgbClr val="14161C"/>
-                </a:solidFill>
-                <a:latin typeface="Be Vietnam Pro" pitchFamily="34" charset="0"/>
-                <a:ea typeface="Be Vietnam Pro" pitchFamily="34" charset="-122"/>
-                <a:cs typeface="Be Vietnam Pro" pitchFamily="34" charset="-120"/>
-              </a:rPr>
-              <a:t> dòng</a:t>
-            </a:r>
-            <a:r>
-              <a:rPr lang="en-US" sz="2850" dirty="0" spc="-1" kern="0">
-                <a:solidFill>
-                  <a:srgbClr val="14161C"/>
-                </a:solidFill>
-                <a:latin typeface="Be Vietnam Pro" pitchFamily="34" charset="0"/>
-                <a:ea typeface="Be Vietnam Pro" pitchFamily="34" charset="-122"/>
-                <a:cs typeface="Be Vietnam Pro" pitchFamily="34" charset="-120"/>
-              </a:rPr>
-              <a:t> mô</a:t>
+              <a:t>Hai</a:t>
+            </a:r>
+            <a:r>
+              <a:rPr lang="en-US" sz="2850" dirty="0" spc="-11" kern="0">
+                <a:solidFill>
+                  <a:srgbClr val="14161C"/>
+                </a:solidFill>
+                <a:latin typeface="Be Vietnam Pro" pitchFamily="34" charset="0"/>
+                <a:ea typeface="Be Vietnam Pro" pitchFamily="34" charset="-122"/>
+                <a:cs typeface="Be Vietnam Pro" pitchFamily="34" charset="-120"/>
+              </a:rPr>
+              <a:t> thuật</a:t>
             </a:r>
             <a:r>
               <a:rPr lang="en-US" sz="2850" dirty="0" spc="-14" kern="0">
@@ -5043,7 +5021,73 @@
                 <a:ea typeface="Be Vietnam Pro" pitchFamily="34" charset="-122"/>
                 <a:cs typeface="Be Vietnam Pro" pitchFamily="34" charset="-120"/>
               </a:rPr>
-              <a:t> tả.</a:t>
+              <a:t> toán</a:t>
+            </a:r>
+            <a:r>
+              <a:rPr lang="en-US" sz="2850" dirty="0" spc="-4" kern="0">
+                <a:solidFill>
+                  <a:srgbClr val="14161C"/>
+                </a:solidFill>
+                <a:latin typeface="Be Vietnam Pro" pitchFamily="34" charset="0"/>
+                <a:ea typeface="Be Vietnam Pro" pitchFamily="34" charset="-122"/>
+                <a:cs typeface="Be Vietnam Pro" pitchFamily="34" charset="-120"/>
+              </a:rPr>
+              <a:t> học</a:t>
+            </a:r>
+            <a:r>
+              <a:rPr lang="en-US" sz="2850" dirty="0" spc="-11" kern="0">
+                <a:solidFill>
+                  <a:srgbClr val="14161C"/>
+                </a:solidFill>
+                <a:latin typeface="Be Vietnam Pro" pitchFamily="34" charset="0"/>
+                <a:ea typeface="Be Vietnam Pro" pitchFamily="34" charset="-122"/>
+                <a:cs typeface="Be Vietnam Pro" pitchFamily="34" charset="-120"/>
+              </a:rPr>
+              <a:t> máy</a:t>
+            </a:r>
+            <a:r>
+              <a:rPr lang="en-US" sz="2850" dirty="0" spc="0" kern="0">
+                <a:solidFill>
+                  <a:srgbClr val="14161C"/>
+                </a:solidFill>
+                <a:latin typeface="Be Vietnam Pro" pitchFamily="34" charset="0"/>
+                <a:ea typeface="Be Vietnam Pro" pitchFamily="34" charset="-122"/>
+                <a:cs typeface="Be Vietnam Pro" pitchFamily="34" charset="-120"/>
+              </a:rPr>
+              <a:t> chỉ</a:t>
+            </a:r>
+            <a:r>
+              <a:rPr lang="en-US" sz="2850" dirty="0" spc="10" kern="0">
+                <a:solidFill>
+                  <a:srgbClr val="14161C"/>
+                </a:solidFill>
+                <a:latin typeface="Be Vietnam Pro" pitchFamily="34" charset="0"/>
+                <a:ea typeface="Be Vietnam Pro" pitchFamily="34" charset="-122"/>
+                <a:cs typeface="Be Vietnam Pro" pitchFamily="34" charset="-120"/>
+              </a:rPr>
+              <a:t> đọc</a:t>
+            </a:r>
+            <a:r>
+              <a:rPr lang="en-US" sz="2850" dirty="0" spc="-14" kern="0">
+                <a:solidFill>
+                  <a:srgbClr val="14161C"/>
+                </a:solidFill>
+                <a:latin typeface="Be Vietnam Pro" pitchFamily="34" charset="0"/>
+                <a:ea typeface="Be Vietnam Pro" pitchFamily="34" charset="-122"/>
+                <a:cs typeface="Be Vietnam Pro" pitchFamily="34" charset="-120"/>
+              </a:rPr>
+              <a:t> tài</a:t>
+            </a:r>
+            <a:r>
+              <a:rPr lang="en-US" sz="2850" dirty="0" spc="2" kern="0">
+                <a:solidFill>
+                  <a:srgbClr val="14161C"/>
+                </a:solidFill>
+                <a:latin typeface="Be Vietnam Pro" pitchFamily="34" charset="0"/>
+                <a:ea typeface="Be Vietnam Pro" pitchFamily="34" charset="-122"/>
+                <a:cs typeface="Be Vietnam Pro" pitchFamily="34" charset="-120"/>
+              </a:rPr>
+              <a:t> liệu.</a:t>
             </a:r>
             <a:endParaRPr lang="en-US" sz="2850" dirty="0"/>
           </a:p>
@@ -5051,7 +5095,7 @@
       </p:sp>
       <p:sp>
         <p:nvSpPr>
-          <p:cNvPr id="30" name="Text richtext-1792338714392-90064223"/>
+          <p:cNvPr id="30" name="Text 28"/>
           <p:cNvSpPr/>
           <p:nvPr/>
         </p:nvSpPr>
@@ -5070,16 +5114,14 @@
           <a:bodyPr wrap="square" lIns="0" tIns="5667" rIns="0" bIns="-5667" rtlCol="0" anchor="t"/>
           <a:lstStyle/>
           <a:p>
-            <a:pPr algn="l" marL="323850" indent="-231371">
+            <a:pPr algn="l" indent="0" marL="0">
               <a:lnSpc>
                 <a:spcPts val="3570"/>
               </a:lnSpc>
               <a:spcAft>
                 <a:spcPts val="1050"/>
               </a:spcAft>
-              <a:buSzPct val="100000"/>
-              <a:buFont typeface="Arial"/>
-              <a:buChar char="•"/>
+              <a:buNone/>
             </a:pPr>
             <a:r>
               <a:rPr lang="en-US" sz="2550" dirty="0" spc="1" kern="0">
@@ -5136,43 +5178,41 @@
               </a:rPr>
               <a:t> toán</a:t>
             </a:r>
-            <a:r>
-              <a:rPr lang="en-US" sz="2550" dirty="0" spc="-2" kern="0">
-                <a:solidFill>
-                  <a:srgbClr val="14161C"/>
-                </a:solidFill>
-                <a:latin typeface="Be Vietnam Pro" pitchFamily="34" charset="0"/>
-                <a:ea typeface="Be Vietnam Pro" pitchFamily="34" charset="-122"/>
-                <a:cs typeface="Be Vietnam Pro" pitchFamily="34" charset="-120"/>
-              </a:rPr>
-              <a:t> của</a:t>
-            </a:r>
-            <a:r>
-              <a:rPr lang="en-US" sz="2550" dirty="0" spc="1" kern="0">
-                <a:solidFill>
-                  <a:srgbClr val="14161C"/>
-                </a:solidFill>
-                <a:latin typeface="Be Vietnam Pro" pitchFamily="34" charset="0"/>
-                <a:ea typeface="Be Vietnam Pro" pitchFamily="34" charset="-122"/>
-                <a:cs typeface="Be Vietnam Pro" pitchFamily="34" charset="-120"/>
-              </a:rPr>
-              <a:t> nguồn</a:t>
-            </a:r>
             <a:endParaRPr lang="en-US" sz="2550" dirty="0"/>
           </a:p>
           <a:p>
-            <a:pPr algn="l" marL="323850" indent="-231371">
+            <a:pPr algn="l" indent="0" marL="0">
               <a:lnSpc>
                 <a:spcPts val="3570"/>
               </a:lnSpc>
               <a:spcAft>
                 <a:spcPts val="1050"/>
               </a:spcAft>
-              <a:buSzPct val="100000"/>
-              <a:buFont typeface="Arial"/>
-              <a:buChar char="•"/>
+              <a:buNone/>
             </a:pPr>
             <a:r>
+              <a:rPr lang="en-US" sz="2550" dirty="0" spc="-11" kern="0">
+                <a:solidFill>
+                  <a:srgbClr val="14161C"/>
+                </a:solidFill>
+                <a:latin typeface="Be Vietnam Pro" pitchFamily="34" charset="0"/>
+                <a:ea typeface="Be Vietnam Pro" pitchFamily="34" charset="-122"/>
+                <a:cs typeface="Be Vietnam Pro" pitchFamily="34" charset="-120"/>
+              </a:rPr>
+              <a:t>Thấy</a:t>
+            </a:r>
+            <a:r>
+              <a:rPr lang="en-US" sz="2550" dirty="0" spc="-32" kern="0">
+                <a:solidFill>
+                  <a:srgbClr val="14161C"/>
+                </a:solidFill>
+                <a:latin typeface="Be Vietnam Pro" pitchFamily="34" charset="0"/>
+                <a:ea typeface="Be Vietnam Pro" pitchFamily="34" charset="-122"/>
+                <a:cs typeface="Be Vietnam Pro" pitchFamily="34" charset="-120"/>
+              </a:rPr>
+              <a:t> kết</a:t>
+            </a:r>
+            <a:r>
               <a:rPr lang="en-US" sz="2550" dirty="0" spc="1" kern="0">
                 <a:solidFill>
                   <a:srgbClr val="14161C"/>
@@ -5181,7 +5221,7 @@
                 <a:ea typeface="Be Vietnam Pro" pitchFamily="34" charset="-122"/>
                 <a:cs typeface="Be Vietnam Pro" pitchFamily="34" charset="-120"/>
               </a:rPr>
-              <a:t>Hiểu</a:t>
+              <a:t> quả</a:t>
             </a:r>
             <a:r>
               <a:rPr lang="en-US" sz="2550" dirty="0" spc="-1" kern="0">
@@ -5192,40 +5232,18 @@
                 <a:ea typeface="Be Vietnam Pro" pitchFamily="34" charset="-122"/>
                 <a:cs typeface="Be Vietnam Pro" pitchFamily="34" charset="-120"/>
               </a:rPr>
-              <a:t> mỗi</a:t>
-            </a:r>
-            <a:r>
-              <a:rPr lang="en-US" sz="2550" dirty="0" spc="-11" kern="0">
-                <a:solidFill>
-                  <a:srgbClr val="14161C"/>
-                </a:solidFill>
-                <a:latin typeface="Be Vietnam Pro" pitchFamily="34" charset="0"/>
-                <a:ea typeface="Be Vietnam Pro" pitchFamily="34" charset="-122"/>
-                <a:cs typeface="Be Vietnam Pro" pitchFamily="34" charset="-120"/>
-              </a:rPr>
-              <a:t> tên</a:t>
-            </a:r>
-            <a:r>
-              <a:rPr lang="en-US" sz="2550" dirty="0" spc="1" kern="0">
-                <a:solidFill>
-                  <a:srgbClr val="14161C"/>
-                </a:solidFill>
-                <a:latin typeface="Be Vietnam Pro" pitchFamily="34" charset="0"/>
-                <a:ea typeface="Be Vietnam Pro" pitchFamily="34" charset="-122"/>
-                <a:cs typeface="Be Vietnam Pro" pitchFamily="34" charset="-120"/>
-              </a:rPr>
-              <a:t> qua</a:t>
-            </a:r>
-            <a:r>
-              <a:rPr lang="en-US" sz="2550" dirty="0" spc="-5" kern="0">
-                <a:solidFill>
-                  <a:srgbClr val="14161C"/>
-                </a:solidFill>
-                <a:latin typeface="Be Vietnam Pro" pitchFamily="34" charset="0"/>
-                <a:ea typeface="Be Vietnam Pro" pitchFamily="34" charset="-122"/>
-                <a:cs typeface="Be Vietnam Pro" pitchFamily="34" charset="-120"/>
-              </a:rPr>
-              <a:t> một</a:t>
+              <a:t> của</a:t>
+            </a:r>
+            <a:r>
+              <a:rPr lang="en-US" sz="2550" dirty="0" spc="20" kern="0">
+                <a:solidFill>
+                  <a:srgbClr val="14161C"/>
+                </a:solidFill>
+                <a:latin typeface="Be Vietnam Pro" pitchFamily="34" charset="0"/>
+                <a:ea typeface="Be Vietnam Pro" pitchFamily="34" charset="-122"/>
+                <a:cs typeface="Be Vietnam Pro" pitchFamily="34" charset="-120"/>
+              </a:rPr>
+              <a:t> từng</a:t>
             </a:r>
             <a:r>
               <a:rPr lang="en-US" sz="2550" dirty="0" spc="0" kern="0">
@@ -5236,40 +5254,27 @@
                 <a:ea typeface="Be Vietnam Pro" pitchFamily="34" charset="-122"/>
                 <a:cs typeface="Be Vietnam Pro" pitchFamily="34" charset="-120"/>
               </a:rPr>
-              <a:t> dòng</a:t>
-            </a:r>
-            <a:r>
-              <a:rPr lang="en-US" sz="2550" dirty="0" spc="-12" kern="0">
-                <a:solidFill>
-                  <a:srgbClr val="14161C"/>
-                </a:solidFill>
-                <a:latin typeface="Be Vietnam Pro" pitchFamily="34" charset="0"/>
-                <a:ea typeface="Be Vietnam Pro" pitchFamily="34" charset="-122"/>
-                <a:cs typeface="Be Vietnam Pro" pitchFamily="34" charset="-120"/>
-              </a:rPr>
-              <a:t> tài</a:t>
-            </a:r>
-            <a:r>
-              <a:rPr lang="en-US" sz="2550" dirty="0" spc="1" kern="0">
-                <a:solidFill>
-                  <a:srgbClr val="14161C"/>
-                </a:solidFill>
-                <a:latin typeface="Be Vietnam Pro" pitchFamily="34" charset="0"/>
-                <a:ea typeface="Be Vietnam Pro" pitchFamily="34" charset="-122"/>
-                <a:cs typeface="Be Vietnam Pro" pitchFamily="34" charset="-120"/>
-              </a:rPr>
-              <a:t> liệu</a:t>
+              <a:t> phép</a:t>
+            </a:r>
+            <a:r>
+              <a:rPr lang="en-US" sz="2550" dirty="0" spc="-1" kern="0">
+                <a:solidFill>
+                  <a:srgbClr val="14161C"/>
+                </a:solidFill>
+                <a:latin typeface="Be Vietnam Pro" pitchFamily="34" charset="0"/>
+                <a:ea typeface="Be Vietnam Pro" pitchFamily="34" charset="-122"/>
+                <a:cs typeface="Be Vietnam Pro" pitchFamily="34" charset="-120"/>
+              </a:rPr>
+              <a:t> thử</a:t>
             </a:r>
             <a:endParaRPr lang="en-US" sz="2550" dirty="0"/>
           </a:p>
           <a:p>
-            <a:pPr algn="l" marL="323850" indent="-231371">
+            <a:pPr algn="l" indent="0" marL="0">
               <a:lnSpc>
                 <a:spcPts val="3570"/>
               </a:lnSpc>
-              <a:buSzPct val="100000"/>
-              <a:buFont typeface="Arial"/>
-              <a:buChar char="•"/>
+              <a:buNone/>
             </a:pPr>
             <a:r>
               <a:rPr lang="en-US" sz="2550" dirty="0" spc="-4" kern="0">
@@ -5291,7 +5296,18 @@
                 <a:ea typeface="Be Vietnam Pro" pitchFamily="34" charset="-122"/>
                 <a:cs typeface="Be Vietnam Pro" pitchFamily="34" charset="-120"/>
               </a:rPr>
-              <a:t> nguồn</a:t>
+              <a:t> phép</a:t>
+            </a:r>
+            <a:r>
+              <a:rPr lang="en-US" sz="2550" dirty="0" spc="-1" kern="0">
+                <a:solidFill>
+                  <a:srgbClr val="14161C"/>
+                </a:solidFill>
+                <a:latin typeface="Be Vietnam Pro" pitchFamily="34" charset="0"/>
+                <a:ea typeface="Be Vietnam Pro" pitchFamily="34" charset="-122"/>
+                <a:cs typeface="Be Vietnam Pro" pitchFamily="34" charset="-120"/>
+              </a:rPr>
+              <a:t> thử</a:t>
             </a:r>
             <a:r>
               <a:rPr lang="en-US" sz="2550" dirty="0" spc="0" kern="0">
@@ -5302,18 +5318,18 @@
                 <a:ea typeface="Be Vietnam Pro" pitchFamily="34" charset="-122"/>
                 <a:cs typeface="Be Vietnam Pro" pitchFamily="34" charset="-120"/>
               </a:rPr>
-              <a:t> không</a:t>
-            </a:r>
-            <a:r>
-              <a:rPr lang="en-US" sz="2550" dirty="0" spc="-12" kern="0">
-                <a:solidFill>
-                  <a:srgbClr val="14161C"/>
-                </a:solidFill>
-                <a:latin typeface="Be Vietnam Pro" pitchFamily="34" charset="0"/>
-                <a:ea typeface="Be Vietnam Pro" pitchFamily="34" charset="-122"/>
-                <a:cs typeface="Be Vietnam Pro" pitchFamily="34" charset="-120"/>
-              </a:rPr>
-              <a:t> gán</a:t>
+              <a:t> chỉ</a:t>
+            </a:r>
+            <a:r>
+              <a:rPr lang="en-US" sz="2550" dirty="0" spc="1" kern="0">
+                <a:solidFill>
+                  <a:srgbClr val="14161C"/>
+                </a:solidFill>
+                <a:latin typeface="Be Vietnam Pro" pitchFamily="34" charset="0"/>
+                <a:ea typeface="Be Vietnam Pro" pitchFamily="34" charset="-122"/>
+                <a:cs typeface="Be Vietnam Pro" pitchFamily="34" charset="-120"/>
+              </a:rPr>
+              <a:t> là</a:t>
             </a:r>
             <a:r>
               <a:rPr lang="en-US" sz="2550" dirty="0" spc="-1" kern="0">
@@ -5324,7 +5340,18 @@
                 <a:ea typeface="Be Vietnam Pro" pitchFamily="34" charset="-122"/>
                 <a:cs typeface="Be Vietnam Pro" pitchFamily="34" charset="-120"/>
               </a:rPr>
-              <a:t> nơi dùng</a:t>
+              <a:t> minh</a:t>
+            </a:r>
+            <a:r>
+              <a:rPr lang="en-US" sz="2550" dirty="0" spc="-3" kern="0">
+                <a:solidFill>
+                  <a:srgbClr val="14161C"/>
+                </a:solidFill>
+                <a:latin typeface="Be Vietnam Pro" pitchFamily="34" charset="0"/>
+                <a:ea typeface="Be Vietnam Pro" pitchFamily="34" charset="-122"/>
+                <a:cs typeface="Be Vietnam Pro" pitchFamily="34" charset="-120"/>
+              </a:rPr>
+              <a:t> họa</a:t>
             </a:r>
             <a:endParaRPr lang="en-US" sz="2550" dirty="0"/>
           </a:p>
@@ -5999,15 +6026,26 @@
               <a:buNone/>
             </a:pPr>
             <a:r>
-              <a:rPr lang="en-US" sz="2250" b="1" dirty="0" spc="3" kern="0">
-                <a:solidFill>
-                  <a:srgbClr val="14161C"/>
-                </a:solidFill>
-                <a:latin typeface="Be Vietnam Pro" pitchFamily="34" charset="0"/>
-                <a:ea typeface="Be Vietnam Pro" pitchFamily="34" charset="-122"/>
-                <a:cs typeface="Be Vietnam Pro" pitchFamily="34" charset="-120"/>
-              </a:rPr>
-              <a:t>Timsort</a:t>
+              <a:rPr lang="en-US" sz="2250" b="1" dirty="0" spc="-6" kern="0">
+                <a:solidFill>
+                  <a:srgbClr val="14161C"/>
+                </a:solidFill>
+                <a:latin typeface="Be Vietnam Pro" pitchFamily="34" charset="0"/>
+                <a:ea typeface="Be Vietnam Pro" pitchFamily="34" charset="-122"/>
+                <a:cs typeface="Be Vietnam Pro" pitchFamily="34" charset="-120"/>
+              </a:rPr>
+              <a:t>ổn</a:t>
+            </a:r>
+            <a:r>
+              <a:rPr lang="en-US" sz="2250" b="1" dirty="0" spc="15" kern="0">
+                <a:solidFill>
+                  <a:srgbClr val="14161C"/>
+                </a:solidFill>
+                <a:latin typeface="Be Vietnam Pro" pitchFamily="34" charset="0"/>
+                <a:ea typeface="Be Vietnam Pro" pitchFamily="34" charset="-122"/>
+                <a:cs typeface="Be Vietnam Pro" pitchFamily="34" charset="-120"/>
+              </a:rPr>
+              <a:t> định</a:t>
             </a:r>
             <a:endParaRPr lang="en-US" sz="2250" dirty="0"/>
           </a:p>
@@ -6042,15 +6080,48 @@
               <a:buNone/>
             </a:pPr>
             <a:r>
-              <a:rPr lang="en-US" sz="2250" b="1" dirty="0" spc="-17" kern="0">
-                <a:solidFill>
-                  <a:srgbClr val="14161C"/>
-                </a:solidFill>
-                <a:latin typeface="Be Vietnam Pro" pitchFamily="34" charset="0"/>
-                <a:ea typeface="Be Vietnam Pro" pitchFamily="34" charset="-122"/>
-                <a:cs typeface="Be Vietnam Pro" pitchFamily="34" charset="-120"/>
-              </a:rPr>
-              <a:t>Dijkstra</a:t>
+              <a:rPr lang="en-US" sz="2250" b="1" dirty="0" spc="5" kern="0">
+                <a:solidFill>
+                  <a:srgbClr val="14161C"/>
+                </a:solidFill>
+                <a:latin typeface="Be Vietnam Pro" pitchFamily="34" charset="0"/>
+                <a:ea typeface="Be Vietnam Pro" pitchFamily="34" charset="-122"/>
+                <a:cs typeface="Be Vietnam Pro" pitchFamily="34" charset="-120"/>
+              </a:rPr>
+              <a:t>A</a:t>
+            </a:r>
+            <a:r>
+              <a:rPr lang="en-US" sz="2250" b="1" dirty="0" spc="4" kern="0">
+                <a:solidFill>
+                  <a:srgbClr val="14161C"/>
+                </a:solidFill>
+                <a:latin typeface="Be Vietnam Pro" pitchFamily="34" charset="0"/>
+                <a:ea typeface="Be Vietnam Pro" pitchFamily="34" charset="-122"/>
+                <a:cs typeface="Be Vietnam Pro" pitchFamily="34" charset="-120"/>
+              </a:rPr>
+              <a:t> tới</a:t>
+            </a:r>
+            <a:r>
+              <a:rPr lang="en-US" sz="2250" b="1" dirty="0" spc="3" kern="0">
+                <a:solidFill>
+                  <a:srgbClr val="14161C"/>
+                </a:solidFill>
+                <a:latin typeface="Be Vietnam Pro" pitchFamily="34" charset="0"/>
+                <a:ea typeface="Be Vietnam Pro" pitchFamily="34" charset="-122"/>
+                <a:cs typeface="Be Vietnam Pro" pitchFamily="34" charset="-120"/>
+              </a:rPr>
+              <a:t> D:</a:t>
+            </a:r>
+            <a:r>
+              <a:rPr lang="en-US" sz="2250" b="1" dirty="0" spc="0" kern="0">
+                <a:solidFill>
+                  <a:srgbClr val="14161C"/>
+                </a:solidFill>
+                <a:latin typeface="Be Vietnam Pro" pitchFamily="34" charset="0"/>
+                <a:ea typeface="Be Vietnam Pro" pitchFamily="34" charset="-122"/>
+                <a:cs typeface="Be Vietnam Pro" pitchFamily="34" charset="-120"/>
+              </a:rPr>
+              <a:t> 4</a:t>
             </a:r>
             <a:endParaRPr lang="en-US" sz="2250" dirty="0"/>
           </a:p>
@@ -6085,15 +6156,15 @@
               <a:buNone/>
             </a:pPr>
             <a:r>
-              <a:rPr lang="en-US" sz="2250" b="1" dirty="0" spc="-22" kern="0">
-                <a:solidFill>
-                  <a:srgbClr val="14161C"/>
-                </a:solidFill>
-                <a:latin typeface="Be Vietnam Pro" pitchFamily="34" charset="0"/>
-                <a:ea typeface="Be Vietnam Pro" pitchFamily="34" charset="-122"/>
-                <a:cs typeface="Be Vietnam Pro" pitchFamily="34" charset="-120"/>
-              </a:rPr>
-              <a:t>PageRank</a:t>
+              <a:rPr lang="en-US" sz="2250" b="1" dirty="0" spc="3" kern="0">
+                <a:solidFill>
+                  <a:srgbClr val="14161C"/>
+                </a:solidFill>
+                <a:latin typeface="Be Vietnam Pro" pitchFamily="34" charset="0"/>
+                <a:ea typeface="Be Vietnam Pro" pitchFamily="34" charset="-122"/>
+                <a:cs typeface="Be Vietnam Pro" pitchFamily="34" charset="-120"/>
+              </a:rPr>
+              <a:t>c: 0,39</a:t>
             </a:r>
             <a:endParaRPr lang="en-US" sz="2250" dirty="0"/>
           </a:p>
@@ -6204,7 +6275,7 @@
               <a:buNone/>
             </a:pPr>
             <a:r>
-              <a:rPr lang="en-US" sz="2550" dirty="0" spc="-39" kern="0">
+              <a:rPr lang="en-US" sz="2550" dirty="0" spc="-1" kern="0">
                 <a:solidFill>
                   <a:srgbClr val="F3EEE3"/>
                 </a:solidFill>
@@ -6212,7 +6283,18 @@
                 <a:ea typeface="Be Vietnam Pro" pitchFamily="34" charset="-122"/>
                 <a:cs typeface="Be Vietnam Pro" pitchFamily="34" charset="-120"/>
               </a:rPr>
-              <a:t>Với</a:t>
+              <a:t>Mỗi</a:t>
+            </a:r>
+            <a:r>
+              <a:rPr lang="en-US" sz="2550" dirty="0" spc="-11" kern="0">
+                <a:solidFill>
+                  <a:srgbClr val="F3EEE3"/>
+                </a:solidFill>
+                <a:latin typeface="Be Vietnam Pro" pitchFamily="34" charset="0"/>
+                <a:ea typeface="Be Vietnam Pro" pitchFamily="34" charset="-122"/>
+                <a:cs typeface="Be Vietnam Pro" pitchFamily="34" charset="-120"/>
+              </a:rPr>
+              <a:t> tên</a:t>
             </a:r>
             <a:r>
               <a:rPr lang="en-US" sz="2550" dirty="0" spc="0" kern="0">
@@ -6223,10 +6305,10 @@
                 <a:ea typeface="Be Vietnam Pro" pitchFamily="34" charset="-122"/>
                 <a:cs typeface="Be Vietnam Pro" pitchFamily="34" charset="-120"/>
               </a:rPr>
-              <a:t> mỗi</a:t>
-            </a:r>
-            <a:r>
-              <a:rPr lang="en-US" sz="2550" dirty="0" spc="-10" kern="0">
+              <a:t> có</a:t>
+            </a:r>
+            <a:r>
+              <a:rPr lang="en-US" sz="2550" dirty="0" spc="-5" kern="0">
                 <a:solidFill>
                   <a:srgbClr val="F3EEE3"/>
                 </a:solidFill>
@@ -6234,10 +6316,10 @@
                 <a:ea typeface="Be Vietnam Pro" pitchFamily="34" charset="-122"/>
                 <a:cs typeface="Be Vietnam Pro" pitchFamily="34" charset="-120"/>
               </a:rPr>
-              <a:t> tên,</a:t>
-            </a:r>
-            <a:r>
-              <a:rPr lang="en-US" sz="2550" dirty="0" spc="-3" kern="0">
+              <a:t> một</a:t>
+            </a:r>
+            <a:r>
+              <a:rPr lang="en-US" sz="2550" dirty="0" spc="0" kern="0">
                 <a:solidFill>
                   <a:srgbClr val="F3EEE3"/>
                 </a:solidFill>
@@ -6245,10 +6327,10 @@
                 <a:ea typeface="Be Vietnam Pro" pitchFamily="34" charset="-122"/>
                 <a:cs typeface="Be Vietnam Pro" pitchFamily="34" charset="-120"/>
               </a:rPr>
-              <a:t> bài</a:t>
-            </a:r>
-            <a:r>
-              <a:rPr lang="en-US" sz="2550" dirty="0" spc="1" kern="0">
+              <a:t> phép</a:t>
+            </a:r>
+            <a:r>
+              <a:rPr lang="en-US" sz="2550" dirty="0" spc="-1" kern="0">
                 <a:solidFill>
                   <a:srgbClr val="F3EEE3"/>
                 </a:solidFill>
@@ -6256,10 +6338,10 @@
                 <a:ea typeface="Be Vietnam Pro" pitchFamily="34" charset="-122"/>
                 <a:cs typeface="Be Vietnam Pro" pitchFamily="34" charset="-120"/>
               </a:rPr>
-              <a:t> chỉ</a:t>
-            </a:r>
-            <a:r>
-              <a:rPr lang="en-US" sz="2550" dirty="0" spc="12" kern="0">
+              <a:t> thử</a:t>
+            </a:r>
+            <a:r>
+              <a:rPr lang="en-US" sz="2550" dirty="0" spc="0" kern="0">
                 <a:solidFill>
                   <a:srgbClr val="F3EEE3"/>
                 </a:solidFill>
@@ -6267,62 +6349,7 @@
                 <a:ea typeface="Be Vietnam Pro" pitchFamily="34" charset="-122"/>
                 <a:cs typeface="Be Vietnam Pro" pitchFamily="34" charset="-120"/>
               </a:rPr>
-              <a:t> đối</a:t>
-            </a:r>
-            <a:r>
-              <a:rPr lang="en-US" sz="2550" dirty="0" spc="1" kern="0">
-                <a:solidFill>
-                  <a:srgbClr val="F3EEE3"/>
-                </a:solidFill>
-                <a:latin typeface="Be Vietnam Pro" pitchFamily="34" charset="0"/>
-                <a:ea typeface="Be Vietnam Pro" pitchFamily="34" charset="-122"/>
-                <a:cs typeface="Be Vietnam Pro" pitchFamily="34" charset="-120"/>
-              </a:rPr>
-              <a:t> chiếu</a:t>
-            </a:r>
-            <a:r>
-              <a:rPr lang="en-US" sz="2550" dirty="0" spc="-5" kern="0">
-                <a:solidFill>
-                  <a:srgbClr val="F3EEE3"/>
-                </a:solidFill>
-                <a:latin typeface="Be Vietnam Pro" pitchFamily="34" charset="0"/>
-                <a:ea typeface="Be Vietnam Pro" pitchFamily="34" charset="-122"/>
-                <a:cs typeface="Be Vietnam Pro" pitchFamily="34" charset="-120"/>
-              </a:rPr>
-              <a:t> một</a:t>
-            </a:r>
-            <a:r>
-              <a:rPr lang="en-US" sz="2550" dirty="0" spc="-1" kern="0">
-                <a:solidFill>
-                  <a:srgbClr val="F3EEE3"/>
-                </a:solidFill>
-                <a:latin typeface="Be Vietnam Pro" pitchFamily="34" charset="0"/>
-                <a:ea typeface="Be Vietnam Pro" pitchFamily="34" charset="-122"/>
-                <a:cs typeface="Be Vietnam Pro" pitchFamily="34" charset="-120"/>
-              </a:rPr>
-              <a:t> ví</a:t>
-            </a:r>
-            <a:r>
-              <a:rPr lang="en-US" sz="2550" dirty="0" spc="-2" kern="0">
-                <a:solidFill>
-                  <a:srgbClr val="F3EEE3"/>
-                </a:solidFill>
-                <a:latin typeface="Be Vietnam Pro" pitchFamily="34" charset="0"/>
-                <a:ea typeface="Be Vietnam Pro" pitchFamily="34" charset="-122"/>
-                <a:cs typeface="Be Vietnam Pro" pitchFamily="34" charset="-120"/>
-              </a:rPr>
-              <a:t> dụ</a:t>
-            </a:r>
-            <a:r>
-              <a:rPr lang="en-US" sz="2550" dirty="0" spc="-1" kern="0">
-                <a:solidFill>
-                  <a:srgbClr val="F3EEE3"/>
-                </a:solidFill>
-                <a:latin typeface="Be Vietnam Pro" pitchFamily="34" charset="0"/>
-                <a:ea typeface="Be Vietnam Pro" pitchFamily="34" charset="-122"/>
-                <a:cs typeface="Be Vietnam Pro" pitchFamily="34" charset="-120"/>
-              </a:rPr>
-              <a:t> từ thư viện.</a:t>
+              <a:t> nhỏ.</a:t>
             </a:r>
             <a:endParaRPr lang="en-US" sz="2550" dirty="0"/>
           </a:p>
@@ -6569,7 +6596,7 @@
       </p:sp>
       <p:sp>
         <p:nvSpPr>
-          <p:cNvPr id="20" name="Text richtext-1792338842699-93796835"/>
+          <p:cNvPr id="20" name="Text 18"/>
           <p:cNvSpPr/>
           <p:nvPr/>
         </p:nvSpPr>
@@ -6588,19 +6615,17 @@
           <a:bodyPr wrap="square" lIns="0" tIns="8001" rIns="0" bIns="-8001" rtlCol="0" anchor="t"/>
           <a:lstStyle/>
           <a:p>
-            <a:pPr algn="l" marL="266700" indent="-190541">
+            <a:pPr algn="l" indent="0" marL="0">
               <a:lnSpc>
                 <a:spcPts val="2835"/>
               </a:lnSpc>
               <a:spcAft>
                 <a:spcPts val="600"/>
               </a:spcAft>
-              <a:buSzPct val="100000"/>
-              <a:buFont typeface="Arial"/>
-              <a:buChar char="•"/>
+              <a:buNone/>
             </a:pPr>
             <a:r>
-              <a:rPr lang="en-US" sz="2100" dirty="0" spc="-29" kern="0">
+              <a:rPr lang="en-US" sz="2100" dirty="0" spc="2" kern="0">
                 <a:solidFill>
                   <a:srgbClr val="C4C8D6"/>
                 </a:solidFill>
@@ -6608,10 +6633,10 @@
                 <a:ea typeface="Be Vietnam Pro" pitchFamily="34" charset="-122"/>
                 <a:cs typeface="Be Vietnam Pro" pitchFamily="34" charset="-120"/>
               </a:rPr>
-              <a:t>Xếp</a:t>
-            </a:r>
-            <a:r>
-              <a:rPr lang="en-US" sz="2100" dirty="0" spc="-2" kern="0">
+              <a:t>Cùng</a:t>
+            </a:r>
+            <a:r>
+              <a:rPr lang="en-US" sz="2100" dirty="0" spc="-4" kern="0">
                 <a:solidFill>
                   <a:srgbClr val="C4C8D6"/>
                 </a:solidFill>
@@ -6619,7 +6644,29 @@
                 <a:ea typeface="Be Vietnam Pro" pitchFamily="34" charset="-122"/>
                 <a:cs typeface="Be Vietnam Pro" pitchFamily="34" charset="-120"/>
               </a:rPr>
-              <a:t> phần</a:t>
+              <a:t> khóa</a:t>
+            </a:r>
+            <a:r>
+              <a:rPr lang="en-US" sz="2100" dirty="0" spc="0" kern="0">
+                <a:solidFill>
+                  <a:srgbClr val="C4C8D6"/>
+                </a:solidFill>
+                <a:latin typeface="Be Vietnam Pro" pitchFamily="34" charset="0"/>
+                <a:ea typeface="Be Vietnam Pro" pitchFamily="34" charset="-122"/>
+                <a:cs typeface="Be Vietnam Pro" pitchFamily="34" charset="-120"/>
+              </a:rPr>
+              <a:t> thì</a:t>
+            </a:r>
+            <a:r>
+              <a:rPr lang="en-US" sz="2100" dirty="0" spc="1" kern="0">
+                <a:solidFill>
+                  <a:srgbClr val="C4C8D6"/>
+                </a:solidFill>
+                <a:latin typeface="Be Vietnam Pro" pitchFamily="34" charset="0"/>
+                <a:ea typeface="Be Vietnam Pro" pitchFamily="34" charset="-122"/>
+                <a:cs typeface="Be Vietnam Pro" pitchFamily="34" charset="-120"/>
+              </a:rPr>
+              <a:t> giữ</a:t>
             </a:r>
             <a:r>
               <a:rPr lang="en-US" sz="2100" dirty="0" spc="-1" kern="0">
@@ -6630,10 +6677,10 @@
                 <a:ea typeface="Be Vietnam Pro" pitchFamily="34" charset="-122"/>
                 <a:cs typeface="Be Vietnam Pro" pitchFamily="34" charset="-120"/>
               </a:rPr>
-              <a:t> tử</a:t>
-            </a:r>
-            <a:r>
-              <a:rPr lang="en-US" sz="2100" dirty="0" spc="-5" kern="0">
+              <a:t> thứ</a:t>
+            </a:r>
+            <a:r>
+              <a:rPr lang="en-US" sz="2100" dirty="0" spc="0" kern="0">
                 <a:solidFill>
                   <a:srgbClr val="C4C8D6"/>
                 </a:solidFill>
@@ -6641,10 +6688,10 @@
                 <a:ea typeface="Be Vietnam Pro" pitchFamily="34" charset="-122"/>
                 <a:cs typeface="Be Vietnam Pro" pitchFamily="34" charset="-120"/>
               </a:rPr>
-              <a:t> theo</a:t>
-            </a:r>
-            <a:r>
-              <a:rPr lang="en-US" sz="2100" dirty="0" spc="0" kern="0">
+              <a:t> tự</a:t>
+            </a:r>
+            <a:r>
+              <a:rPr lang="en-US" sz="2100" dirty="0" spc="-1" kern="0">
                 <a:solidFill>
                   <a:srgbClr val="C4C8D6"/>
                 </a:solidFill>
@@ -6652,35 +6699,22 @@
                 <a:ea typeface="Be Vietnam Pro" pitchFamily="34" charset="-122"/>
                 <a:cs typeface="Be Vietnam Pro" pitchFamily="34" charset="-120"/>
               </a:rPr>
-              <a:t> thứ</a:t>
-            </a:r>
-            <a:r>
-              <a:rPr lang="en-US" sz="2100" dirty="0" spc="-1" kern="0">
-                <a:solidFill>
-                  <a:srgbClr val="C4C8D6"/>
-                </a:solidFill>
-                <a:latin typeface="Be Vietnam Pro" pitchFamily="34" charset="0"/>
-                <a:ea typeface="Be Vietnam Pro" pitchFamily="34" charset="-122"/>
-                <a:cs typeface="Be Vietnam Pro" pitchFamily="34" charset="-120"/>
-              </a:rPr>
-              <a:t> tự</a:t>
+              <a:t> cũ</a:t>
             </a:r>
             <a:endParaRPr lang="en-US" sz="2100" dirty="0"/>
           </a:p>
           <a:p>
-            <a:pPr algn="l" marL="266700" indent="-190541">
+            <a:pPr algn="l" indent="0" marL="0">
               <a:lnSpc>
                 <a:spcPts val="2835"/>
               </a:lnSpc>
               <a:spcAft>
                 <a:spcPts val="600"/>
               </a:spcAft>
-              <a:buSzPct val="100000"/>
-              <a:buFont typeface="Arial"/>
-              <a:buChar char="•"/>
+              <a:buNone/>
             </a:pPr>
             <a:r>
-              <a:rPr lang="en-US" sz="2100" dirty="0" spc="7" kern="0">
+              <a:rPr lang="en-US" sz="2100" dirty="0" spc="6" kern="0">
                 <a:solidFill>
                   <a:srgbClr val="C4C8D6"/>
                 </a:solidFill>
@@ -6688,10 +6722,10 @@
                 <a:ea typeface="Be Vietnam Pro" pitchFamily="34" charset="-122"/>
                 <a:cs typeface="Be Vietnam Pro" pitchFamily="34" charset="-120"/>
               </a:rPr>
-              <a:t>Python</a:t>
-            </a:r>
-            <a:r>
-              <a:rPr lang="en-US" sz="2100" dirty="0" spc="0" kern="0">
+              <a:t>Python:</a:t>
+            </a:r>
+            <a:r>
+              <a:rPr lang="en-US" sz="2100" dirty="0" spc="-2" kern="0">
                 <a:solidFill>
                   <a:srgbClr val="C4C8D6"/>
                 </a:solidFill>
@@ -6699,7 +6733,18 @@
                 <a:ea typeface="Be Vietnam Pro" pitchFamily="34" charset="-122"/>
                 <a:cs typeface="Be Vietnam Pro" pitchFamily="34" charset="-120"/>
               </a:rPr>
-              <a:t> dùng</a:t>
+              <a:t> Timsort,</a:t>
+            </a:r>
+            <a:r>
+              <a:rPr lang="en-US" sz="2100" dirty="0" spc="-18" kern="0">
+                <a:solidFill>
+                  <a:srgbClr val="C4C8D6"/>
+                </a:solidFill>
+                <a:latin typeface="Be Vietnam Pro" pitchFamily="34" charset="0"/>
+                <a:ea typeface="Be Vietnam Pro" pitchFamily="34" charset="-122"/>
+                <a:cs typeface="Be Vietnam Pro" pitchFamily="34" charset="-120"/>
+              </a:rPr>
+              <a:t> xếp</a:t>
             </a:r>
             <a:r>
               <a:rPr lang="en-US" sz="2100" dirty="0" spc="-2" kern="0">
@@ -6710,10 +6755,10 @@
                 <a:ea typeface="Be Vietnam Pro" pitchFamily="34" charset="-122"/>
                 <a:cs typeface="Be Vietnam Pro" pitchFamily="34" charset="-120"/>
               </a:rPr>
-              <a:t> Timsort,</a:t>
-            </a:r>
-            <a:r>
-              <a:rPr lang="en-US" sz="2100" dirty="0" spc="-19" kern="0">
+              <a:t> ổn</a:t>
+            </a:r>
+            <a:r>
+              <a:rPr lang="en-US" sz="2100" dirty="0" spc="18" kern="0">
                 <a:solidFill>
                   <a:srgbClr val="C4C8D6"/>
                 </a:solidFill>
@@ -6721,43 +6766,19 @@
                 <a:ea typeface="Be Vietnam Pro" pitchFamily="34" charset="-122"/>
                 <a:cs typeface="Be Vietnam Pro" pitchFamily="34" charset="-120"/>
               </a:rPr>
-              <a:t> xếp</a:t>
-            </a:r>
-            <a:r>
-              <a:rPr lang="en-US" sz="2100" dirty="0" spc="-2" kern="0">
-                <a:solidFill>
-                  <a:srgbClr val="C4C8D6"/>
-                </a:solidFill>
-                <a:latin typeface="Be Vietnam Pro" pitchFamily="34" charset="0"/>
-                <a:ea typeface="Be Vietnam Pro" pitchFamily="34" charset="-122"/>
-                <a:cs typeface="Be Vietnam Pro" pitchFamily="34" charset="-120"/>
-              </a:rPr>
-              <a:t> ổn</a:t>
-            </a:r>
-            <a:r>
-              <a:rPr lang="en-US" sz="2100" dirty="0" spc="18" kern="0">
-                <a:solidFill>
-                  <a:srgbClr val="C4C8D6"/>
-                </a:solidFill>
-                <a:latin typeface="Be Vietnam Pro" pitchFamily="34" charset="0"/>
-                <a:ea typeface="Be Vietnam Pro" pitchFamily="34" charset="-122"/>
-                <a:cs typeface="Be Vietnam Pro" pitchFamily="34" charset="-120"/>
-              </a:rPr>
               <a:t> định</a:t>
             </a:r>
             <a:endParaRPr lang="en-US" sz="2100" dirty="0"/>
           </a:p>
           <a:p>
-            <a:pPr algn="l" marL="266700" indent="-190541">
+            <a:pPr algn="l" indent="0" marL="0">
               <a:lnSpc>
                 <a:spcPts val="2835"/>
               </a:lnSpc>
-              <a:buSzPct val="100000"/>
-              <a:buFont typeface="Arial"/>
-              <a:buChar char="•"/>
+              <a:buNone/>
             </a:pPr>
             <a:r>
-              <a:rPr lang="en-US" sz="2100" dirty="0" spc="-22" kern="0">
+              <a:rPr lang="en-US" sz="2100" dirty="0" spc="-18" kern="0">
                 <a:solidFill>
                   <a:srgbClr val="C4C8D6"/>
                 </a:solidFill>
@@ -6765,10 +6786,10 @@
                 <a:ea typeface="Be Vietnam Pro" pitchFamily="34" charset="-122"/>
                 <a:cs typeface="Be Vietnam Pro" pitchFamily="34" charset="-120"/>
               </a:rPr>
-              <a:t>Java</a:t>
-            </a:r>
-            <a:r>
-              <a:rPr lang="en-US" sz="2100" dirty="0" spc="-1" kern="0">
+              <a:t>Java:</a:t>
+            </a:r>
+            <a:r>
+              <a:rPr lang="en-US" sz="2100" dirty="0" spc="-6" kern="0">
                 <a:solidFill>
                   <a:srgbClr val="C4C8D6"/>
                 </a:solidFill>
@@ -6776,10 +6797,10 @@
                 <a:ea typeface="Be Vietnam Pro" pitchFamily="34" charset="-122"/>
                 <a:cs typeface="Be Vietnam Pro" pitchFamily="34" charset="-120"/>
               </a:rPr>
-              <a:t> dùng</a:t>
-            </a:r>
-            <a:r>
-              <a:rPr lang="en-US" sz="2100" dirty="0" spc="-6" kern="0">
+              <a:t> Dual-Pivot</a:t>
+            </a:r>
+            <a:r>
+              <a:rPr lang="en-US" sz="2100" dirty="0" spc="-5" kern="0">
                 <a:solidFill>
                   <a:srgbClr val="C4C8D6"/>
                 </a:solidFill>
@@ -6787,7 +6808,7 @@
                 <a:ea typeface="Be Vietnam Pro" pitchFamily="34" charset="-122"/>
                 <a:cs typeface="Be Vietnam Pro" pitchFamily="34" charset="-120"/>
               </a:rPr>
-              <a:t> Dual-Pivot Quicksort</a:t>
+              <a:t> Quicksort</a:t>
             </a:r>
             <a:endParaRPr lang="en-US" sz="2100" dirty="0"/>
           </a:p>
@@ -7072,7 +7093,7 @@
       </p:sp>
       <p:sp>
         <p:nvSpPr>
-          <p:cNvPr id="31" name="Text richtext-1792338842712-628509377"/>
+          <p:cNvPr id="31" name="Text 29"/>
           <p:cNvSpPr/>
           <p:nvPr/>
         </p:nvSpPr>
@@ -7091,19 +7112,17 @@
           <a:bodyPr wrap="square" lIns="0" tIns="8001" rIns="0" bIns="-8001" rtlCol="0" anchor="t"/>
           <a:lstStyle/>
           <a:p>
-            <a:pPr algn="l" marL="266700" indent="-190541">
+            <a:pPr algn="l" indent="0" marL="0">
               <a:lnSpc>
                 <a:spcPts val="2835"/>
               </a:lnSpc>
               <a:spcAft>
                 <a:spcPts val="600"/>
               </a:spcAft>
-              <a:buSzPct val="100000"/>
-              <a:buFont typeface="Arial"/>
-              <a:buChar char="•"/>
+              <a:buNone/>
             </a:pPr>
             <a:r>
-              <a:rPr lang="en-US" sz="2100" dirty="0" spc="6" kern="0">
+              <a:rPr lang="en-US" sz="2100" dirty="0" spc="-3" kern="0">
                 <a:solidFill>
                   <a:srgbClr val="C4C8D6"/>
                 </a:solidFill>
@@ -7111,10 +7130,10 @@
                 <a:ea typeface="Be Vietnam Pro" pitchFamily="34" charset="-122"/>
                 <a:cs typeface="Be Vietnam Pro" pitchFamily="34" charset="-120"/>
               </a:rPr>
-              <a:t>Đường</a:t>
-            </a:r>
-            <a:r>
-              <a:rPr lang="en-US" sz="2100" dirty="0" spc="29" kern="0">
+              <a:t>A,</a:t>
+            </a:r>
+            <a:r>
+              <a:rPr lang="en-US" sz="2100" dirty="0" spc="-1" kern="0">
                 <a:solidFill>
                   <a:srgbClr val="C4C8D6"/>
                 </a:solidFill>
@@ -7122,7 +7141,51 @@
                 <a:ea typeface="Be Vietnam Pro" pitchFamily="34" charset="-122"/>
                 <a:cs typeface="Be Vietnam Pro" pitchFamily="34" charset="-120"/>
               </a:rPr>
-              <a:t> đi</a:t>
+              <a:t> C, B,</a:t>
+            </a:r>
+            <a:r>
+              <a:rPr lang="en-US" sz="2100" dirty="0" spc="0" kern="0">
+                <a:solidFill>
+                  <a:srgbClr val="C4C8D6"/>
+                </a:solidFill>
+                <a:latin typeface="Be Vietnam Pro" pitchFamily="34" charset="0"/>
+                <a:ea typeface="Be Vietnam Pro" pitchFamily="34" charset="-122"/>
+                <a:cs typeface="Be Vietnam Pro" pitchFamily="34" charset="-120"/>
+              </a:rPr>
+              <a:t> D</a:t>
+            </a:r>
+            <a:r>
+              <a:rPr lang="en-US" sz="2100" dirty="0" spc="-2" kern="0">
+                <a:solidFill>
+                  <a:srgbClr val="C4C8D6"/>
+                </a:solidFill>
+                <a:latin typeface="Be Vietnam Pro" pitchFamily="34" charset="0"/>
+                <a:ea typeface="Be Vietnam Pro" pitchFamily="34" charset="-122"/>
+                <a:cs typeface="Be Vietnam Pro" pitchFamily="34" charset="-120"/>
+              </a:rPr>
+              <a:t> dài</a:t>
+            </a:r>
+            <a:r>
+              <a:rPr lang="en-US" sz="2100" dirty="0" spc="-1" kern="0">
+                <a:solidFill>
+                  <a:srgbClr val="C4C8D6"/>
+                </a:solidFill>
+                <a:latin typeface="Be Vietnam Pro" pitchFamily="34" charset="0"/>
+                <a:ea typeface="Be Vietnam Pro" pitchFamily="34" charset="-122"/>
+                <a:cs typeface="Be Vietnam Pro" pitchFamily="34" charset="-120"/>
+              </a:rPr>
+              <a:t> 4, không</a:t>
+            </a:r>
+            <a:r>
+              <a:rPr lang="en-US" sz="2100" dirty="0" spc="-2" kern="0">
+                <a:solidFill>
+                  <a:srgbClr val="C4C8D6"/>
+                </a:solidFill>
+                <a:latin typeface="Be Vietnam Pro" pitchFamily="34" charset="0"/>
+                <a:ea typeface="Be Vietnam Pro" pitchFamily="34" charset="-122"/>
+                <a:cs typeface="Be Vietnam Pro" pitchFamily="34" charset="-120"/>
+              </a:rPr>
+              <a:t> phải</a:t>
             </a:r>
             <a:r>
               <a:rPr lang="en-US" sz="2100" dirty="0" spc="-3" kern="0">
@@ -7133,68 +7196,22 @@
                 <a:ea typeface="Be Vietnam Pro" pitchFamily="34" charset="-122"/>
                 <a:cs typeface="Be Vietnam Pro" pitchFamily="34" charset="-120"/>
               </a:rPr>
-              <a:t> có</a:t>
-            </a:r>
-            <a:r>
-              <a:rPr lang="en-US" sz="2100" dirty="0" spc="-16" kern="0">
-                <a:solidFill>
-                  <a:srgbClr val="C4C8D6"/>
-                </a:solidFill>
-                <a:latin typeface="Be Vietnam Pro" pitchFamily="34" charset="0"/>
-                <a:ea typeface="Be Vietnam Pro" pitchFamily="34" charset="-122"/>
-                <a:cs typeface="Be Vietnam Pro" pitchFamily="34" charset="-120"/>
-              </a:rPr>
-              <a:t> trọng</a:t>
-            </a:r>
-            <a:r>
-              <a:rPr lang="en-US" sz="2100" dirty="0" spc="-8" kern="0">
-                <a:solidFill>
-                  <a:srgbClr val="C4C8D6"/>
-                </a:solidFill>
-                <a:latin typeface="Be Vietnam Pro" pitchFamily="34" charset="0"/>
-                <a:ea typeface="Be Vietnam Pro" pitchFamily="34" charset="-122"/>
-                <a:cs typeface="Be Vietnam Pro" pitchFamily="34" charset="-120"/>
-              </a:rPr>
-              <a:t> số</a:t>
-            </a:r>
-            <a:r>
-              <a:rPr lang="en-US" sz="2100" dirty="0" spc="-9" kern="0">
-                <a:solidFill>
-                  <a:srgbClr val="C4C8D6"/>
-                </a:solidFill>
-                <a:latin typeface="Be Vietnam Pro" pitchFamily="34" charset="0"/>
-                <a:ea typeface="Be Vietnam Pro" pitchFamily="34" charset="-122"/>
-                <a:cs typeface="Be Vietnam Pro" pitchFamily="34" charset="-120"/>
-              </a:rPr>
-              <a:t> ngắn</a:t>
-            </a:r>
-            <a:r>
-              <a:rPr lang="en-US" sz="2100" dirty="0" spc="-10" kern="0">
-                <a:solidFill>
-                  <a:srgbClr val="C4C8D6"/>
-                </a:solidFill>
-                <a:latin typeface="Be Vietnam Pro" pitchFamily="34" charset="0"/>
-                <a:ea typeface="Be Vietnam Pro" pitchFamily="34" charset="-122"/>
-                <a:cs typeface="Be Vietnam Pro" pitchFamily="34" charset="-120"/>
-              </a:rPr>
-              <a:t> nhất</a:t>
+              <a:t> 5</a:t>
             </a:r>
             <a:endParaRPr lang="en-US" sz="2100" dirty="0"/>
           </a:p>
           <a:p>
-            <a:pPr algn="l" marL="266700" indent="-190541">
+            <a:pPr algn="l" indent="0" marL="0">
               <a:lnSpc>
                 <a:spcPts val="2835"/>
               </a:lnSpc>
               <a:spcAft>
                 <a:spcPts val="600"/>
               </a:spcAft>
-              <a:buSzPct val="100000"/>
-              <a:buFont typeface="Arial"/>
-              <a:buChar char="•"/>
+              <a:buNone/>
             </a:pPr>
             <a:r>
-              <a:rPr lang="en-US" sz="2100" dirty="0" spc="8" kern="0">
+              <a:rPr lang="en-US" sz="2100" dirty="0" spc="-9" kern="0">
                 <a:solidFill>
                   <a:srgbClr val="C4C8D6"/>
                 </a:solidFill>
@@ -7202,10 +7219,10 @@
                 <a:ea typeface="Be Vietnam Pro" pitchFamily="34" charset="-122"/>
                 <a:cs typeface="Be Vietnam Pro" pitchFamily="34" charset="-120"/>
               </a:rPr>
-              <a:t>Giữa</a:t>
-            </a:r>
-            <a:r>
-              <a:rPr lang="en-US" sz="2100" dirty="0" spc="-1" kern="0">
+              <a:t>NetworkX</a:t>
+            </a:r>
+            <a:r>
+              <a:rPr lang="en-US" sz="2100" dirty="0" spc="1" kern="0">
                 <a:solidFill>
                   <a:srgbClr val="C4C8D6"/>
                 </a:solidFill>
@@ -7213,7 +7230,18 @@
                 <a:ea typeface="Be Vietnam Pro" pitchFamily="34" charset="-122"/>
                 <a:cs typeface="Be Vietnam Pro" pitchFamily="34" charset="-120"/>
               </a:rPr>
-              <a:t> hai</a:t>
+              <a:t> tính</a:t>
+            </a:r>
+            <a:r>
+              <a:rPr lang="en-US" sz="2100" dirty="0" spc="-31" kern="0">
+                <a:solidFill>
+                  <a:srgbClr val="C4C8D6"/>
+                </a:solidFill>
+                <a:latin typeface="Be Vietnam Pro" pitchFamily="34" charset="0"/>
+                <a:ea typeface="Be Vietnam Pro" pitchFamily="34" charset="-122"/>
+                <a:cs typeface="Be Vietnam Pro" pitchFamily="34" charset="-120"/>
+              </a:rPr>
+              <a:t> ra</a:t>
             </a:r>
             <a:r>
               <a:rPr lang="en-US" sz="2100" dirty="0" spc="1" kern="0">
@@ -7224,10 +7252,10 @@
                 <a:ea typeface="Be Vietnam Pro" pitchFamily="34" charset="-122"/>
                 <a:cs typeface="Be Vietnam Pro" pitchFamily="34" charset="-120"/>
               </a:rPr>
-              <a:t> nút</a:t>
-            </a:r>
-            <a:r>
-              <a:rPr lang="en-US" sz="2100" dirty="0" spc="-1" kern="0">
+              <a:t> đúng</a:t>
+            </a:r>
+            <a:r>
+              <a:rPr lang="en-US" sz="2100" dirty="0" spc="4" kern="0">
                 <a:solidFill>
                   <a:srgbClr val="C4C8D6"/>
                 </a:solidFill>
@@ -7235,10 +7263,10 @@
                 <a:ea typeface="Be Vietnam Pro" pitchFamily="34" charset="-122"/>
                 <a:cs typeface="Be Vietnam Pro" pitchFamily="34" charset="-120"/>
               </a:rPr>
-              <a:t> của</a:t>
-            </a:r>
-            <a:r>
-              <a:rPr lang="en-US" sz="2100" dirty="0" spc="-8" kern="0">
+              <a:t> đường</a:t>
+            </a:r>
+            <a:r>
+              <a:rPr lang="en-US" sz="2100" dirty="0" spc="-9" kern="0">
                 <a:solidFill>
                   <a:srgbClr val="C4C8D6"/>
                 </a:solidFill>
@@ -7246,43 +7274,19 @@
                 <a:ea typeface="Be Vietnam Pro" pitchFamily="34" charset="-122"/>
                 <a:cs typeface="Be Vietnam Pro" pitchFamily="34" charset="-120"/>
               </a:rPr>
-              <a:t> một</a:t>
-            </a:r>
-            <a:r>
-              <a:rPr lang="en-US" sz="2100" dirty="0" spc="11" kern="0">
-                <a:solidFill>
-                  <a:srgbClr val="C4C8D6"/>
-                </a:solidFill>
-                <a:latin typeface="Be Vietnam Pro" pitchFamily="34" charset="0"/>
-                <a:ea typeface="Be Vietnam Pro" pitchFamily="34" charset="-122"/>
-                <a:cs typeface="Be Vietnam Pro" pitchFamily="34" charset="-120"/>
-              </a:rPr>
-              <a:t> đồ</a:t>
-            </a:r>
-            <a:r>
-              <a:rPr lang="en-US" sz="2100" dirty="0" spc="0" kern="0">
-                <a:solidFill>
-                  <a:srgbClr val="C4C8D6"/>
-                </a:solidFill>
-                <a:latin typeface="Be Vietnam Pro" pitchFamily="34" charset="0"/>
-                <a:ea typeface="Be Vietnam Pro" pitchFamily="34" charset="-122"/>
-                <a:cs typeface="Be Vietnam Pro" pitchFamily="34" charset="-120"/>
-              </a:rPr>
-              <a:t> thị</a:t>
+              <a:t> này</a:t>
             </a:r>
             <a:endParaRPr lang="en-US" sz="2100" dirty="0"/>
           </a:p>
           <a:p>
-            <a:pPr algn="l" marL="266700" indent="-190541">
+            <a:pPr algn="l" indent="0" marL="0">
               <a:lnSpc>
                 <a:spcPts val="2835"/>
               </a:lnSpc>
-              <a:buSzPct val="100000"/>
-              <a:buFont typeface="Arial"/>
-              <a:buChar char="•"/>
+              <a:buNone/>
             </a:pPr>
             <a:r>
-              <a:rPr lang="en-US" sz="2100" dirty="0" spc="-8" kern="0">
+              <a:rPr lang="en-US" sz="2100" dirty="0" spc="5" kern="0">
                 <a:solidFill>
                   <a:srgbClr val="C4C8D6"/>
                 </a:solidFill>
@@ -7290,18 +7294,7 @@
                 <a:ea typeface="Be Vietnam Pro" pitchFamily="34" charset="-122"/>
                 <a:cs typeface="Be Vietnam Pro" pitchFamily="34" charset="-120"/>
               </a:rPr>
-              <a:t>NetworkX:</a:t>
-            </a:r>
-            <a:r>
-              <a:rPr lang="en-US" sz="2100" dirty="0" spc="3" kern="0">
-                <a:solidFill>
-                  <a:srgbClr val="C4C8D6"/>
-                </a:solidFill>
-                <a:latin typeface="Be Vietnam Pro" pitchFamily="34" charset="0"/>
-                <a:ea typeface="Be Vietnam Pro" pitchFamily="34" charset="-122"/>
-                <a:cs typeface="Be Vietnam Pro" pitchFamily="34" charset="-120"/>
-              </a:rPr>
-              <a:t> phương</a:t>
+              <a:t>Phương</a:t>
             </a:r>
             <a:r>
               <a:rPr lang="en-US" sz="2100" dirty="0" spc="-4" kern="0">
@@ -7655,7 +7648,7 @@
       </p:sp>
       <p:sp>
         <p:nvSpPr>
-          <p:cNvPr id="43" name="Text richtext-1792338842723-985300988"/>
+          <p:cNvPr id="43" name="Text 41"/>
           <p:cNvSpPr/>
           <p:nvPr/>
         </p:nvSpPr>
@@ -7674,19 +7667,17 @@
           <a:bodyPr wrap="square" lIns="0" tIns="8001" rIns="0" bIns="-8001" rtlCol="0" anchor="t"/>
           <a:lstStyle/>
           <a:p>
-            <a:pPr algn="l" marL="266700" indent="-190541">
+            <a:pPr algn="l" indent="0" marL="0">
               <a:lnSpc>
                 <a:spcPts val="2835"/>
               </a:lnSpc>
               <a:spcAft>
                 <a:spcPts val="600"/>
               </a:spcAft>
-              <a:buSzPct val="100000"/>
-              <a:buFont typeface="Arial"/>
-              <a:buChar char="•"/>
+              <a:buNone/>
             </a:pPr>
             <a:r>
-              <a:rPr lang="en-US" sz="2100" dirty="0" spc="-29" kern="0">
+              <a:rPr lang="en-US" sz="2100" dirty="0" spc="0" kern="0">
                 <a:solidFill>
                   <a:srgbClr val="C4C8D6"/>
                 </a:solidFill>
@@ -7694,7 +7685,18 @@
                 <a:ea typeface="Be Vietnam Pro" pitchFamily="34" charset="-122"/>
                 <a:cs typeface="Be Vietnam Pro" pitchFamily="34" charset="-120"/>
               </a:rPr>
-              <a:t>Xếp</a:t>
+              <a:t>Bốn</a:t>
+            </a:r>
+            <a:r>
+              <a:rPr lang="en-US" sz="2100" dirty="0" spc="-13" kern="0">
+                <a:solidFill>
+                  <a:srgbClr val="C4C8D6"/>
+                </a:solidFill>
+                <a:latin typeface="Be Vietnam Pro" pitchFamily="34" charset="0"/>
+                <a:ea typeface="Be Vietnam Pro" pitchFamily="34" charset="-122"/>
+                <a:cs typeface="Be Vietnam Pro" pitchFamily="34" charset="-120"/>
+              </a:rPr>
+              <a:t> trang:</a:t>
             </a:r>
             <a:r>
               <a:rPr lang="en-US" sz="2100" dirty="0" spc="-1" kern="0">
@@ -7705,10 +7707,10 @@
                 <a:ea typeface="Be Vietnam Pro" pitchFamily="34" charset="-122"/>
                 <a:cs typeface="Be Vietnam Pro" pitchFamily="34" charset="-120"/>
               </a:rPr>
-              <a:t> hạng</a:t>
-            </a:r>
-            <a:r>
-              <a:rPr lang="en-US" sz="2100" dirty="0" spc="0" kern="0">
+              <a:t> c</a:t>
+            </a:r>
+            <a:r>
+              <a:rPr lang="en-US" sz="2100" dirty="0" spc="-2" kern="0">
                 <a:solidFill>
                   <a:srgbClr val="C4C8D6"/>
                 </a:solidFill>
@@ -7716,10 +7718,10 @@
                 <a:ea typeface="Be Vietnam Pro" pitchFamily="34" charset="-122"/>
                 <a:cs typeface="Be Vietnam Pro" pitchFamily="34" charset="-120"/>
               </a:rPr>
-              <a:t> nút</a:t>
-            </a:r>
-            <a:r>
-              <a:rPr lang="en-US" sz="2100" dirty="0" spc="-4" kern="0">
+              <a:t> cao</a:t>
+            </a:r>
+            <a:r>
+              <a:rPr lang="en-US" sz="2100" dirty="0" spc="-8" kern="0">
                 <a:solidFill>
                   <a:srgbClr val="C4C8D6"/>
                 </a:solidFill>
@@ -7727,10 +7729,10 @@
                 <a:ea typeface="Be Vietnam Pro" pitchFamily="34" charset="-122"/>
                 <a:cs typeface="Be Vietnam Pro" pitchFamily="34" charset="-120"/>
               </a:rPr>
-              <a:t> theo</a:t>
-            </a:r>
-            <a:r>
-              <a:rPr lang="en-US" sz="2100" dirty="0" spc="1" kern="0">
+              <a:t> nhất,</a:t>
+            </a:r>
+            <a:r>
+              <a:rPr lang="en-US" sz="2100" dirty="0" spc="-2" kern="0">
                 <a:solidFill>
                   <a:srgbClr val="C4C8D6"/>
                 </a:solidFill>
@@ -7738,46 +7740,22 @@
                 <a:ea typeface="Be Vietnam Pro" pitchFamily="34" charset="-122"/>
                 <a:cs typeface="Be Vietnam Pro" pitchFamily="34" charset="-120"/>
               </a:rPr>
-              <a:t> liên</a:t>
-            </a:r>
-            <a:r>
-              <a:rPr lang="en-US" sz="2100" dirty="0" spc="-29" kern="0">
-                <a:solidFill>
-                  <a:srgbClr val="C4C8D6"/>
-                </a:solidFill>
-                <a:latin typeface="Be Vietnam Pro" pitchFamily="34" charset="0"/>
-                <a:ea typeface="Be Vietnam Pro" pitchFamily="34" charset="-122"/>
-                <a:cs typeface="Be Vietnam Pro" pitchFamily="34" charset="-120"/>
-              </a:rPr>
-              <a:t> kết</a:t>
-            </a:r>
-            <a:r>
-              <a:rPr lang="en-US" sz="2100" dirty="0" spc="12" kern="0">
-                <a:solidFill>
-                  <a:srgbClr val="C4C8D6"/>
-                </a:solidFill>
-                <a:latin typeface="Be Vietnam Pro" pitchFamily="34" charset="0"/>
-                <a:ea typeface="Be Vietnam Pro" pitchFamily="34" charset="-122"/>
-                <a:cs typeface="Be Vietnam Pro" pitchFamily="34" charset="-120"/>
-              </a:rPr>
-              <a:t> đến</a:t>
+              <a:t> 0,39</a:t>
             </a:r>
             <a:endParaRPr lang="en-US" sz="2100" dirty="0"/>
           </a:p>
           <a:p>
-            <a:pPr algn="l" marL="266700" indent="-190541">
+            <a:pPr algn="l" indent="0" marL="0">
               <a:lnSpc>
                 <a:spcPts val="2835"/>
               </a:lnSpc>
               <a:spcAft>
                 <a:spcPts val="600"/>
               </a:spcAft>
-              <a:buSzPct val="100000"/>
-              <a:buFont typeface="Arial"/>
-              <a:buChar char="•"/>
+              <a:buNone/>
             </a:pPr>
             <a:r>
-              <a:rPr lang="en-US" sz="2100" dirty="0" spc="-8" kern="0">
+              <a:rPr lang="en-US" sz="2100" dirty="0" spc="-46" kern="0">
                 <a:solidFill>
                   <a:srgbClr val="C4C8D6"/>
                 </a:solidFill>
@@ -7785,10 +7763,10 @@
                 <a:ea typeface="Be Vietnam Pro" pitchFamily="34" charset="-122"/>
                 <a:cs typeface="Be Vietnam Pro" pitchFamily="34" charset="-120"/>
               </a:rPr>
-              <a:t>NetworkX:</a:t>
-            </a:r>
-            <a:r>
-              <a:rPr lang="en-US" sz="2100" dirty="0" spc="-21" kern="0">
+              <a:t>Trang</a:t>
+            </a:r>
+            <a:r>
+              <a:rPr lang="en-US" sz="2100" dirty="0" spc="-4" kern="0">
                 <a:solidFill>
                   <a:srgbClr val="C4C8D6"/>
                 </a:solidFill>
@@ -7796,21 +7774,74 @@
                 <a:ea typeface="Be Vietnam Pro" pitchFamily="34" charset="-122"/>
                 <a:cs typeface="Be Vietnam Pro" pitchFamily="34" charset="-120"/>
               </a:rPr>
-              <a:t> PageRank</a:t>
+              <a:t> d</a:t>
+            </a:r>
+            <a:r>
+              <a:rPr lang="en-US" sz="2100" dirty="0" spc="-1" kern="0">
+                <a:solidFill>
+                  <a:srgbClr val="C4C8D6"/>
+                </a:solidFill>
+                <a:latin typeface="Be Vietnam Pro" pitchFamily="34" charset="0"/>
+                <a:ea typeface="Be Vietnam Pro" pitchFamily="34" charset="-122"/>
+                <a:cs typeface="Be Vietnam Pro" pitchFamily="34" charset="-120"/>
+              </a:rPr>
+              <a:t> không</a:t>
+            </a:r>
+            <a:r>
+              <a:rPr lang="en-US" sz="2100" dirty="0" spc="0" kern="0">
+                <a:solidFill>
+                  <a:srgbClr val="C4C8D6"/>
+                </a:solidFill>
+                <a:latin typeface="Be Vietnam Pro" pitchFamily="34" charset="0"/>
+                <a:ea typeface="Be Vietnam Pro" pitchFamily="34" charset="-122"/>
+                <a:cs typeface="Be Vietnam Pro" pitchFamily="34" charset="-120"/>
+              </a:rPr>
+              <a:t> ai</a:t>
+            </a:r>
+            <a:r>
+              <a:rPr lang="en-US" sz="2100" dirty="0" spc="-25" kern="0">
+                <a:solidFill>
+                  <a:srgbClr val="C4C8D6"/>
+                </a:solidFill>
+                <a:latin typeface="Be Vietnam Pro" pitchFamily="34" charset="0"/>
+                <a:ea typeface="Be Vietnam Pro" pitchFamily="34" charset="-122"/>
+                <a:cs typeface="Be Vietnam Pro" pitchFamily="34" charset="-120"/>
+              </a:rPr>
+              <a:t> trỏ</a:t>
+            </a:r>
+            <a:r>
+              <a:rPr lang="en-US" sz="2100" dirty="0" spc="-9" kern="0">
+                <a:solidFill>
+                  <a:srgbClr val="C4C8D6"/>
+                </a:solidFill>
+                <a:latin typeface="Be Vietnam Pro" pitchFamily="34" charset="0"/>
+                <a:ea typeface="Be Vietnam Pro" pitchFamily="34" charset="-122"/>
+                <a:cs typeface="Be Vietnam Pro" pitchFamily="34" charset="-120"/>
+              </a:rPr>
+              <a:t> tới:</a:t>
+            </a:r>
+            <a:r>
+              <a:rPr lang="en-US" sz="2100" dirty="0" spc="-3" kern="0">
+                <a:solidFill>
+                  <a:srgbClr val="C4C8D6"/>
+                </a:solidFill>
+                <a:latin typeface="Be Vietnam Pro" pitchFamily="34" charset="0"/>
+                <a:ea typeface="Be Vietnam Pro" pitchFamily="34" charset="-122"/>
+                <a:cs typeface="Be Vietnam Pro" pitchFamily="34" charset="-120"/>
+              </a:rPr>
+              <a:t> 0,04</a:t>
             </a:r>
             <a:endParaRPr lang="en-US" sz="2100" dirty="0"/>
           </a:p>
           <a:p>
-            <a:pPr algn="l" marL="266700" indent="-190541">
+            <a:pPr algn="l" indent="0" marL="0">
               <a:lnSpc>
                 <a:spcPts val="2835"/>
               </a:lnSpc>
-              <a:buSzPct val="100000"/>
-              <a:buFont typeface="Arial"/>
-              <a:buChar char="•"/>
+              <a:buNone/>
             </a:pPr>
             <a:r>
-              <a:rPr lang="en-US" sz="2100" dirty="0" spc="1" kern="0">
+              <a:rPr lang="en-US" sz="2100" dirty="0" spc="-8" kern="0">
                 <a:solidFill>
                   <a:srgbClr val="C4C8D6"/>
                 </a:solidFill>
@@ -7818,10 +7849,10 @@
                 <a:ea typeface="Be Vietnam Pro" pitchFamily="34" charset="-122"/>
                 <a:cs typeface="Be Vietnam Pro" pitchFamily="34" charset="-120"/>
               </a:rPr>
-              <a:t>Ban</a:t>
-            </a:r>
-            <a:r>
-              <a:rPr lang="en-US" sz="2100" dirty="0" spc="10" kern="0">
+              <a:t>NetworkX:</a:t>
+            </a:r>
+            <a:r>
+              <a:rPr lang="en-US" sz="2100" dirty="0" spc="-21" kern="0">
                 <a:solidFill>
                   <a:srgbClr val="C4C8D6"/>
                 </a:solidFill>
@@ -7829,62 +7860,7 @@
                 <a:ea typeface="Be Vietnam Pro" pitchFamily="34" charset="-122"/>
                 <a:cs typeface="Be Vietnam Pro" pitchFamily="34" charset="-120"/>
               </a:rPr>
-              <a:t> đầu</a:t>
-            </a:r>
-            <a:r>
-              <a:rPr lang="en-US" sz="2100" dirty="0" spc="14" kern="0">
-                <a:solidFill>
-                  <a:srgbClr val="C4C8D6"/>
-                </a:solidFill>
-                <a:latin typeface="Be Vietnam Pro" pitchFamily="34" charset="0"/>
-                <a:ea typeface="Be Vietnam Pro" pitchFamily="34" charset="-122"/>
-                <a:cs typeface="Be Vietnam Pro" pitchFamily="34" charset="-120"/>
-              </a:rPr>
-              <a:t> để</a:t>
-            </a:r>
-            <a:r>
-              <a:rPr lang="en-US" sz="2100" dirty="0" spc="-17" kern="0">
-                <a:solidFill>
-                  <a:srgbClr val="C4C8D6"/>
-                </a:solidFill>
-                <a:latin typeface="Be Vietnam Pro" pitchFamily="34" charset="0"/>
-                <a:ea typeface="Be Vietnam Pro" pitchFamily="34" charset="-122"/>
-                <a:cs typeface="Be Vietnam Pro" pitchFamily="34" charset="-120"/>
-              </a:rPr>
-              <a:t> xếp</a:t>
-            </a:r>
-            <a:r>
-              <a:rPr lang="en-US" sz="2100" dirty="0" spc="-1" kern="0">
-                <a:solidFill>
-                  <a:srgbClr val="C4C8D6"/>
-                </a:solidFill>
-                <a:latin typeface="Be Vietnam Pro" pitchFamily="34" charset="0"/>
-                <a:ea typeface="Be Vietnam Pro" pitchFamily="34" charset="-122"/>
-                <a:cs typeface="Be Vietnam Pro" pitchFamily="34" charset="-120"/>
-              </a:rPr>
-              <a:t> hạng</a:t>
-            </a:r>
-            <a:r>
-              <a:rPr lang="en-US" sz="2100" dirty="0" spc="-15" kern="0">
-                <a:solidFill>
-                  <a:srgbClr val="C4C8D6"/>
-                </a:solidFill>
-                <a:latin typeface="Be Vietnam Pro" pitchFamily="34" charset="0"/>
-                <a:ea typeface="Be Vietnam Pro" pitchFamily="34" charset="-122"/>
-                <a:cs typeface="Be Vietnam Pro" pitchFamily="34" charset="-120"/>
-              </a:rPr>
-              <a:t> trang</a:t>
-            </a:r>
-            <a:r>
-              <a:rPr lang="en-US" sz="2100" dirty="0" spc="-14" kern="0">
-                <a:solidFill>
-                  <a:srgbClr val="C4C8D6"/>
-                </a:solidFill>
-                <a:latin typeface="Be Vietnam Pro" pitchFamily="34" charset="0"/>
-                <a:ea typeface="Be Vietnam Pro" pitchFamily="34" charset="-122"/>
-                <a:cs typeface="Be Vietnam Pro" pitchFamily="34" charset="-120"/>
-              </a:rPr>
-              <a:t> web</a:t>
+              <a:t> PageRank</a:t>
             </a:r>
             <a:endParaRPr lang="en-US" sz="2100" dirty="0"/>
           </a:p>
@@ -8698,7 +8674,7 @@
               <a:t> tên,</a:t>
             </a:r>
             <a:r>
-              <a:rPr lang="en-US" sz="3000" b="1" dirty="0" spc="-2" kern="0">
+              <a:rPr lang="en-US" sz="3000" b="1" dirty="0" spc="-11" kern="0">
                 <a:solidFill>
                   <a:srgbClr val="B45309"/>
                 </a:solidFill>
@@ -8706,10 +8682,10 @@
                 <a:ea typeface="Be Vietnam Pro" pitchFamily="34" charset="-122"/>
                 <a:cs typeface="Be Vietnam Pro" pitchFamily="34" charset="-120"/>
               </a:rPr>
-              <a:t> hai việc</a:t>
-            </a:r>
-            <a:r>
-              <a:rPr lang="en-US" sz="3000" b="1" dirty="0" spc="-1" kern="0">
+              <a:t> một</a:t>
+            </a:r>
+            <a:r>
+              <a:rPr lang="en-US" sz="3000" b="1" dirty="0" spc="1" kern="0">
                 <a:solidFill>
                   <a:srgbClr val="B45309"/>
                 </a:solidFill>
@@ -8717,10 +8693,10 @@
                 <a:ea typeface="Be Vietnam Pro" pitchFamily="34" charset="-122"/>
                 <a:cs typeface="Be Vietnam Pro" pitchFamily="34" charset="-120"/>
               </a:rPr>
-              <a:t> khác</a:t>
-            </a:r>
-            <a:r>
-              <a:rPr lang="en-US" sz="3000" b="1" dirty="0" spc="0" kern="0">
+              <a:t> ví</a:t>
+            </a:r>
+            <a:r>
+              <a:rPr lang="en-US" sz="3000" b="1" dirty="0" spc="4" kern="0">
                 <a:solidFill>
                   <a:srgbClr val="B45309"/>
                 </a:solidFill>
@@ -8728,7 +8704,18 @@
                 <a:ea typeface="Be Vietnam Pro" pitchFamily="34" charset="-122"/>
                 <a:cs typeface="Be Vietnam Pro" pitchFamily="34" charset="-120"/>
               </a:rPr>
-              <a:t> nhau</a:t>
+              <a:t> dụ</a:t>
+            </a:r>
+            <a:r>
+              <a:rPr lang="en-US" sz="3000" b="1" dirty="0" spc="-3" kern="0">
+                <a:solidFill>
+                  <a:srgbClr val="B45309"/>
+                </a:solidFill>
+                <a:latin typeface="Be Vietnam Pro" pitchFamily="34" charset="0"/>
+                <a:ea typeface="Be Vietnam Pro" pitchFamily="34" charset="-122"/>
+                <a:cs typeface="Be Vietnam Pro" pitchFamily="34" charset="-120"/>
+              </a:rPr>
+              <a:t> chung</a:t>
             </a:r>
             <a:endParaRPr lang="en-US" sz="3000" dirty="0"/>
           </a:p>
@@ -8762,37 +8749,26 @@
               <a:buNone/>
             </a:pPr>
             <a:r>
-              <a:rPr lang="en-US" sz="2700" dirty="0" spc="-7" kern="0">
-                <a:solidFill>
-                  <a:srgbClr val="14161C"/>
-                </a:solidFill>
-                <a:latin typeface="Be Vietnam Pro" pitchFamily="34" charset="0"/>
-                <a:ea typeface="Be Vietnam Pro" pitchFamily="34" charset="-122"/>
-                <a:cs typeface="Be Vietnam Pro" pitchFamily="34" charset="-120"/>
-              </a:rPr>
-              <a:t>Một</a:t>
-            </a:r>
-            <a:r>
-              <a:rPr lang="en-US" sz="2700" dirty="0" spc="-15" kern="0">
-                <a:solidFill>
-                  <a:srgbClr val="14161C"/>
-                </a:solidFill>
-                <a:latin typeface="Be Vietnam Pro" pitchFamily="34" charset="0"/>
-                <a:ea typeface="Be Vietnam Pro" pitchFamily="34" charset="-122"/>
-                <a:cs typeface="Be Vietnam Pro" pitchFamily="34" charset="-120"/>
-              </a:rPr>
-              <a:t> tên</a:t>
-            </a:r>
-            <a:r>
-              <a:rPr lang="en-US" sz="2700" dirty="0" spc="-20" kern="0">
-                <a:solidFill>
-                  <a:srgbClr val="14161C"/>
-                </a:solidFill>
-                <a:latin typeface="Be Vietnam Pro" pitchFamily="34" charset="0"/>
-                <a:ea typeface="Be Vietnam Pro" pitchFamily="34" charset="-122"/>
-                <a:cs typeface="Be Vietnam Pro" pitchFamily="34" charset="-120"/>
-              </a:rPr>
-              <a:t> về</a:t>
+              <a:rPr lang="en-US" sz="2700" dirty="0" spc="-5" kern="0">
+                <a:solidFill>
+                  <a:srgbClr val="14161C"/>
+                </a:solidFill>
+                <a:latin typeface="Be Vietnam Pro" pitchFamily="34" charset="0"/>
+                <a:ea typeface="Be Vietnam Pro" pitchFamily="34" charset="-122"/>
+                <a:cs typeface="Be Vietnam Pro" pitchFamily="34" charset="-120"/>
+              </a:rPr>
+              <a:t>3233</a:t>
+            </a:r>
+            <a:r>
+              <a:rPr lang="en-US" sz="2700" dirty="0" spc="-4" kern="0">
+                <a:solidFill>
+                  <a:srgbClr val="14161C"/>
+                </a:solidFill>
+                <a:latin typeface="Be Vietnam Pro" pitchFamily="34" charset="0"/>
+                <a:ea typeface="Be Vietnam Pro" pitchFamily="34" charset="-122"/>
+                <a:cs typeface="Be Vietnam Pro" pitchFamily="34" charset="-120"/>
+              </a:rPr>
+              <a:t> =</a:t>
             </a:r>
             <a:r>
               <a:rPr lang="en-US" sz="2700" dirty="0" spc="-1" kern="0">
@@ -8803,7 +8779,18 @@
                 <a:ea typeface="Be Vietnam Pro" pitchFamily="34" charset="-122"/>
                 <a:cs typeface="Be Vietnam Pro" pitchFamily="34" charset="-120"/>
               </a:rPr>
-              <a:t> mã</a:t>
+              <a:t> 61</a:t>
+            </a:r>
+            <a:r>
+              <a:rPr lang="en-US" sz="2700" dirty="0" spc="-2" kern="0">
+                <a:solidFill>
+                  <a:srgbClr val="14161C"/>
+                </a:solidFill>
+                <a:latin typeface="Be Vietnam Pro" pitchFamily="34" charset="0"/>
+                <a:ea typeface="Be Vietnam Pro" pitchFamily="34" charset="-122"/>
+                <a:cs typeface="Be Vietnam Pro" pitchFamily="34" charset="-120"/>
+              </a:rPr>
+              <a:t> ×</a:t>
             </a:r>
             <a:r>
               <a:rPr lang="en-US" sz="2700" dirty="0" spc="-4" kern="0">
@@ -8814,62 +8801,7 @@
                 <a:ea typeface="Be Vietnam Pro" pitchFamily="34" charset="-122"/>
                 <a:cs typeface="Be Vietnam Pro" pitchFamily="34" charset="-120"/>
               </a:rPr>
-              <a:t> hóa,</a:t>
-            </a:r>
-            <a:r>
-              <a:rPr lang="en-US" sz="2700" dirty="0" spc="-7" kern="0">
-                <a:solidFill>
-                  <a:srgbClr val="14161C"/>
-                </a:solidFill>
-                <a:latin typeface="Be Vietnam Pro" pitchFamily="34" charset="0"/>
-                <a:ea typeface="Be Vietnam Pro" pitchFamily="34" charset="-122"/>
-                <a:cs typeface="Be Vietnam Pro" pitchFamily="34" charset="-120"/>
-              </a:rPr>
-              <a:t> một</a:t>
-            </a:r>
-            <a:r>
-              <a:rPr lang="en-US" sz="2700" dirty="0" spc="-15" kern="0">
-                <a:solidFill>
-                  <a:srgbClr val="14161C"/>
-                </a:solidFill>
-                <a:latin typeface="Be Vietnam Pro" pitchFamily="34" charset="0"/>
-                <a:ea typeface="Be Vietnam Pro" pitchFamily="34" charset="-122"/>
-                <a:cs typeface="Be Vietnam Pro" pitchFamily="34" charset="-120"/>
-              </a:rPr>
-              <a:t> tên</a:t>
-            </a:r>
-            <a:r>
-              <a:rPr lang="en-US" sz="2700" dirty="0" spc="-20" kern="0">
-                <a:solidFill>
-                  <a:srgbClr val="14161C"/>
-                </a:solidFill>
-                <a:latin typeface="Be Vietnam Pro" pitchFamily="34" charset="0"/>
-                <a:ea typeface="Be Vietnam Pro" pitchFamily="34" charset="-122"/>
-                <a:cs typeface="Be Vietnam Pro" pitchFamily="34" charset="-120"/>
-              </a:rPr>
-              <a:t> về</a:t>
-            </a:r>
-            <a:r>
-              <a:rPr lang="en-US" sz="2700" dirty="0" spc="-12" kern="0">
-                <a:solidFill>
-                  <a:srgbClr val="14161C"/>
-                </a:solidFill>
-                <a:latin typeface="Be Vietnam Pro" pitchFamily="34" charset="0"/>
-                <a:ea typeface="Be Vietnam Pro" pitchFamily="34" charset="-122"/>
-                <a:cs typeface="Be Vietnam Pro" pitchFamily="34" charset="-120"/>
-              </a:rPr>
-              <a:t> số</a:t>
-            </a:r>
-            <a:r>
-              <a:rPr lang="en-US" sz="2700" dirty="0" spc="-14" kern="0">
-                <a:solidFill>
-                  <a:srgbClr val="14161C"/>
-                </a:solidFill>
-                <a:latin typeface="Be Vietnam Pro" pitchFamily="34" charset="0"/>
-                <a:ea typeface="Be Vietnam Pro" pitchFamily="34" charset="-122"/>
-                <a:cs typeface="Be Vietnam Pro" pitchFamily="34" charset="-120"/>
-              </a:rPr>
-              <a:t> nguyên.</a:t>
+              <a:t> 53.</a:t>
             </a:r>
             <a:endParaRPr lang="en-US" sz="2700" dirty="0"/>
           </a:p>
@@ -8904,7 +8836,7 @@
               <a:buNone/>
             </a:pPr>
             <a:r>
-              <a:rPr lang="en-US" sz="2250" b="1" dirty="0" spc="6" kern="0">
+              <a:rPr lang="en-US" sz="2250" b="1" dirty="0">
                 <a:solidFill>
                   <a:srgbClr val="F3EEE3"/>
                 </a:solidFill>
@@ -8912,29 +8844,7 @@
                 <a:ea typeface="Be Vietnam Pro" pitchFamily="34" charset="-122"/>
                 <a:cs typeface="Be Vietnam Pro" pitchFamily="34" charset="-120"/>
               </a:rPr>
-              <a:t>Cặp</a:t>
-            </a:r>
-            <a:r>
-              <a:rPr lang="en-US" sz="2250" b="1" dirty="0" spc="-1" kern="0">
-                <a:solidFill>
-                  <a:srgbClr val="F3EEE3"/>
-                </a:solidFill>
-                <a:latin typeface="Be Vietnam Pro" pitchFamily="34" charset="0"/>
-                <a:ea typeface="Be Vietnam Pro" pitchFamily="34" charset="-122"/>
-                <a:cs typeface="Be Vietnam Pro" pitchFamily="34" charset="-120"/>
-              </a:rPr>
-              <a:t> khóa</a:t>
-            </a:r>
-            <a:r>
-              <a:rPr lang="en-US" sz="2250" b="1" dirty="0" spc="-21" kern="0">
-                <a:solidFill>
-                  <a:srgbClr val="F3EEE3"/>
-                </a:solidFill>
-                <a:latin typeface="Be Vietnam Pro" pitchFamily="34" charset="0"/>
-                <a:ea typeface="Be Vietnam Pro" pitchFamily="34" charset="-122"/>
-                <a:cs typeface="Be Vietnam Pro" pitchFamily="34" charset="-120"/>
-              </a:rPr>
-              <a:t> RSA</a:t>
+              <a:t>65 → 2790</a:t>
             </a:r>
             <a:endParaRPr lang="en-US" sz="2250" dirty="0"/>
           </a:p>
@@ -8969,7 +8879,7 @@
               <a:buNone/>
             </a:pPr>
             <a:r>
-              <a:rPr lang="en-US" sz="2250" b="1" dirty="0" spc="17" kern="0">
+              <a:rPr lang="en-US" sz="2250" b="1" dirty="0">
                 <a:solidFill>
                   <a:srgbClr val="F3EEE3"/>
                 </a:solidFill>
@@ -8977,40 +8887,7 @@
                 <a:ea typeface="Be Vietnam Pro" pitchFamily="34" charset="-122"/>
                 <a:cs typeface="Be Vietnam Pro" pitchFamily="34" charset="-120"/>
               </a:rPr>
-              <a:t>Thừa</a:t>
-            </a:r>
-            <a:r>
-              <a:rPr lang="en-US" sz="2250" b="1" dirty="0" spc="-1" kern="0">
-                <a:solidFill>
-                  <a:srgbClr val="F3EEE3"/>
-                </a:solidFill>
-                <a:latin typeface="Be Vietnam Pro" pitchFamily="34" charset="0"/>
-                <a:ea typeface="Be Vietnam Pro" pitchFamily="34" charset="-122"/>
-                <a:cs typeface="Be Vietnam Pro" pitchFamily="34" charset="-120"/>
-              </a:rPr>
-              <a:t> số</a:t>
-            </a:r>
-            <a:r>
-              <a:rPr lang="en-US" sz="2250" b="1" dirty="0" spc="-15" kern="0">
-                <a:solidFill>
-                  <a:srgbClr val="F3EEE3"/>
-                </a:solidFill>
-                <a:latin typeface="Be Vietnam Pro" pitchFamily="34" charset="0"/>
-                <a:ea typeface="Be Vietnam Pro" pitchFamily="34" charset="-122"/>
-                <a:cs typeface="Be Vietnam Pro" pitchFamily="34" charset="-120"/>
-              </a:rPr>
-              <a:t> nguyên</a:t>
-            </a:r>
-            <a:r>
-              <a:rPr lang="en-US" sz="2250" b="1" dirty="0" spc="-2" kern="0">
-                <a:solidFill>
-                  <a:srgbClr val="F3EEE3"/>
-                </a:solidFill>
-                <a:latin typeface="Be Vietnam Pro" pitchFamily="34" charset="0"/>
-                <a:ea typeface="Be Vietnam Pro" pitchFamily="34" charset="-122"/>
-                <a:cs typeface="Be Vietnam Pro" pitchFamily="34" charset="-120"/>
-              </a:rPr>
-              <a:t> tố</a:t>
+              <a:t>2790 → 65</a:t>
             </a:r>
             <a:endParaRPr lang="en-US" sz="2250" dirty="0"/>
           </a:p>
@@ -9116,6 +8993,83 @@
               <a:buNone/>
             </a:pPr>
             <a:r>
+              <a:rPr lang="en-US" sz="2550" dirty="0" spc="-3" kern="0">
+                <a:solidFill>
+                  <a:srgbClr val="14161C"/>
+                </a:solidFill>
+                <a:latin typeface="Be Vietnam Pro" pitchFamily="34" charset="0"/>
+                <a:ea typeface="Be Vietnam Pro" pitchFamily="34" charset="-122"/>
+                <a:cs typeface="Be Vietnam Pro" pitchFamily="34" charset="-120"/>
+              </a:rPr>
+              <a:t>Số</a:t>
+            </a:r>
+            <a:r>
+              <a:rPr lang="en-US" sz="2550" dirty="0" spc="-1" kern="0">
+                <a:solidFill>
+                  <a:srgbClr val="14161C"/>
+                </a:solidFill>
+                <a:latin typeface="Be Vietnam Pro" pitchFamily="34" charset="0"/>
+                <a:ea typeface="Be Vietnam Pro" pitchFamily="34" charset="-122"/>
+                <a:cs typeface="Be Vietnam Pro" pitchFamily="34" charset="-120"/>
+              </a:rPr>
+              <a:t> nhỏ</a:t>
+            </a:r>
+            <a:r>
+              <a:rPr lang="en-US" sz="2550" dirty="0" spc="2" kern="0">
+                <a:solidFill>
+                  <a:srgbClr val="14161C"/>
+                </a:solidFill>
+                <a:latin typeface="Be Vietnam Pro" pitchFamily="34" charset="0"/>
+                <a:ea typeface="Be Vietnam Pro" pitchFamily="34" charset="-122"/>
+                <a:cs typeface="Be Vietnam Pro" pitchFamily="34" charset="-120"/>
+              </a:rPr>
+              <a:t> thế</a:t>
+            </a:r>
+            <a:r>
+              <a:rPr lang="en-US" sz="2550" dirty="0" spc="-10" kern="0">
+                <a:solidFill>
+                  <a:srgbClr val="14161C"/>
+                </a:solidFill>
+                <a:latin typeface="Be Vietnam Pro" pitchFamily="34" charset="0"/>
+                <a:ea typeface="Be Vietnam Pro" pitchFamily="34" charset="-122"/>
+                <a:cs typeface="Be Vietnam Pro" pitchFamily="34" charset="-120"/>
+              </a:rPr>
+              <a:t> này</a:t>
+            </a:r>
+            <a:r>
+              <a:rPr lang="en-US" sz="2550" dirty="0" spc="1" kern="0">
+                <a:solidFill>
+                  <a:srgbClr val="14161C"/>
+                </a:solidFill>
+                <a:latin typeface="Be Vietnam Pro" pitchFamily="34" charset="0"/>
+                <a:ea typeface="Be Vietnam Pro" pitchFamily="34" charset="-122"/>
+                <a:cs typeface="Be Vietnam Pro" pitchFamily="34" charset="-120"/>
+              </a:rPr>
+              <a:t> thì không</a:t>
+            </a:r>
+            <a:r>
+              <a:rPr lang="en-US" sz="2550" dirty="0" spc="-2" kern="0">
+                <a:solidFill>
+                  <a:srgbClr val="14161C"/>
+                </a:solidFill>
+                <a:latin typeface="Be Vietnam Pro" pitchFamily="34" charset="0"/>
+                <a:ea typeface="Be Vietnam Pro" pitchFamily="34" charset="-122"/>
+                <a:cs typeface="Be Vietnam Pro" pitchFamily="34" charset="-120"/>
+              </a:rPr>
+              <a:t> an</a:t>
+            </a:r>
+            <a:r>
+              <a:rPr lang="en-US" sz="2550" dirty="0" spc="-12" kern="0">
+                <a:solidFill>
+                  <a:srgbClr val="14161C"/>
+                </a:solidFill>
+                <a:latin typeface="Be Vietnam Pro" pitchFamily="34" charset="0"/>
+                <a:ea typeface="Be Vietnam Pro" pitchFamily="34" charset="-122"/>
+                <a:cs typeface="Be Vietnam Pro" pitchFamily="34" charset="-120"/>
+              </a:rPr>
+              <a:t> toàn</a:t>
+            </a:r>
+            <a:r>
               <a:rPr lang="en-US" sz="2550" dirty="0" spc="0" kern="0">
                 <a:solidFill>
                   <a:srgbClr val="14161C"/>
@@ -9124,139 +9078,7 @@
                 <a:ea typeface="Be Vietnam Pro" pitchFamily="34" charset="-122"/>
                 <a:cs typeface="Be Vietnam Pro" pitchFamily="34" charset="-120"/>
               </a:rPr>
-              <a:t>Mô</a:t>
-            </a:r>
-            <a:r>
-              <a:rPr lang="en-US" sz="2550" dirty="0" spc="-15" kern="0">
-                <a:solidFill>
-                  <a:srgbClr val="14161C"/>
-                </a:solidFill>
-                <a:latin typeface="Be Vietnam Pro" pitchFamily="34" charset="0"/>
-                <a:ea typeface="Be Vietnam Pro" pitchFamily="34" charset="-122"/>
-                <a:cs typeface="Be Vietnam Pro" pitchFamily="34" charset="-120"/>
-              </a:rPr>
-              <a:t> tả</a:t>
-            </a:r>
-            <a:r>
-              <a:rPr lang="en-US" sz="2550" dirty="0" spc="1" kern="0">
-                <a:solidFill>
-                  <a:srgbClr val="14161C"/>
-                </a:solidFill>
-                <a:latin typeface="Be Vietnam Pro" pitchFamily="34" charset="0"/>
-                <a:ea typeface="Be Vietnam Pro" pitchFamily="34" charset="-122"/>
-                <a:cs typeface="Be Vietnam Pro" pitchFamily="34" charset="-120"/>
-              </a:rPr>
-              <a:t> chỉ</a:t>
-            </a:r>
-            <a:r>
-              <a:rPr lang="en-US" sz="2550" dirty="0" spc="-1" kern="0">
-                <a:solidFill>
-                  <a:srgbClr val="14161C"/>
-                </a:solidFill>
-                <a:latin typeface="Be Vietnam Pro" pitchFamily="34" charset="0"/>
-                <a:ea typeface="Be Vietnam Pro" pitchFamily="34" charset="-122"/>
-                <a:cs typeface="Be Vietnam Pro" pitchFamily="34" charset="-120"/>
-              </a:rPr>
-              <a:t> nói thư</a:t>
-            </a:r>
-            <a:r>
-              <a:rPr lang="en-US" sz="2550" dirty="0" spc="-2" kern="0">
-                <a:solidFill>
-                  <a:srgbClr val="14161C"/>
-                </a:solidFill>
-                <a:latin typeface="Be Vietnam Pro" pitchFamily="34" charset="0"/>
-                <a:ea typeface="Be Vietnam Pro" pitchFamily="34" charset="-122"/>
-                <a:cs typeface="Be Vietnam Pro" pitchFamily="34" charset="-120"/>
-              </a:rPr>
-              <a:t> viện</a:t>
-            </a:r>
-            <a:r>
-              <a:rPr lang="en-US" sz="2550" dirty="0" spc="1" kern="0">
-                <a:solidFill>
-                  <a:srgbClr val="14161C"/>
-                </a:solidFill>
-                <a:latin typeface="Be Vietnam Pro" pitchFamily="34" charset="0"/>
-                <a:ea typeface="Be Vietnam Pro" pitchFamily="34" charset="-122"/>
-                <a:cs typeface="Be Vietnam Pro" pitchFamily="34" charset="-120"/>
-              </a:rPr>
-              <a:t> làm gì,</a:t>
-            </a:r>
-            <a:r>
-              <a:rPr lang="en-US" sz="2550" dirty="0" spc="0" kern="0">
-                <a:solidFill>
-                  <a:srgbClr val="14161C"/>
-                </a:solidFill>
-                <a:latin typeface="Be Vietnam Pro" pitchFamily="34" charset="0"/>
-                <a:ea typeface="Be Vietnam Pro" pitchFamily="34" charset="-122"/>
-                <a:cs typeface="Be Vietnam Pro" pitchFamily="34" charset="-120"/>
-              </a:rPr>
-              <a:t> không phải</a:t>
-            </a:r>
-            <a:r>
-              <a:rPr lang="en-US" sz="2550" dirty="0" spc="21" kern="0">
-                <a:solidFill>
-                  <a:srgbClr val="14161C"/>
-                </a:solidFill>
-                <a:latin typeface="Be Vietnam Pro" pitchFamily="34" charset="0"/>
-                <a:ea typeface="Be Vietnam Pro" pitchFamily="34" charset="-122"/>
-                <a:cs typeface="Be Vietnam Pro" pitchFamily="34" charset="-120"/>
-              </a:rPr>
-              <a:t> định</a:t>
-            </a:r>
-            <a:r>
-              <a:rPr lang="en-US" sz="2550" dirty="0" spc="0" kern="0">
-                <a:solidFill>
-                  <a:srgbClr val="14161C"/>
-                </a:solidFill>
-                <a:latin typeface="Be Vietnam Pro" pitchFamily="34" charset="0"/>
-                <a:ea typeface="Be Vietnam Pro" pitchFamily="34" charset="-122"/>
-                <a:cs typeface="Be Vietnam Pro" pitchFamily="34" charset="-120"/>
-              </a:rPr>
-              <a:t> nghĩa</a:t>
-            </a:r>
-            <a:r>
-              <a:rPr lang="en-US" sz="2550" dirty="0" spc="-12" kern="0">
-                <a:solidFill>
-                  <a:srgbClr val="14161C"/>
-                </a:solidFill>
-                <a:latin typeface="Be Vietnam Pro" pitchFamily="34" charset="0"/>
-                <a:ea typeface="Be Vietnam Pro" pitchFamily="34" charset="-122"/>
-                <a:cs typeface="Be Vietnam Pro" pitchFamily="34" charset="-120"/>
-              </a:rPr>
-              <a:t> toán</a:t>
-            </a:r>
-            <a:r>
-              <a:rPr lang="en-US" sz="2550" dirty="0" spc="-3" kern="0">
-                <a:solidFill>
-                  <a:srgbClr val="14161C"/>
-                </a:solidFill>
-                <a:latin typeface="Be Vietnam Pro" pitchFamily="34" charset="0"/>
-                <a:ea typeface="Be Vietnam Pro" pitchFamily="34" charset="-122"/>
-                <a:cs typeface="Be Vietnam Pro" pitchFamily="34" charset="-120"/>
-              </a:rPr>
-              <a:t> học</a:t>
-            </a:r>
-            <a:r>
-              <a:rPr lang="en-US" sz="2550" dirty="0" spc="3" kern="0">
-                <a:solidFill>
-                  <a:srgbClr val="14161C"/>
-                </a:solidFill>
-                <a:latin typeface="Be Vietnam Pro" pitchFamily="34" charset="0"/>
-                <a:ea typeface="Be Vietnam Pro" pitchFamily="34" charset="-122"/>
-                <a:cs typeface="Be Vietnam Pro" pitchFamily="34" charset="-120"/>
-              </a:rPr>
-              <a:t> đầy</a:t>
-            </a:r>
-            <a:r>
-              <a:rPr lang="en-US" sz="2550" dirty="0" spc="0" kern="0">
-                <a:solidFill>
-                  <a:srgbClr val="14161C"/>
-                </a:solidFill>
-                <a:latin typeface="Be Vietnam Pro" pitchFamily="34" charset="0"/>
-                <a:ea typeface="Be Vietnam Pro" pitchFamily="34" charset="-122"/>
-                <a:cs typeface="Be Vietnam Pro" pitchFamily="34" charset="-120"/>
-              </a:rPr>
-              <a:t> đủ.</a:t>
+              <a:t> chút nào.</a:t>
             </a:r>
             <a:endParaRPr lang="en-US" sz="2550" dirty="0"/>
           </a:p>
@@ -9384,17 +9206,6 @@
               <a:buNone/>
             </a:pPr>
             <a:r>
-              <a:rPr lang="en-US" sz="2250" b="1" dirty="0" spc="-70" kern="0">
-                <a:solidFill>
-                  <a:srgbClr val="14161C"/>
-                </a:solidFill>
-                <a:latin typeface="Be Vietnam Pro" pitchFamily="34" charset="0"/>
-                <a:ea typeface="Be Vietnam Pro" pitchFamily="34" charset="-122"/>
-                <a:cs typeface="Be Vietnam Pro" pitchFamily="34" charset="-120"/>
-              </a:rPr>
-              <a:t>Tập</a:t>
-            </a:r>
-            <a:r>
               <a:rPr lang="en-US" sz="2250" b="1" dirty="0" spc="2" kern="0">
                 <a:solidFill>
                   <a:srgbClr val="14161C"/>
@@ -9403,40 +9214,51 @@
                 <a:ea typeface="Be Vietnam Pro" pitchFamily="34" charset="-122"/>
                 <a:cs typeface="Be Vietnam Pro" pitchFamily="34" charset="-120"/>
               </a:rPr>
-              <a:t> tham</a:t>
-            </a:r>
-            <a:r>
-              <a:rPr lang="en-US" sz="2250" b="1" dirty="0" spc="-1" kern="0">
-                <a:solidFill>
-                  <a:srgbClr val="14161C"/>
-                </a:solidFill>
-                <a:latin typeface="Be Vietnam Pro" pitchFamily="34" charset="0"/>
-                <a:ea typeface="Be Vietnam Pro" pitchFamily="34" charset="-122"/>
-                <a:cs typeface="Be Vietnam Pro" pitchFamily="34" charset="-120"/>
-              </a:rPr>
-              <a:t> số</a:t>
-            </a:r>
-            <a:r>
-              <a:rPr lang="en-US" sz="2250" b="1" dirty="0" spc="1" kern="0">
-                <a:solidFill>
-                  <a:srgbClr val="14161C"/>
-                </a:solidFill>
-                <a:latin typeface="Be Vietnam Pro" pitchFamily="34" charset="0"/>
-                <a:ea typeface="Be Vietnam Pro" pitchFamily="34" charset="-122"/>
-                <a:cs typeface="Be Vietnam Pro" pitchFamily="34" charset="-120"/>
-              </a:rPr>
-              <a:t> sinh</a:t>
-            </a:r>
-            <a:r>
-              <a:rPr lang="en-US" sz="2250" b="1" dirty="0" spc="-1" kern="0">
-                <a:solidFill>
-                  <a:srgbClr val="14161C"/>
-                </a:solidFill>
-                <a:latin typeface="Be Vietnam Pro" pitchFamily="34" charset="0"/>
-                <a:ea typeface="Be Vietnam Pro" pitchFamily="34" charset="-122"/>
-                <a:cs typeface="Be Vietnam Pro" pitchFamily="34" charset="-120"/>
-              </a:rPr>
-              <a:t> khóa</a:t>
+              <a:t>Số</a:t>
+            </a:r>
+            <a:r>
+              <a:rPr lang="en-US" sz="2250" b="1" dirty="0" spc="4" kern="0">
+                <a:solidFill>
+                  <a:srgbClr val="14161C"/>
+                </a:solidFill>
+                <a:latin typeface="Be Vietnam Pro" pitchFamily="34" charset="0"/>
+                <a:ea typeface="Be Vietnam Pro" pitchFamily="34" charset="-122"/>
+                <a:cs typeface="Be Vietnam Pro" pitchFamily="34" charset="-120"/>
+              </a:rPr>
+              <a:t> mũ</a:t>
+            </a:r>
+            <a:r>
+              <a:rPr lang="en-US" sz="2250" b="1" dirty="0" spc="-2" kern="0">
+                <a:solidFill>
+                  <a:srgbClr val="14161C"/>
+                </a:solidFill>
+                <a:latin typeface="Be Vietnam Pro" pitchFamily="34" charset="0"/>
+                <a:ea typeface="Be Vietnam Pro" pitchFamily="34" charset="-122"/>
+                <a:cs typeface="Be Vietnam Pro" pitchFamily="34" charset="-120"/>
+              </a:rPr>
+              <a:t> 17</a:t>
+            </a:r>
+            <a:r>
+              <a:rPr lang="en-US" sz="2250" b="1" dirty="0" spc="-17" kern="0">
+                <a:solidFill>
+                  <a:srgbClr val="14161C"/>
+                </a:solidFill>
+                <a:latin typeface="Be Vietnam Pro" pitchFamily="34" charset="0"/>
+                <a:ea typeface="Be Vietnam Pro" pitchFamily="34" charset="-122"/>
+                <a:cs typeface="Be Vietnam Pro" pitchFamily="34" charset="-120"/>
+              </a:rPr>
+              <a:t> và</a:t>
+            </a:r>
+            <a:r>
+              <a:rPr lang="en-US" sz="2250" b="1" dirty="0" spc="0" kern="0">
+                <a:solidFill>
+                  <a:srgbClr val="14161C"/>
+                </a:solidFill>
+                <a:latin typeface="Be Vietnam Pro" pitchFamily="34" charset="0"/>
+                <a:ea typeface="Be Vietnam Pro" pitchFamily="34" charset="-122"/>
+                <a:cs typeface="Be Vietnam Pro" pitchFamily="34" charset="-120"/>
+              </a:rPr>
+              <a:t> 2753</a:t>
             </a:r>
             <a:endParaRPr lang="en-US" sz="2250" dirty="0"/>
           </a:p>
@@ -9501,48 +9323,59 @@
               <a:buNone/>
             </a:pPr>
             <a:r>
-              <a:rPr lang="en-US" sz="2250" b="1" dirty="0" spc="-11" kern="0">
-                <a:solidFill>
-                  <a:srgbClr val="14161C"/>
-                </a:solidFill>
-                <a:latin typeface="Be Vietnam Pro" pitchFamily="34" charset="0"/>
-                <a:ea typeface="Be Vietnam Pro" pitchFamily="34" charset="-122"/>
-                <a:cs typeface="Be Vietnam Pro" pitchFamily="34" charset="-120"/>
-              </a:rPr>
-              <a:t>Một</a:t>
-            </a:r>
-            <a:r>
-              <a:rPr lang="en-US" sz="2250" b="1" dirty="0" spc="2" kern="0">
-                <a:solidFill>
-                  <a:srgbClr val="14161C"/>
-                </a:solidFill>
-                <a:latin typeface="Be Vietnam Pro" pitchFamily="34" charset="0"/>
-                <a:ea typeface="Be Vietnam Pro" pitchFamily="34" charset="-122"/>
-                <a:cs typeface="Be Vietnam Pro" pitchFamily="34" charset="-120"/>
-              </a:rPr>
-              <a:t> cặp</a:t>
-            </a:r>
-            <a:r>
-              <a:rPr lang="en-US" sz="2250" b="1" dirty="0" spc="-1" kern="0">
-                <a:solidFill>
-                  <a:srgbClr val="14161C"/>
-                </a:solidFill>
-                <a:latin typeface="Be Vietnam Pro" pitchFamily="34" charset="0"/>
-                <a:ea typeface="Be Vietnam Pro" pitchFamily="34" charset="-122"/>
-                <a:cs typeface="Be Vietnam Pro" pitchFamily="34" charset="-120"/>
-              </a:rPr>
-              <a:t> khóa</a:t>
-            </a:r>
-            <a:r>
-              <a:rPr lang="en-US" sz="2250" b="1" dirty="0" spc="-21" kern="0">
-                <a:solidFill>
-                  <a:srgbClr val="14161C"/>
-                </a:solidFill>
-                <a:latin typeface="Be Vietnam Pro" pitchFamily="34" charset="0"/>
-                <a:ea typeface="Be Vietnam Pro" pitchFamily="34" charset="-122"/>
-                <a:cs typeface="Be Vietnam Pro" pitchFamily="34" charset="-120"/>
-              </a:rPr>
-              <a:t> RSA</a:t>
+              <a:rPr lang="en-US" sz="2250" b="1" dirty="0" spc="-2" kern="0">
+                <a:solidFill>
+                  <a:srgbClr val="14161C"/>
+                </a:solidFill>
+                <a:latin typeface="Be Vietnam Pro" pitchFamily="34" charset="0"/>
+                <a:ea typeface="Be Vietnam Pro" pitchFamily="34" charset="-122"/>
+                <a:cs typeface="Be Vietnam Pro" pitchFamily="34" charset="-120"/>
+              </a:rPr>
+              <a:t>65</a:t>
+            </a:r>
+            <a:r>
+              <a:rPr lang="en-US" sz="2250" b="1" dirty="0" spc="1" kern="0">
+                <a:solidFill>
+                  <a:srgbClr val="14161C"/>
+                </a:solidFill>
+                <a:latin typeface="Be Vietnam Pro" pitchFamily="34" charset="0"/>
+                <a:ea typeface="Be Vietnam Pro" pitchFamily="34" charset="-122"/>
+                <a:cs typeface="Be Vietnam Pro" pitchFamily="34" charset="-120"/>
+              </a:rPr>
+              <a:t> thành</a:t>
+            </a:r>
+            <a:r>
+              <a:rPr lang="en-US" sz="2250" b="1" dirty="0" spc="6" kern="0">
+                <a:solidFill>
+                  <a:srgbClr val="14161C"/>
+                </a:solidFill>
+                <a:latin typeface="Be Vietnam Pro" pitchFamily="34" charset="0"/>
+                <a:ea typeface="Be Vietnam Pro" pitchFamily="34" charset="-122"/>
+                <a:cs typeface="Be Vietnam Pro" pitchFamily="34" charset="-120"/>
+              </a:rPr>
+              <a:t> 2790,</a:t>
+            </a:r>
+            <a:r>
+              <a:rPr lang="en-US" sz="2250" b="1" dirty="0" spc="-9" kern="0">
+                <a:solidFill>
+                  <a:srgbClr val="14161C"/>
+                </a:solidFill>
+                <a:latin typeface="Be Vietnam Pro" pitchFamily="34" charset="0"/>
+                <a:ea typeface="Be Vietnam Pro" pitchFamily="34" charset="-122"/>
+                <a:cs typeface="Be Vietnam Pro" pitchFamily="34" charset="-120"/>
+              </a:rPr>
+              <a:t> rồi</a:t>
+            </a:r>
+            <a:r>
+              <a:rPr lang="en-US" sz="2250" b="1" dirty="0" spc="1" kern="0">
+                <a:solidFill>
+                  <a:srgbClr val="14161C"/>
+                </a:solidFill>
+                <a:latin typeface="Be Vietnam Pro" pitchFamily="34" charset="0"/>
+                <a:ea typeface="Be Vietnam Pro" pitchFamily="34" charset="-122"/>
+                <a:cs typeface="Be Vietnam Pro" pitchFamily="34" charset="-120"/>
+              </a:rPr>
+              <a:t> lại 65</a:t>
             </a:r>
             <a:endParaRPr lang="en-US" sz="2250" dirty="0"/>
           </a:p>
@@ -9576,6 +9409,39 @@
               <a:buNone/>
             </a:pPr>
             <a:r>
+              <a:rPr lang="en-US" sz="2100" dirty="0" spc="-18" kern="0">
+                <a:solidFill>
+                  <a:srgbClr val="14161C"/>
+                </a:solidFill>
+                <a:latin typeface="Be Vietnam Pro" pitchFamily="34" charset="0"/>
+                <a:ea typeface="Be Vietnam Pro" pitchFamily="34" charset="-122"/>
+                <a:cs typeface="Be Vietnam Pro" pitchFamily="34" charset="-120"/>
+              </a:rPr>
+              <a:t>Java:</a:t>
+            </a:r>
+            <a:r>
+              <a:rPr lang="en-US" sz="2100" dirty="0" spc="-22" kern="0">
+                <a:solidFill>
+                  <a:srgbClr val="14161C"/>
+                </a:solidFill>
+                <a:latin typeface="Be Vietnam Pro" pitchFamily="34" charset="0"/>
+                <a:ea typeface="Be Vietnam Pro" pitchFamily="34" charset="-122"/>
+                <a:cs typeface="Be Vietnam Pro" pitchFamily="34" charset="-120"/>
+              </a:rPr>
+              <a:t> RSAKeyGenParameterSpec</a:t>
+            </a:r>
+            <a:r>
+              <a:rPr lang="en-US" sz="2100" dirty="0" spc="1" kern="0">
+                <a:solidFill>
+                  <a:srgbClr val="14161C"/>
+                </a:solidFill>
+                <a:latin typeface="Be Vietnam Pro" pitchFamily="34" charset="0"/>
+                <a:ea typeface="Be Vietnam Pro" pitchFamily="34" charset="-122"/>
+                <a:cs typeface="Be Vietnam Pro" pitchFamily="34" charset="-120"/>
+              </a:rPr>
+              <a:t> mang</a:t>
+            </a:r>
+            <a:r>
               <a:rPr lang="en-US" sz="2100" dirty="0" spc="0" kern="0">
                 <a:solidFill>
                   <a:srgbClr val="14161C"/>
@@ -9584,62 +9450,40 @@
                 <a:ea typeface="Be Vietnam Pro" pitchFamily="34" charset="-122"/>
                 <a:cs typeface="Be Vietnam Pro" pitchFamily="34" charset="-120"/>
               </a:rPr>
-              <a:t>Mã</a:t>
-            </a:r>
-            <a:r>
-              <a:rPr lang="en-US" sz="2100" dirty="0" spc="-19" kern="0">
-                <a:solidFill>
-                  <a:srgbClr val="14161C"/>
-                </a:solidFill>
-                <a:latin typeface="Be Vietnam Pro" pitchFamily="34" charset="0"/>
-                <a:ea typeface="Be Vietnam Pro" pitchFamily="34" charset="-122"/>
-                <a:cs typeface="Be Vietnam Pro" pitchFamily="34" charset="-120"/>
-              </a:rPr>
-              <a:t> Java</a:t>
-            </a:r>
-            <a:r>
-              <a:rPr lang="en-US" sz="2100" dirty="0" spc="-3" kern="0">
-                <a:solidFill>
-                  <a:srgbClr val="14161C"/>
-                </a:solidFill>
-                <a:latin typeface="Be Vietnam Pro" pitchFamily="34" charset="0"/>
-                <a:ea typeface="Be Vietnam Pro" pitchFamily="34" charset="-122"/>
-                <a:cs typeface="Be Vietnam Pro" pitchFamily="34" charset="-120"/>
-              </a:rPr>
-              <a:t> có</a:t>
-            </a:r>
-            <a:r>
-              <a:rPr lang="en-US" sz="2100" dirty="0" spc="-21" kern="0">
-                <a:solidFill>
-                  <a:srgbClr val="14161C"/>
-                </a:solidFill>
-                <a:latin typeface="Be Vietnam Pro" pitchFamily="34" charset="0"/>
-                <a:ea typeface="Be Vietnam Pro" pitchFamily="34" charset="-122"/>
-                <a:cs typeface="Be Vietnam Pro" pitchFamily="34" charset="-120"/>
-              </a:rPr>
-              <a:t> RSAKeyGenParameterSpec,</a:t>
-            </a:r>
-            <a:r>
-              <a:rPr lang="en-US" sz="2100" dirty="0" spc="-14" kern="0">
-                <a:solidFill>
-                  <a:srgbClr val="14161C"/>
-                </a:solidFill>
-                <a:latin typeface="Be Vietnam Pro" pitchFamily="34" charset="0"/>
-                <a:ea typeface="Be Vietnam Pro" pitchFamily="34" charset="-122"/>
-                <a:cs typeface="Be Vietnam Pro" pitchFamily="34" charset="-120"/>
-              </a:rPr>
-              <a:t> tập</a:t>
-            </a:r>
-            <a:r>
-              <a:rPr lang="en-US" sz="2100" dirty="0" spc="-2" kern="0">
-                <a:solidFill>
-                  <a:srgbClr val="14161C"/>
-                </a:solidFill>
-                <a:latin typeface="Be Vietnam Pro" pitchFamily="34" charset="0"/>
-                <a:ea typeface="Be Vietnam Pro" pitchFamily="34" charset="-122"/>
-                <a:cs typeface="Be Vietnam Pro" pitchFamily="34" charset="-120"/>
-              </a:rPr>
-              <a:t> tham</a:t>
+              <a:t> kích</a:t>
+            </a:r>
+            <a:r>
+              <a:rPr lang="en-US" sz="2100" dirty="0" spc="3" kern="0">
+                <a:solidFill>
+                  <a:srgbClr val="14161C"/>
+                </a:solidFill>
+                <a:latin typeface="Be Vietnam Pro" pitchFamily="34" charset="0"/>
+                <a:ea typeface="Be Vietnam Pro" pitchFamily="34" charset="-122"/>
+                <a:cs typeface="Be Vietnam Pro" pitchFamily="34" charset="-120"/>
+              </a:rPr>
+              <a:t> thước</a:t>
+            </a:r>
+            <a:r>
+              <a:rPr lang="en-US" sz="2100" dirty="0" spc="-4" kern="0">
+                <a:solidFill>
+                  <a:srgbClr val="14161C"/>
+                </a:solidFill>
+                <a:latin typeface="Be Vietnam Pro" pitchFamily="34" charset="0"/>
+                <a:ea typeface="Be Vietnam Pro" pitchFamily="34" charset="-122"/>
+                <a:cs typeface="Be Vietnam Pro" pitchFamily="34" charset="-120"/>
+              </a:rPr>
+              <a:t> khóa</a:t>
+            </a:r>
+            <a:r>
+              <a:rPr lang="en-US" sz="2100" dirty="0" spc="-18" kern="0">
+                <a:solidFill>
+                  <a:srgbClr val="14161C"/>
+                </a:solidFill>
+                <a:latin typeface="Be Vietnam Pro" pitchFamily="34" charset="0"/>
+                <a:ea typeface="Be Vietnam Pro" pitchFamily="34" charset="-122"/>
+                <a:cs typeface="Be Vietnam Pro" pitchFamily="34" charset="-120"/>
+              </a:rPr>
+              <a:t> và</a:t>
             </a:r>
             <a:r>
               <a:rPr lang="en-US" sz="2100" dirty="0" spc="-9" kern="0">
@@ -9653,70 +9497,26 @@
               <a:t> số</a:t>
             </a:r>
             <a:r>
-              <a:rPr lang="en-US" sz="2100" dirty="0" spc="15" kern="0">
-                <a:solidFill>
-                  <a:srgbClr val="14161C"/>
-                </a:solidFill>
-                <a:latin typeface="Be Vietnam Pro" pitchFamily="34" charset="0"/>
-                <a:ea typeface="Be Vietnam Pro" pitchFamily="34" charset="-122"/>
-                <a:cs typeface="Be Vietnam Pro" pitchFamily="34" charset="-120"/>
-              </a:rPr>
-              <a:t> để</a:t>
-            </a:r>
-            <a:r>
-              <a:rPr lang="en-US" sz="2100" dirty="0" spc="1" kern="0">
-                <a:solidFill>
-                  <a:srgbClr val="14161C"/>
-                </a:solidFill>
-                <a:latin typeface="Be Vietnam Pro" pitchFamily="34" charset="0"/>
-                <a:ea typeface="Be Vietnam Pro" pitchFamily="34" charset="-122"/>
-                <a:cs typeface="Be Vietnam Pro" pitchFamily="34" charset="-120"/>
-              </a:rPr>
-              <a:t> sinh</a:t>
-            </a:r>
-            <a:r>
-              <a:rPr lang="en-US" sz="2100" dirty="0" spc="-8" kern="0">
-                <a:solidFill>
-                  <a:srgbClr val="14161C"/>
-                </a:solidFill>
-                <a:latin typeface="Be Vietnam Pro" pitchFamily="34" charset="0"/>
-                <a:ea typeface="Be Vietnam Pro" pitchFamily="34" charset="-122"/>
-                <a:cs typeface="Be Vietnam Pro" pitchFamily="34" charset="-120"/>
-              </a:rPr>
-              <a:t> một</a:t>
-            </a:r>
-            <a:r>
-              <a:rPr lang="en-US" sz="2100" dirty="0" spc="-3" kern="0">
-                <a:solidFill>
-                  <a:srgbClr val="14161C"/>
-                </a:solidFill>
-                <a:latin typeface="Be Vietnam Pro" pitchFamily="34" charset="0"/>
-                <a:ea typeface="Be Vietnam Pro" pitchFamily="34" charset="-122"/>
-                <a:cs typeface="Be Vietnam Pro" pitchFamily="34" charset="-120"/>
-              </a:rPr>
-              <a:t> cặp</a:t>
-            </a:r>
-            <a:r>
-              <a:rPr lang="en-US" sz="2100" dirty="0" spc="-4" kern="0">
-                <a:solidFill>
-                  <a:srgbClr val="14161C"/>
-                </a:solidFill>
-                <a:latin typeface="Be Vietnam Pro" pitchFamily="34" charset="0"/>
-                <a:ea typeface="Be Vietnam Pro" pitchFamily="34" charset="-122"/>
-                <a:cs typeface="Be Vietnam Pro" pitchFamily="34" charset="-120"/>
-              </a:rPr>
-              <a:t> khóa</a:t>
-            </a:r>
-            <a:r>
-              <a:rPr lang="en-US" sz="2100" dirty="0" spc="-15" kern="0">
-                <a:solidFill>
-                  <a:srgbClr val="14161C"/>
-                </a:solidFill>
-                <a:latin typeface="Be Vietnam Pro" pitchFamily="34" charset="0"/>
-                <a:ea typeface="Be Vietnam Pro" pitchFamily="34" charset="-122"/>
-                <a:cs typeface="Be Vietnam Pro" pitchFamily="34" charset="-120"/>
-              </a:rPr>
-              <a:t> RSA.</a:t>
+              <a:rPr lang="en-US" sz="2100" dirty="0" spc="-1" kern="0">
+                <a:solidFill>
+                  <a:srgbClr val="14161C"/>
+                </a:solidFill>
+                <a:latin typeface="Be Vietnam Pro" pitchFamily="34" charset="0"/>
+                <a:ea typeface="Be Vietnam Pro" pitchFamily="34" charset="-122"/>
+                <a:cs typeface="Be Vietnam Pro" pitchFamily="34" charset="-120"/>
+              </a:rPr>
+              <a:t> mũ công</a:t>
+            </a:r>
+            <a:r>
+              <a:rPr lang="en-US" sz="2100" dirty="0" spc="0" kern="0">
+                <a:solidFill>
+                  <a:srgbClr val="14161C"/>
+                </a:solidFill>
+                <a:latin typeface="Be Vietnam Pro" pitchFamily="34" charset="0"/>
+                <a:ea typeface="Be Vietnam Pro" pitchFamily="34" charset="-122"/>
+                <a:cs typeface="Be Vietnam Pro" pitchFamily="34" charset="-120"/>
+              </a:rPr>
+              <a:t> khai.</a:t>
             </a:r>
             <a:endParaRPr lang="en-US" sz="2100" dirty="0"/>
           </a:p>
@@ -9850,48 +9650,15 @@
               <a:buNone/>
             </a:pPr>
             <a:r>
-              <a:rPr lang="en-US" sz="2100" b="1" dirty="0" spc="-4" kern="0">
-                <a:solidFill>
-                  <a:srgbClr val="14161C"/>
-                </a:solidFill>
-                <a:latin typeface="Be Vietnam Pro" pitchFamily="34" charset="0"/>
-                <a:ea typeface="Be Vietnam Pro" pitchFamily="34" charset="-122"/>
-                <a:cs typeface="Be Vietnam Pro" pitchFamily="34" charset="-120"/>
-              </a:rPr>
-              <a:t>Số</a:t>
-            </a:r>
-            <a:r>
-              <a:rPr lang="en-US" sz="2100" b="1" dirty="0" spc="-13" kern="0">
-                <a:solidFill>
-                  <a:srgbClr val="14161C"/>
-                </a:solidFill>
-                <a:latin typeface="Be Vietnam Pro" pitchFamily="34" charset="0"/>
-                <a:ea typeface="Be Vietnam Pro" pitchFamily="34" charset="-122"/>
-                <a:cs typeface="Be Vietnam Pro" pitchFamily="34" charset="-120"/>
-              </a:rPr>
-              <a:t> nguyên</a:t>
-            </a:r>
-            <a:r>
-              <a:rPr lang="en-US" sz="2100" b="1" dirty="0" spc="7" kern="0">
-                <a:solidFill>
-                  <a:srgbClr val="14161C"/>
-                </a:solidFill>
-                <a:latin typeface="Be Vietnam Pro" pitchFamily="34" charset="0"/>
-                <a:ea typeface="Be Vietnam Pro" pitchFamily="34" charset="-122"/>
-                <a:cs typeface="Be Vietnam Pro" pitchFamily="34" charset="-120"/>
-              </a:rPr>
-              <a:t> dương</a:t>
-            </a:r>
-            <a:r>
-              <a:rPr lang="en-US" sz="2100" b="1" dirty="0" spc="2" kern="0">
-                <a:solidFill>
-                  <a:srgbClr val="14161C"/>
-                </a:solidFill>
-                <a:latin typeface="Be Vietnam Pro" pitchFamily="34" charset="0"/>
-                <a:ea typeface="Be Vietnam Pro" pitchFamily="34" charset="-122"/>
-                <a:cs typeface="Be Vietnam Pro" pitchFamily="34" charset="-120"/>
-              </a:rPr>
-              <a:t> n</a:t>
+              <a:rPr lang="en-US" sz="2100" b="1" dirty="0" spc="1" kern="0">
+                <a:solidFill>
+                  <a:srgbClr val="14161C"/>
+                </a:solidFill>
+                <a:latin typeface="Be Vietnam Pro" pitchFamily="34" charset="0"/>
+                <a:ea typeface="Be Vietnam Pro" pitchFamily="34" charset="-122"/>
+                <a:cs typeface="Be Vietnam Pro" pitchFamily="34" charset="-120"/>
+              </a:rPr>
+              <a:t>3233</a:t>
             </a:r>
             <a:endParaRPr lang="en-US" sz="2100" dirty="0"/>
           </a:p>
@@ -10024,70 +9791,26 @@
               <a:buNone/>
             </a:pPr>
             <a:r>
-              <a:rPr lang="en-US" sz="2100" b="1" dirty="0" spc="11" kern="0">
-                <a:solidFill>
-                  <a:srgbClr val="14161C"/>
-                </a:solidFill>
-                <a:latin typeface="Be Vietnam Pro" pitchFamily="34" charset="0"/>
-                <a:ea typeface="Be Vietnam Pro" pitchFamily="34" charset="-122"/>
-                <a:cs typeface="Be Vietnam Pro" pitchFamily="34" charset="-120"/>
-              </a:rPr>
-              <a:t>Thừa</a:t>
-            </a:r>
-            <a:r>
-              <a:rPr lang="en-US" sz="2100" b="1" dirty="0" spc="-6" kern="0">
-                <a:solidFill>
-                  <a:srgbClr val="14161C"/>
-                </a:solidFill>
-                <a:latin typeface="Be Vietnam Pro" pitchFamily="34" charset="0"/>
-                <a:ea typeface="Be Vietnam Pro" pitchFamily="34" charset="-122"/>
-                <a:cs typeface="Be Vietnam Pro" pitchFamily="34" charset="-120"/>
-              </a:rPr>
-              <a:t> số</a:t>
-            </a:r>
-            <a:r>
-              <a:rPr lang="en-US" sz="2100" b="1" dirty="0" spc="-13" kern="0">
-                <a:solidFill>
-                  <a:srgbClr val="14161C"/>
-                </a:solidFill>
-                <a:latin typeface="Be Vietnam Pro" pitchFamily="34" charset="0"/>
-                <a:ea typeface="Be Vietnam Pro" pitchFamily="34" charset="-122"/>
-                <a:cs typeface="Be Vietnam Pro" pitchFamily="34" charset="-120"/>
-              </a:rPr>
-              <a:t> nguyên</a:t>
-            </a:r>
-            <a:r>
-              <a:rPr lang="en-US" sz="2100" b="1" dirty="0" spc="-7" kern="0">
-                <a:solidFill>
-                  <a:srgbClr val="14161C"/>
-                </a:solidFill>
-                <a:latin typeface="Be Vietnam Pro" pitchFamily="34" charset="0"/>
-                <a:ea typeface="Be Vietnam Pro" pitchFamily="34" charset="-122"/>
-                <a:cs typeface="Be Vietnam Pro" pitchFamily="34" charset="-120"/>
-              </a:rPr>
-              <a:t> tố,</a:t>
-            </a:r>
-            <a:r>
-              <a:rPr lang="en-US" sz="2100" b="1" dirty="0" spc="-6" kern="0">
-                <a:solidFill>
-                  <a:srgbClr val="14161C"/>
-                </a:solidFill>
-                <a:latin typeface="Be Vietnam Pro" pitchFamily="34" charset="0"/>
-                <a:ea typeface="Be Vietnam Pro" pitchFamily="34" charset="-122"/>
-                <a:cs typeface="Be Vietnam Pro" pitchFamily="34" charset="-120"/>
-              </a:rPr>
-              <a:t> số</a:t>
-            </a:r>
-            <a:r>
-              <a:rPr lang="en-US" sz="2100" b="1" dirty="0" spc="2" kern="0">
-                <a:solidFill>
-                  <a:srgbClr val="14161C"/>
-                </a:solidFill>
-                <a:latin typeface="Be Vietnam Pro" pitchFamily="34" charset="0"/>
-                <a:ea typeface="Be Vietnam Pro" pitchFamily="34" charset="-122"/>
-                <a:cs typeface="Be Vietnam Pro" pitchFamily="34" charset="-120"/>
-              </a:rPr>
-              <a:t> lần</a:t>
+              <a:rPr lang="en-US" sz="2100" b="1" dirty="0" spc="-1" kern="0">
+                <a:solidFill>
+                  <a:srgbClr val="14161C"/>
+                </a:solidFill>
+                <a:latin typeface="Be Vietnam Pro" pitchFamily="34" charset="0"/>
+                <a:ea typeface="Be Vietnam Pro" pitchFamily="34" charset="-122"/>
+                <a:cs typeface="Be Vietnam Pro" pitchFamily="34" charset="-120"/>
+              </a:rPr>
+              <a:t>{53:</a:t>
+            </a:r>
+            <a:r>
+              <a:rPr lang="en-US" sz="2100" b="1" dirty="0" spc="1" kern="0">
+                <a:solidFill>
+                  <a:srgbClr val="14161C"/>
+                </a:solidFill>
+                <a:latin typeface="Be Vietnam Pro" pitchFamily="34" charset="0"/>
+                <a:ea typeface="Be Vietnam Pro" pitchFamily="34" charset="-122"/>
+                <a:cs typeface="Be Vietnam Pro" pitchFamily="34" charset="-120"/>
+              </a:rPr>
+              <a:t> 1,</a:t>
             </a:r>
             <a:r>
               <a:rPr lang="en-US" sz="2100" b="1" dirty="0" spc="0" kern="0">
@@ -10098,7 +9821,18 @@
                 <a:ea typeface="Be Vietnam Pro" pitchFamily="34" charset="-122"/>
                 <a:cs typeface="Be Vietnam Pro" pitchFamily="34" charset="-120"/>
               </a:rPr>
-              <a:t> lặp</a:t>
+              <a:t> 61:</a:t>
+            </a:r>
+            <a:r>
+              <a:rPr lang="en-US" sz="2100" b="1" dirty="0" spc="-2" kern="0">
+                <a:solidFill>
+                  <a:srgbClr val="14161C"/>
+                </a:solidFill>
+                <a:latin typeface="Be Vietnam Pro" pitchFamily="34" charset="0"/>
+                <a:ea typeface="Be Vietnam Pro" pitchFamily="34" charset="-122"/>
+                <a:cs typeface="Be Vietnam Pro" pitchFamily="34" charset="-120"/>
+              </a:rPr>
+              <a:t> 1}</a:t>
             </a:r>
             <a:endParaRPr lang="en-US" sz="2100" dirty="0"/>
           </a:p>
@@ -10143,6 +9877,61 @@
               <a:t>SymPy:</a:t>
             </a:r>
             <a:r>
+              <a:rPr lang="en-US" sz="2100" dirty="0" spc="-11" kern="0">
+                <a:solidFill>
+                  <a:srgbClr val="14161C"/>
+                </a:solidFill>
+                <a:latin typeface="Be Vietnam Pro" pitchFamily="34" charset="0"/>
+                <a:ea typeface="Be Vietnam Pro" pitchFamily="34" charset="-122"/>
+                <a:cs typeface="Be Vietnam Pro" pitchFamily="34" charset="-120"/>
+              </a:rPr>
+              <a:t> factorint</a:t>
+            </a:r>
+            <a:r>
+              <a:rPr lang="en-US" sz="2100" dirty="0" spc="-24" kern="0">
+                <a:solidFill>
+                  <a:srgbClr val="14161C"/>
+                </a:solidFill>
+                <a:latin typeface="Be Vietnam Pro" pitchFamily="34" charset="0"/>
+                <a:ea typeface="Be Vietnam Pro" pitchFamily="34" charset="-122"/>
+                <a:cs typeface="Be Vietnam Pro" pitchFamily="34" charset="-120"/>
+              </a:rPr>
+              <a:t> trả</a:t>
+            </a:r>
+            <a:r>
+              <a:rPr lang="en-US" sz="2100" dirty="0" spc="-3" kern="0">
+                <a:solidFill>
+                  <a:srgbClr val="14161C"/>
+                </a:solidFill>
+                <a:latin typeface="Be Vietnam Pro" pitchFamily="34" charset="0"/>
+                <a:ea typeface="Be Vietnam Pro" pitchFamily="34" charset="-122"/>
+                <a:cs typeface="Be Vietnam Pro" pitchFamily="34" charset="-120"/>
+              </a:rPr>
+              <a:t> các</a:t>
+            </a:r>
+            <a:r>
+              <a:rPr lang="en-US" sz="2100" dirty="0" spc="6" kern="0">
+                <a:solidFill>
+                  <a:srgbClr val="14161C"/>
+                </a:solidFill>
+                <a:latin typeface="Be Vietnam Pro" pitchFamily="34" charset="0"/>
+                <a:ea typeface="Be Vietnam Pro" pitchFamily="34" charset="-122"/>
+                <a:cs typeface="Be Vietnam Pro" pitchFamily="34" charset="-120"/>
+              </a:rPr>
+              <a:t> thừa</a:t>
+            </a:r>
+            <a:r>
+              <a:rPr lang="en-US" sz="2100" dirty="0" spc="-9" kern="0">
+                <a:solidFill>
+                  <a:srgbClr val="14161C"/>
+                </a:solidFill>
+                <a:latin typeface="Be Vietnam Pro" pitchFamily="34" charset="0"/>
+                <a:ea typeface="Be Vietnam Pro" pitchFamily="34" charset="-122"/>
+                <a:cs typeface="Be Vietnam Pro" pitchFamily="34" charset="-120"/>
+              </a:rPr>
+              <a:t> số</a:t>
+            </a:r>
+            <a:r>
               <a:rPr lang="en-US" sz="2100" dirty="0" spc="-10" kern="0">
                 <a:solidFill>
                   <a:srgbClr val="14161C"/>
@@ -10151,98 +9940,10 @@
                 <a:ea typeface="Be Vietnam Pro" pitchFamily="34" charset="-122"/>
                 <a:cs typeface="Be Vietnam Pro" pitchFamily="34" charset="-120"/>
               </a:rPr>
-              <a:t> factorint(n)</a:t>
-            </a:r>
-            <a:r>
-              <a:rPr lang="en-US" sz="2100" dirty="0" spc="-25" kern="0">
-                <a:solidFill>
-                  <a:srgbClr val="14161C"/>
-                </a:solidFill>
-                <a:latin typeface="Be Vietnam Pro" pitchFamily="34" charset="0"/>
-                <a:ea typeface="Be Vietnam Pro" pitchFamily="34" charset="-122"/>
-                <a:cs typeface="Be Vietnam Pro" pitchFamily="34" charset="-120"/>
-              </a:rPr>
-              <a:t> trả</a:t>
-            </a:r>
-            <a:r>
-              <a:rPr lang="en-US" sz="2100" dirty="0" spc="-16" kern="0">
-                <a:solidFill>
-                  <a:srgbClr val="14161C"/>
-                </a:solidFill>
-                <a:latin typeface="Be Vietnam Pro" pitchFamily="34" charset="0"/>
-                <a:ea typeface="Be Vietnam Pro" pitchFamily="34" charset="-122"/>
-                <a:cs typeface="Be Vietnam Pro" pitchFamily="34" charset="-120"/>
-              </a:rPr>
-              <a:t> về</a:t>
-            </a:r>
-            <a:r>
-              <a:rPr lang="en-US" sz="2100" dirty="0" spc="0" kern="0">
-                <a:solidFill>
-                  <a:srgbClr val="14161C"/>
-                </a:solidFill>
-                <a:latin typeface="Be Vietnam Pro" pitchFamily="34" charset="0"/>
-                <a:ea typeface="Be Vietnam Pro" pitchFamily="34" charset="-122"/>
-                <a:cs typeface="Be Vietnam Pro" pitchFamily="34" charset="-120"/>
-              </a:rPr>
-              <a:t> từ</a:t>
-            </a:r>
-            <a:r>
-              <a:rPr lang="en-US" sz="2100" dirty="0" spc="19" kern="0">
-                <a:solidFill>
-                  <a:srgbClr val="14161C"/>
-                </a:solidFill>
-                <a:latin typeface="Be Vietnam Pro" pitchFamily="34" charset="0"/>
-                <a:ea typeface="Be Vietnam Pro" pitchFamily="34" charset="-122"/>
-                <a:cs typeface="Be Vietnam Pro" pitchFamily="34" charset="-120"/>
-              </a:rPr>
-              <a:t> điển</a:t>
-            </a:r>
-            <a:r>
-              <a:rPr lang="en-US" sz="2100" dirty="0" spc="-3" kern="0">
-                <a:solidFill>
-                  <a:srgbClr val="14161C"/>
-                </a:solidFill>
-                <a:latin typeface="Be Vietnam Pro" pitchFamily="34" charset="0"/>
-                <a:ea typeface="Be Vietnam Pro" pitchFamily="34" charset="-122"/>
-                <a:cs typeface="Be Vietnam Pro" pitchFamily="34" charset="-120"/>
-              </a:rPr>
-              <a:t> các</a:t>
-            </a:r>
-            <a:r>
-              <a:rPr lang="en-US" sz="2100" dirty="0" spc="6" kern="0">
-                <a:solidFill>
-                  <a:srgbClr val="14161C"/>
-                </a:solidFill>
-                <a:latin typeface="Be Vietnam Pro" pitchFamily="34" charset="0"/>
-                <a:ea typeface="Be Vietnam Pro" pitchFamily="34" charset="-122"/>
-                <a:cs typeface="Be Vietnam Pro" pitchFamily="34" charset="-120"/>
-              </a:rPr>
-              <a:t> thừa</a:t>
-            </a:r>
-            <a:r>
-              <a:rPr lang="en-US" sz="2100" dirty="0" spc="-10" kern="0">
-                <a:solidFill>
-                  <a:srgbClr val="14161C"/>
-                </a:solidFill>
-                <a:latin typeface="Be Vietnam Pro" pitchFamily="34" charset="0"/>
-                <a:ea typeface="Be Vietnam Pro" pitchFamily="34" charset="-122"/>
-                <a:cs typeface="Be Vietnam Pro" pitchFamily="34" charset="-120"/>
-              </a:rPr>
-              <a:t> số</a:t>
-            </a:r>
-            <a:r>
-              <a:rPr lang="en-US" sz="2100" dirty="0" spc="-9" kern="0">
-                <a:solidFill>
-                  <a:srgbClr val="14161C"/>
-                </a:solidFill>
-                <a:latin typeface="Be Vietnam Pro" pitchFamily="34" charset="0"/>
-                <a:ea typeface="Be Vietnam Pro" pitchFamily="34" charset="-122"/>
-                <a:cs typeface="Be Vietnam Pro" pitchFamily="34" charset="-120"/>
-              </a:rPr>
               <a:t> nguyên</a:t>
             </a:r>
             <a:r>
-              <a:rPr lang="en-US" sz="2100" dirty="0" spc="-19" kern="0">
+              <a:rPr lang="en-US" sz="2100" dirty="0" spc="-17" kern="0">
                 <a:solidFill>
                   <a:srgbClr val="14161C"/>
                 </a:solidFill>
@@ -10253,7 +9954,7 @@
               <a:t> tố</a:t>
             </a:r>
             <a:r>
-              <a:rPr lang="en-US" sz="2100" dirty="0" spc="-17" kern="0">
+              <a:rPr lang="en-US" sz="2100" dirty="0" spc="-18" kern="0">
                 <a:solidFill>
                   <a:srgbClr val="14161C"/>
                 </a:solidFill>
@@ -10978,7 +10679,7 @@
               <a:t>Một</a:t>
             </a:r>
             <a:r>
-              <a:rPr lang="en-US" sz="3000" b="1" dirty="0" spc="-2" kern="0">
+              <a:rPr lang="en-US" sz="3000" b="1" dirty="0" spc="-11" kern="0">
                 <a:solidFill>
                   <a:srgbClr val="FFB454"/>
                 </a:solidFill>
@@ -10986,7 +10687,18 @@
                 <a:ea typeface="Be Vietnam Pro" pitchFamily="34" charset="-122"/>
                 <a:cs typeface="Be Vietnam Pro" pitchFamily="34" charset="-120"/>
               </a:rPr>
-              <a:t> cái</a:t>
+              <a:t> nén</a:t>
+            </a:r>
+            <a:r>
+              <a:rPr lang="en-US" sz="3000" b="1" dirty="0" spc="4" kern="0">
+                <a:solidFill>
+                  <a:srgbClr val="FFB454"/>
+                </a:solidFill>
+                <a:latin typeface="Be Vietnam Pro" pitchFamily="34" charset="0"/>
+                <a:ea typeface="Be Vietnam Pro" pitchFamily="34" charset="-122"/>
+                <a:cs typeface="Be Vietnam Pro" pitchFamily="34" charset="-120"/>
+              </a:rPr>
+              <a:t> dữ</a:t>
             </a:r>
             <a:r>
               <a:rPr lang="en-US" sz="3000" b="1" dirty="0" spc="2" kern="0">
@@ -10997,10 +10709,10 @@
                 <a:ea typeface="Be Vietnam Pro" pitchFamily="34" charset="-122"/>
                 <a:cs typeface="Be Vietnam Pro" pitchFamily="34" charset="-120"/>
               </a:rPr>
-              <a:t> chỉ</a:t>
-            </a:r>
-            <a:r>
-              <a:rPr lang="en-US" sz="3000" b="1" dirty="0" spc="-5" kern="0">
+              <a:t> liệu,</a:t>
+            </a:r>
+            <a:r>
+              <a:rPr lang="en-US" sz="3000" b="1" dirty="0" spc="-12" kern="0">
                 <a:solidFill>
                   <a:srgbClr val="FFB454"/>
                 </a:solidFill>
@@ -11008,10 +10720,10 @@
                 <a:ea typeface="Be Vietnam Pro" pitchFamily="34" charset="-122"/>
                 <a:cs typeface="Be Vietnam Pro" pitchFamily="34" charset="-120"/>
               </a:rPr>
-              <a:t> có</a:t>
-            </a:r>
-            <a:r>
-              <a:rPr lang="en-US" sz="3000" b="1" dirty="0" spc="-10" kern="0">
+              <a:t> một</a:t>
+            </a:r>
+            <a:r>
+              <a:rPr lang="en-US" sz="3000" b="1" dirty="0" spc="1" kern="0">
                 <a:solidFill>
                   <a:srgbClr val="FFB454"/>
                 </a:solidFill>
@@ -11019,7 +10731,7 @@
                 <a:ea typeface="Be Vietnam Pro" pitchFamily="34" charset="-122"/>
                 <a:cs typeface="Be Vietnam Pro" pitchFamily="34" charset="-120"/>
               </a:rPr>
-              <a:t> tên</a:t>
+              <a:t> băm</a:t>
             </a:r>
             <a:endParaRPr lang="en-US" sz="3000" dirty="0"/>
           </a:p>
@@ -11053,7 +10765,7 @@
               <a:buNone/>
             </a:pPr>
             <a:r>
-              <a:rPr lang="en-US" sz="2700" dirty="0" spc="2" kern="0">
+              <a:rPr lang="en-US" sz="2700" dirty="0" spc="-6" kern="0">
                 <a:solidFill>
                   <a:srgbClr val="F3EEE3"/>
                 </a:solidFill>
@@ -11061,10 +10773,10 @@
                 <a:ea typeface="Be Vietnam Pro" pitchFamily="34" charset="-122"/>
                 <a:cs typeface="Be Vietnam Pro" pitchFamily="34" charset="-120"/>
               </a:rPr>
-              <a:t>Mã</a:t>
-            </a:r>
-            <a:r>
-              <a:rPr lang="en-US" sz="2700" dirty="0" spc="-6" kern="0">
+              <a:t>Huffman:</a:t>
+            </a:r>
+            <a:r>
+              <a:rPr lang="en-US" sz="2700" dirty="0" spc="-3" kern="0">
                 <a:solidFill>
                   <a:srgbClr val="F3EEE3"/>
                 </a:solidFill>
@@ -11072,10 +10784,10 @@
                 <a:ea typeface="Be Vietnam Pro" pitchFamily="34" charset="-122"/>
                 <a:cs typeface="Be Vietnam Pro" pitchFamily="34" charset="-120"/>
               </a:rPr>
-              <a:t> Huffman:</a:t>
-            </a:r>
-            <a:r>
-              <a:rPr lang="en-US" sz="2700" dirty="0" spc="-2" kern="0">
+              <a:t> 88</a:t>
+            </a:r>
+            <a:r>
+              <a:rPr lang="en-US" sz="2700" dirty="0" spc="0" kern="0">
                 <a:solidFill>
                   <a:srgbClr val="F3EEE3"/>
                 </a:solidFill>
@@ -11083,7 +10795,18 @@
                 <a:ea typeface="Be Vietnam Pro" pitchFamily="34" charset="-122"/>
                 <a:cs typeface="Be Vietnam Pro" pitchFamily="34" charset="-120"/>
               </a:rPr>
-              <a:t> nguồn</a:t>
+              <a:t> bit thành</a:t>
+            </a:r>
+            <a:r>
+              <a:rPr lang="en-US" sz="2700" dirty="0" spc="-5" kern="0">
+                <a:solidFill>
+                  <a:srgbClr val="F3EEE3"/>
+                </a:solidFill>
+                <a:latin typeface="Be Vietnam Pro" pitchFamily="34" charset="0"/>
+                <a:ea typeface="Be Vietnam Pro" pitchFamily="34" charset="-122"/>
+                <a:cs typeface="Be Vietnam Pro" pitchFamily="34" charset="-120"/>
+              </a:rPr>
+              <a:t> 23</a:t>
             </a:r>
             <a:r>
               <a:rPr lang="en-US" sz="2700" dirty="0" spc="-1" kern="0">
@@ -11094,29 +10817,7 @@
                 <a:ea typeface="Be Vietnam Pro" pitchFamily="34" charset="-122"/>
                 <a:cs typeface="Be Vietnam Pro" pitchFamily="34" charset="-120"/>
               </a:rPr>
-              <a:t> chỉ</a:t>
-            </a:r>
-            <a:r>
-              <a:rPr lang="en-US" sz="2700" dirty="0" spc="-2" kern="0">
-                <a:solidFill>
-                  <a:srgbClr val="F3EEE3"/>
-                </a:solidFill>
-                <a:latin typeface="Be Vietnam Pro" pitchFamily="34" charset="0"/>
-                <a:ea typeface="Be Vietnam Pro" pitchFamily="34" charset="-122"/>
-                <a:cs typeface="Be Vietnam Pro" pitchFamily="34" charset="-120"/>
-              </a:rPr>
-              <a:t> nêu</a:t>
-            </a:r>
-            <a:r>
-              <a:rPr lang="en-US" sz="2700" dirty="0" spc="-13" kern="0">
-                <a:solidFill>
-                  <a:srgbClr val="F3EEE3"/>
-                </a:solidFill>
-                <a:latin typeface="Be Vietnam Pro" pitchFamily="34" charset="0"/>
-                <a:ea typeface="Be Vietnam Pro" pitchFamily="34" charset="-122"/>
-                <a:cs typeface="Be Vietnam Pro" pitchFamily="34" charset="-120"/>
-              </a:rPr>
-              <a:t> tên.</a:t>
+              <a:t> bit.</a:t>
             </a:r>
             <a:endParaRPr lang="en-US" sz="2700" dirty="0"/>
           </a:p>
@@ -11128,6 +10829,28 @@
               <a:buNone/>
             </a:pPr>
             <a:r>
+              <a:rPr lang="en-US" sz="2700" dirty="0" spc="-1" kern="0">
+                <a:solidFill>
+                  <a:srgbClr val="F3EEE3"/>
+                </a:solidFill>
+                <a:latin typeface="Be Vietnam Pro" pitchFamily="34" charset="0"/>
+                <a:ea typeface="Be Vietnam Pro" pitchFamily="34" charset="-122"/>
+                <a:cs typeface="Be Vietnam Pro" pitchFamily="34" charset="-120"/>
+              </a:rPr>
+              <a:t>SHA-256: luôn</a:t>
+            </a:r>
+            <a:r>
+              <a:rPr lang="en-US" sz="2700" dirty="0" spc="-40" kern="0">
+                <a:solidFill>
+                  <a:srgbClr val="F3EEE3"/>
+                </a:solidFill>
+                <a:latin typeface="Be Vietnam Pro" pitchFamily="34" charset="0"/>
+                <a:ea typeface="Be Vietnam Pro" pitchFamily="34" charset="-122"/>
+                <a:cs typeface="Be Vietnam Pro" pitchFamily="34" charset="-120"/>
+              </a:rPr>
+              <a:t> ra</a:t>
+            </a:r>
+            <a:r>
               <a:rPr lang="en-US" sz="2700" dirty="0" spc="0" kern="0">
                 <a:solidFill>
                   <a:srgbClr val="F3EEE3"/>
@@ -11136,7 +10859,7 @@
                 <a:ea typeface="Be Vietnam Pro" pitchFamily="34" charset="-122"/>
                 <a:cs typeface="Be Vietnam Pro" pitchFamily="34" charset="-120"/>
               </a:rPr>
-              <a:t>SHA:</a:t>
+              <a:t> 64</a:t>
             </a:r>
             <a:r>
               <a:rPr lang="en-US" sz="2700" dirty="0" spc="-2" kern="0">
@@ -11147,10 +10870,10 @@
                 <a:ea typeface="Be Vietnam Pro" pitchFamily="34" charset="-122"/>
                 <a:cs typeface="Be Vietnam Pro" pitchFamily="34" charset="-120"/>
               </a:rPr>
-              <a:t> họ</a:t>
-            </a:r>
-            <a:r>
-              <a:rPr lang="en-US" sz="2700" dirty="0" spc="-7" kern="0">
+              <a:t> ký</a:t>
+            </a:r>
+            <a:r>
+              <a:rPr lang="en-US" sz="2700" dirty="0" spc="-1" kern="0">
                 <a:solidFill>
                   <a:srgbClr val="F3EEE3"/>
                 </a:solidFill>
@@ -11158,29 +10881,7 @@
                 <a:ea typeface="Be Vietnam Pro" pitchFamily="34" charset="-122"/>
                 <a:cs typeface="Be Vietnam Pro" pitchFamily="34" charset="-120"/>
               </a:rPr>
-              <a:t> thuật</a:t>
-            </a:r>
-            <a:r>
-              <a:rPr lang="en-US" sz="2700" dirty="0" spc="-15" kern="0">
-                <a:solidFill>
-                  <a:srgbClr val="F3EEE3"/>
-                </a:solidFill>
-                <a:latin typeface="Be Vietnam Pro" pitchFamily="34" charset="0"/>
-                <a:ea typeface="Be Vietnam Pro" pitchFamily="34" charset="-122"/>
-                <a:cs typeface="Be Vietnam Pro" pitchFamily="34" charset="-120"/>
-              </a:rPr>
-              <a:t> toán</a:t>
-            </a:r>
-            <a:r>
-              <a:rPr lang="en-US" sz="2700" dirty="0" spc="-5" kern="0">
-                <a:solidFill>
-                  <a:srgbClr val="F3EEE3"/>
-                </a:solidFill>
-                <a:latin typeface="Be Vietnam Pro" pitchFamily="34" charset="0"/>
-                <a:ea typeface="Be Vietnam Pro" pitchFamily="34" charset="-122"/>
-                <a:cs typeface="Be Vietnam Pro" pitchFamily="34" charset="-120"/>
-              </a:rPr>
-              <a:t> băm.</a:t>
+              <a:t> tự.</a:t>
             </a:r>
             <a:endParaRPr lang="en-US" sz="2700" dirty="0"/>
           </a:p>
@@ -11215,37 +10916,26 @@
               <a:buNone/>
             </a:pPr>
             <a:r>
-              <a:rPr lang="en-US" sz="2250" b="1" dirty="0" spc="5" kern="0">
-                <a:solidFill>
-                  <a:srgbClr val="14161C"/>
-                </a:solidFill>
-                <a:latin typeface="Be Vietnam Pro" pitchFamily="34" charset="0"/>
-                <a:ea typeface="Be Vietnam Pro" pitchFamily="34" charset="-122"/>
-                <a:cs typeface="Be Vietnam Pro" pitchFamily="34" charset="-120"/>
-              </a:rPr>
-              <a:t>Chỉ</a:t>
-            </a:r>
-            <a:r>
-              <a:rPr lang="en-US" sz="2250" b="1" dirty="0" spc="0" kern="0">
-                <a:solidFill>
-                  <a:srgbClr val="14161C"/>
-                </a:solidFill>
-                <a:latin typeface="Be Vietnam Pro" pitchFamily="34" charset="0"/>
-                <a:ea typeface="Be Vietnam Pro" pitchFamily="34" charset="-122"/>
-                <a:cs typeface="Be Vietnam Pro" pitchFamily="34" charset="-120"/>
-              </a:rPr>
-              <a:t> có</a:t>
-            </a:r>
-            <a:r>
-              <a:rPr lang="en-US" sz="2250" b="1" dirty="0" spc="-8" kern="0">
-                <a:solidFill>
-                  <a:srgbClr val="14161C"/>
-                </a:solidFill>
-                <a:latin typeface="Be Vietnam Pro" pitchFamily="34" charset="0"/>
-                <a:ea typeface="Be Vietnam Pro" pitchFamily="34" charset="-122"/>
-                <a:cs typeface="Be Vietnam Pro" pitchFamily="34" charset="-120"/>
-              </a:rPr>
-              <a:t> tên</a:t>
+              <a:rPr lang="en-US" sz="2250" b="1" dirty="0" spc="-1" kern="0">
+                <a:solidFill>
+                  <a:srgbClr val="14161C"/>
+                </a:solidFill>
+                <a:latin typeface="Be Vietnam Pro" pitchFamily="34" charset="0"/>
+                <a:ea typeface="Be Vietnam Pro" pitchFamily="34" charset="-122"/>
+                <a:cs typeface="Be Vietnam Pro" pitchFamily="34" charset="-120"/>
+              </a:rPr>
+              <a:t>23</a:t>
+            </a:r>
+            <a:r>
+              <a:rPr lang="en-US" sz="2250" b="1" dirty="0" spc="3" kern="0">
+                <a:solidFill>
+                  <a:srgbClr val="14161C"/>
+                </a:solidFill>
+                <a:latin typeface="Be Vietnam Pro" pitchFamily="34" charset="0"/>
+                <a:ea typeface="Be Vietnam Pro" pitchFamily="34" charset="-122"/>
+                <a:cs typeface="Be Vietnam Pro" pitchFamily="34" charset="-120"/>
+              </a:rPr>
+              <a:t> bit</a:t>
             </a:r>
             <a:endParaRPr lang="en-US" sz="2250" dirty="0"/>
           </a:p>
@@ -11465,7 +11155,7 @@
               <a:t> kỳ thành</a:t>
             </a:r>
             <a:r>
-              <a:rPr lang="en-US" sz="2550" dirty="0" spc="-4" kern="0">
+              <a:rPr lang="en-US" sz="2550" dirty="0" spc="1" kern="0">
                 <a:solidFill>
                   <a:srgbClr val="F3EEE3"/>
                 </a:solidFill>
@@ -11473,7 +11163,18 @@
                 <a:ea typeface="Be Vietnam Pro" pitchFamily="34" charset="-122"/>
                 <a:cs typeface="Be Vietnam Pro" pitchFamily="34" charset="-120"/>
               </a:rPr>
-              <a:t> một</a:t>
+              <a:t> chuỗi</a:t>
+            </a:r>
+            <a:r>
+              <a:rPr lang="en-US" sz="2550" dirty="0" spc="17" kern="0">
+                <a:solidFill>
+                  <a:srgbClr val="F3EEE3"/>
+                </a:solidFill>
+                <a:latin typeface="Be Vietnam Pro" pitchFamily="34" charset="0"/>
+                <a:ea typeface="Be Vietnam Pro" pitchFamily="34" charset="-122"/>
+                <a:cs typeface="Be Vietnam Pro" pitchFamily="34" charset="-120"/>
+              </a:rPr>
+              <a:t> độ</a:t>
             </a:r>
             <a:r>
               <a:rPr lang="en-US" sz="2550" dirty="0" spc="0" kern="0">
@@ -11484,7 +11185,7 @@
                 <a:ea typeface="Be Vietnam Pro" pitchFamily="34" charset="-122"/>
                 <a:cs typeface="Be Vietnam Pro" pitchFamily="34" charset="-120"/>
               </a:rPr>
-              <a:t> chuỗi cố</a:t>
+              <a:t> dài cố</a:t>
             </a:r>
             <a:r>
               <a:rPr lang="en-US" sz="2550" dirty="0" spc="18" kern="0">
@@ -11634,15 +11335,15 @@
               <a:buNone/>
             </a:pPr>
             <a:r>
-              <a:rPr lang="en-US" sz="1800" b="1" dirty="0" spc="3" kern="0">
-                <a:solidFill>
-                  <a:srgbClr val="14161C"/>
-                </a:solidFill>
-                <a:latin typeface="Be Vietnam Pro" pitchFamily="34" charset="0"/>
-                <a:ea typeface="Be Vietnam Pro" pitchFamily="34" charset="-122"/>
-                <a:cs typeface="Be Vietnam Pro" pitchFamily="34" charset="-120"/>
-              </a:rPr>
-              <a:t>CHỈ</a:t>
+              <a:rPr lang="en-US" sz="1800" b="1" dirty="0" spc="0" kern="0">
+                <a:solidFill>
+                  <a:srgbClr val="14161C"/>
+                </a:solidFill>
+                <a:latin typeface="Be Vietnam Pro" pitchFamily="34" charset="0"/>
+                <a:ea typeface="Be Vietnam Pro" pitchFamily="34" charset="-122"/>
+                <a:cs typeface="Be Vietnam Pro" pitchFamily="34" charset="-120"/>
+              </a:rPr>
+              <a:t>PHÉP</a:t>
             </a:r>
             <a:r>
               <a:rPr lang="en-US" sz="1800" b="1" dirty="0" spc="2" kern="0">
@@ -11653,18 +11354,7 @@
                 <a:ea typeface="Be Vietnam Pro" pitchFamily="34" charset="-122"/>
                 <a:cs typeface="Be Vietnam Pro" pitchFamily="34" charset="-120"/>
               </a:rPr>
-              <a:t> CÓ</a:t>
-            </a:r>
-            <a:r>
-              <a:rPr lang="en-US" sz="1800" b="1" dirty="0" spc="0" kern="0">
-                <a:solidFill>
-                  <a:srgbClr val="14161C"/>
-                </a:solidFill>
-                <a:latin typeface="Be Vietnam Pro" pitchFamily="34" charset="0"/>
-                <a:ea typeface="Be Vietnam Pro" pitchFamily="34" charset="-122"/>
-                <a:cs typeface="Be Vietnam Pro" pitchFamily="34" charset="-120"/>
-              </a:rPr>
-              <a:t> TÊN</a:t>
+              <a:t> THỬ</a:t>
             </a:r>
             <a:endParaRPr lang="en-US" sz="1800" dirty="0"/>
           </a:p>
@@ -11977,6 +11667,17 @@
               <a:buNone/>
             </a:pPr>
             <a:r>
+              <a:rPr lang="en-US" sz="2100" b="1" dirty="0" spc="-3" kern="0">
+                <a:solidFill>
+                  <a:srgbClr val="F3EEE3"/>
+                </a:solidFill>
+                <a:latin typeface="Be Vietnam Pro" pitchFamily="34" charset="0"/>
+                <a:ea typeface="Be Vietnam Pro" pitchFamily="34" charset="-122"/>
+                <a:cs typeface="Be Vietnam Pro" pitchFamily="34" charset="-120"/>
+              </a:rPr>
+              <a:t>64</a:t>
+            </a:r>
+            <a:r>
               <a:rPr lang="en-US" sz="2100" b="1" dirty="0" spc="-2" kern="0">
                 <a:solidFill>
                   <a:srgbClr val="F3EEE3"/>
@@ -11985,10 +11686,10 @@
                 <a:ea typeface="Be Vietnam Pro" pitchFamily="34" charset="-122"/>
                 <a:cs typeface="Be Vietnam Pro" pitchFamily="34" charset="-120"/>
               </a:rPr>
-              <a:t>Chuỗi</a:t>
-            </a:r>
-            <a:r>
-              <a:rPr lang="en-US" sz="2100" b="1" dirty="0" spc="-9" kern="0">
+              <a:t> ký</a:t>
+            </a:r>
+            <a:r>
+              <a:rPr lang="en-US" sz="2100" b="1" dirty="0" spc="-3" kern="0">
                 <a:solidFill>
                   <a:srgbClr val="F3EEE3"/>
                 </a:solidFill>
@@ -11996,18 +11697,7 @@
                 <a:ea typeface="Be Vietnam Pro" pitchFamily="34" charset="-122"/>
                 <a:cs typeface="Be Vietnam Pro" pitchFamily="34" charset="-120"/>
               </a:rPr>
-              <a:t> cố</a:t>
-            </a:r>
-            <a:r>
-              <a:rPr lang="en-US" sz="2100" b="1" dirty="0" spc="12" kern="0">
-                <a:solidFill>
-                  <a:srgbClr val="F3EEE3"/>
-                </a:solidFill>
-                <a:latin typeface="Be Vietnam Pro" pitchFamily="34" charset="0"/>
-                <a:ea typeface="Be Vietnam Pro" pitchFamily="34" charset="-122"/>
-                <a:cs typeface="Be Vietnam Pro" pitchFamily="34" charset="-120"/>
-              </a:rPr>
-              <a:t> định</a:t>
+              <a:t> tự</a:t>
             </a:r>
             <a:endParaRPr lang="en-US" sz="2100" dirty="0"/>
           </a:p>
@@ -12705,6 +12395,50 @@
               <a:buNone/>
             </a:pPr>
             <a:r>
+              <a:rPr lang="en-US" sz="2400" dirty="0" spc="3" kern="0">
+                <a:solidFill>
+                  <a:srgbClr val="C4C8D6"/>
+                </a:solidFill>
+                <a:latin typeface="Be Vietnam Pro" pitchFamily="34" charset="0"/>
+                <a:ea typeface="Be Vietnam Pro" pitchFamily="34" charset="-122"/>
+                <a:cs typeface="Be Vietnam Pro" pitchFamily="34" charset="-120"/>
+              </a:rPr>
+              <a:t>a</a:t>
+            </a:r>
+            <a:r>
+              <a:rPr lang="en-US" sz="2400" dirty="0" spc="1" kern="0">
+                <a:solidFill>
+                  <a:srgbClr val="C4C8D6"/>
+                </a:solidFill>
+                <a:latin typeface="Be Vietnam Pro" pitchFamily="34" charset="0"/>
+                <a:ea typeface="Be Vietnam Pro" pitchFamily="34" charset="-122"/>
+                <a:cs typeface="Be Vietnam Pro" pitchFamily="34" charset="-120"/>
+              </a:rPr>
+              <a:t> 0,</a:t>
+            </a:r>
+            <a:r>
+              <a:rPr lang="en-US" sz="2400" dirty="0" spc="-1" kern="0">
+                <a:solidFill>
+                  <a:srgbClr val="C4C8D6"/>
+                </a:solidFill>
+                <a:latin typeface="Be Vietnam Pro" pitchFamily="34" charset="0"/>
+                <a:ea typeface="Be Vietnam Pro" pitchFamily="34" charset="-122"/>
+                <a:cs typeface="Be Vietnam Pro" pitchFamily="34" charset="-120"/>
+              </a:rPr>
+              <a:t> c 100,</a:t>
+            </a:r>
+            <a:r>
+              <a:rPr lang="en-US" sz="2400" dirty="0" spc="3" kern="0">
+                <a:solidFill>
+                  <a:srgbClr val="C4C8D6"/>
+                </a:solidFill>
+                <a:latin typeface="Be Vietnam Pro" pitchFamily="34" charset="0"/>
+                <a:ea typeface="Be Vietnam Pro" pitchFamily="34" charset="-122"/>
+                <a:cs typeface="Be Vietnam Pro" pitchFamily="34" charset="-120"/>
+              </a:rPr>
+              <a:t> d</a:t>
+            </a:r>
+            <a:r>
               <a:rPr lang="en-US" sz="2400" dirty="0" spc="0" kern="0">
                 <a:solidFill>
                   <a:srgbClr val="C4C8D6"/>
@@ -12713,7 +12447,40 @@
                 <a:ea typeface="Be Vietnam Pro" pitchFamily="34" charset="-122"/>
                 <a:cs typeface="Be Vietnam Pro" pitchFamily="34" charset="-120"/>
               </a:rPr>
-              <a:t>Nguồn</a:t>
+              <a:t> 101,</a:t>
+            </a:r>
+            <a:r>
+              <a:rPr lang="en-US" sz="2400" dirty="0" spc="2" kern="0">
+                <a:solidFill>
+                  <a:srgbClr val="C4C8D6"/>
+                </a:solidFill>
+                <a:latin typeface="Be Vietnam Pro" pitchFamily="34" charset="0"/>
+                <a:ea typeface="Be Vietnam Pro" pitchFamily="34" charset="-122"/>
+                <a:cs typeface="Be Vietnam Pro" pitchFamily="34" charset="-120"/>
+              </a:rPr>
+              <a:t> b</a:t>
+            </a:r>
+            <a:r>
+              <a:rPr lang="en-US" sz="2400" dirty="0" spc="0" kern="0">
+                <a:solidFill>
+                  <a:srgbClr val="C4C8D6"/>
+                </a:solidFill>
+                <a:latin typeface="Be Vietnam Pro" pitchFamily="34" charset="0"/>
+                <a:ea typeface="Be Vietnam Pro" pitchFamily="34" charset="-122"/>
+                <a:cs typeface="Be Vietnam Pro" pitchFamily="34" charset="-120"/>
+              </a:rPr>
+              <a:t> 110,</a:t>
+            </a:r>
+            <a:r>
+              <a:rPr lang="en-US" sz="2400" dirty="0" spc="3" kern="0">
+                <a:solidFill>
+                  <a:srgbClr val="C4C8D6"/>
+                </a:solidFill>
+                <a:latin typeface="Be Vietnam Pro" pitchFamily="34" charset="0"/>
+                <a:ea typeface="Be Vietnam Pro" pitchFamily="34" charset="-122"/>
+                <a:cs typeface="Be Vietnam Pro" pitchFamily="34" charset="-120"/>
+              </a:rPr>
+              <a:t> r</a:t>
             </a:r>
             <a:r>
               <a:rPr lang="en-US" sz="2400" dirty="0" spc="-1" kern="0">
@@ -12724,18 +12491,7 @@
                 <a:ea typeface="Be Vietnam Pro" pitchFamily="34" charset="-122"/>
                 <a:cs typeface="Be Vietnam Pro" pitchFamily="34" charset="-120"/>
               </a:rPr>
-              <a:t> chỉ nêu</a:t>
-            </a:r>
-            <a:r>
-              <a:rPr lang="en-US" sz="2400" dirty="0" spc="-9" kern="0">
-                <a:solidFill>
-                  <a:srgbClr val="C4C8D6"/>
-                </a:solidFill>
-                <a:latin typeface="Be Vietnam Pro" pitchFamily="34" charset="0"/>
-                <a:ea typeface="Be Vietnam Pro" pitchFamily="34" charset="-122"/>
-                <a:cs typeface="Be Vietnam Pro" pitchFamily="34" charset="-120"/>
-              </a:rPr>
-              <a:t> tên.</a:t>
+              <a:t> 111.</a:t>
             </a:r>
             <a:endParaRPr lang="en-US" sz="2400" dirty="0"/>
           </a:p>
@@ -12747,7 +12503,7 @@
               <a:buNone/>
             </a:pPr>
             <a:r>
-              <a:rPr lang="en-US" sz="2400" dirty="0" spc="2" kern="0">
+              <a:rPr lang="en-US" sz="2400" dirty="0" spc="1" kern="0">
                 <a:solidFill>
                   <a:srgbClr val="C4C8D6"/>
                 </a:solidFill>
@@ -12755,7 +12511,40 @@
                 <a:ea typeface="Be Vietnam Pro" pitchFamily="34" charset="-122"/>
                 <a:cs typeface="Be Vietnam Pro" pitchFamily="34" charset="-120"/>
               </a:rPr>
-              <a:t>Bài</a:t>
+              <a:t>Cả</a:t>
+            </a:r>
+            <a:r>
+              <a:rPr lang="en-US" sz="2400" dirty="0" spc="-1" kern="0">
+                <a:solidFill>
+                  <a:srgbClr val="C4C8D6"/>
+                </a:solidFill>
+                <a:latin typeface="Be Vietnam Pro" pitchFamily="34" charset="0"/>
+                <a:ea typeface="Be Vietnam Pro" pitchFamily="34" charset="-122"/>
+                <a:cs typeface="Be Vietnam Pro" pitchFamily="34" charset="-120"/>
+              </a:rPr>
+              <a:t> chuỗi</a:t>
+            </a:r>
+            <a:r>
+              <a:rPr lang="en-US" sz="2400" dirty="0" spc="-13" kern="0">
+                <a:solidFill>
+                  <a:srgbClr val="C4C8D6"/>
+                </a:solidFill>
+                <a:latin typeface="Be Vietnam Pro" pitchFamily="34" charset="0"/>
+                <a:ea typeface="Be Vietnam Pro" pitchFamily="34" charset="-122"/>
+                <a:cs typeface="Be Vietnam Pro" pitchFamily="34" charset="-120"/>
+              </a:rPr>
+              <a:t> abracadabra:</a:t>
+            </a:r>
+            <a:r>
+              <a:rPr lang="en-US" sz="2400" dirty="0" spc="0" kern="0">
+                <a:solidFill>
+                  <a:srgbClr val="C4C8D6"/>
+                </a:solidFill>
+                <a:latin typeface="Be Vietnam Pro" pitchFamily="34" charset="0"/>
+                <a:ea typeface="Be Vietnam Pro" pitchFamily="34" charset="-122"/>
+                <a:cs typeface="Be Vietnam Pro" pitchFamily="34" charset="-120"/>
+              </a:rPr>
+              <a:t> 23</a:t>
             </a:r>
             <a:r>
               <a:rPr lang="en-US" sz="2400" dirty="0" spc="1" kern="0">
@@ -12766,10 +12555,10 @@
                 <a:ea typeface="Be Vietnam Pro" pitchFamily="34" charset="-122"/>
                 <a:cs typeface="Be Vietnam Pro" pitchFamily="34" charset="-120"/>
               </a:rPr>
-              <a:t> không</a:t>
-            </a:r>
-            <a:r>
-              <a:rPr lang="en-US" sz="2400" dirty="0" spc="-1" kern="0">
+              <a:t> bit</a:t>
+            </a:r>
+            <a:r>
+              <a:rPr lang="en-US" sz="2400" dirty="0" spc="-6" kern="0">
                 <a:solidFill>
                   <a:srgbClr val="C4C8D6"/>
                 </a:solidFill>
@@ -12777,10 +12566,10 @@
                 <a:ea typeface="Be Vietnam Pro" pitchFamily="34" charset="-122"/>
                 <a:cs typeface="Be Vietnam Pro" pitchFamily="34" charset="-120"/>
               </a:rPr>
-              <a:t> có</a:t>
-            </a:r>
-            <a:r>
-              <a:rPr lang="en-US" sz="2400" dirty="0" spc="-10" kern="0">
+              <a:t> thay</a:t>
+            </a:r>
+            <a:r>
+              <a:rPr lang="en-US" sz="2400" dirty="0" spc="0" kern="0">
                 <a:solidFill>
                   <a:srgbClr val="C4C8D6"/>
                 </a:solidFill>
@@ -12788,7 +12577,7 @@
                 <a:ea typeface="Be Vietnam Pro" pitchFamily="34" charset="-122"/>
                 <a:cs typeface="Be Vietnam Pro" pitchFamily="34" charset="-120"/>
               </a:rPr>
-              <a:t> tài</a:t>
+              <a:t> cho</a:t>
             </a:r>
             <a:r>
               <a:rPr lang="en-US" sz="2400" dirty="0" spc="-2" kern="0">
@@ -12799,40 +12588,7 @@
                 <a:ea typeface="Be Vietnam Pro" pitchFamily="34" charset="-122"/>
                 <a:cs typeface="Be Vietnam Pro" pitchFamily="34" charset="-120"/>
               </a:rPr>
-              <a:t> liệu</a:t>
-            </a:r>
-            <a:r>
-              <a:rPr lang="en-US" sz="2400" dirty="0" spc="17" kern="0">
-                <a:solidFill>
-                  <a:srgbClr val="C4C8D6"/>
-                </a:solidFill>
-                <a:latin typeface="Be Vietnam Pro" pitchFamily="34" charset="0"/>
-                <a:ea typeface="Be Vietnam Pro" pitchFamily="34" charset="-122"/>
-                <a:cs typeface="Be Vietnam Pro" pitchFamily="34" charset="-120"/>
-              </a:rPr>
-              <a:t> để</a:t>
-            </a:r>
-            <a:r>
-              <a:rPr lang="en-US" sz="2400" dirty="0" spc="13" kern="0">
-                <a:solidFill>
-                  <a:srgbClr val="C4C8D6"/>
-                </a:solidFill>
-                <a:latin typeface="Be Vietnam Pro" pitchFamily="34" charset="0"/>
-                <a:ea typeface="Be Vietnam Pro" pitchFamily="34" charset="-122"/>
-                <a:cs typeface="Be Vietnam Pro" pitchFamily="34" charset="-120"/>
-              </a:rPr>
-              <a:t> đối</a:t>
-            </a:r>
-            <a:r>
-              <a:rPr lang="en-US" sz="2400" dirty="0" spc="-2" kern="0">
-                <a:solidFill>
-                  <a:srgbClr val="C4C8D6"/>
-                </a:solidFill>
-                <a:latin typeface="Be Vietnam Pro" pitchFamily="34" charset="0"/>
-                <a:ea typeface="Be Vietnam Pro" pitchFamily="34" charset="-122"/>
-                <a:cs typeface="Be Vietnam Pro" pitchFamily="34" charset="-120"/>
-              </a:rPr>
-              <a:t> chiếu.</a:t>
+              <a:t> 88.</a:t>
             </a:r>
             <a:endParaRPr lang="en-US" sz="2400" dirty="0"/>
           </a:p>
@@ -13139,39 +12895,6 @@
               <a:buNone/>
             </a:pPr>
             <a:r>
-              <a:rPr lang="en-US" sz="2700" dirty="0" spc="-50" kern="0">
-                <a:solidFill>
-                  <a:srgbClr val="14161C"/>
-                </a:solidFill>
-                <a:latin typeface="Be Vietnam Pro" pitchFamily="34" charset="0"/>
-                <a:ea typeface="Be Vietnam Pro" pitchFamily="34" charset="-122"/>
-                <a:cs typeface="Be Vietnam Pro" pitchFamily="34" charset="-120"/>
-              </a:rPr>
-              <a:t>PyTorch</a:t>
-            </a:r>
-            <a:r>
-              <a:rPr lang="en-US" sz="2700" dirty="0" spc="0" kern="0">
-                <a:solidFill>
-                  <a:srgbClr val="14161C"/>
-                </a:solidFill>
-                <a:latin typeface="Be Vietnam Pro" pitchFamily="34" charset="0"/>
-                <a:ea typeface="Be Vietnam Pro" pitchFamily="34" charset="-122"/>
-                <a:cs typeface="Be Vietnam Pro" pitchFamily="34" charset="-120"/>
-              </a:rPr>
-              <a:t> có</a:t>
-            </a:r>
-            <a:r>
-              <a:rPr lang="en-US" sz="2700" dirty="0" spc="-2" kern="0">
-                <a:solidFill>
-                  <a:srgbClr val="14161C"/>
-                </a:solidFill>
-                <a:latin typeface="Be Vietnam Pro" pitchFamily="34" charset="0"/>
-                <a:ea typeface="Be Vietnam Pro" pitchFamily="34" charset="-122"/>
-                <a:cs typeface="Be Vietnam Pro" pitchFamily="34" charset="-120"/>
-              </a:rPr>
-              <a:t> lớp</a:t>
-            </a:r>
-            <a:r>
               <a:rPr lang="en-US" sz="2700" dirty="0" spc="-1" kern="0">
                 <a:solidFill>
                   <a:srgbClr val="14161C"/>
@@ -13180,29 +12903,51 @@
                 <a:ea typeface="Be Vietnam Pro" pitchFamily="34" charset="-122"/>
                 <a:cs typeface="Be Vietnam Pro" pitchFamily="34" charset="-120"/>
               </a:rPr>
-              <a:t> cho</a:t>
-            </a:r>
-            <a:r>
-              <a:rPr lang="en-US" sz="2700" dirty="0" spc="1" kern="0">
-                <a:solidFill>
-                  <a:srgbClr val="14161C"/>
-                </a:solidFill>
-                <a:latin typeface="Be Vietnam Pro" pitchFamily="34" charset="0"/>
-                <a:ea typeface="Be Vietnam Pro" pitchFamily="34" charset="-122"/>
-                <a:cs typeface="Be Vietnam Pro" pitchFamily="34" charset="-120"/>
-              </a:rPr>
-              <a:t> cả</a:t>
-            </a:r>
-            <a:r>
-              <a:rPr lang="en-US" sz="2700" dirty="0" spc="-2" kern="0">
-                <a:solidFill>
-                  <a:srgbClr val="14161C"/>
-                </a:solidFill>
-                <a:latin typeface="Be Vietnam Pro" pitchFamily="34" charset="0"/>
-                <a:ea typeface="Be Vietnam Pro" pitchFamily="34" charset="-122"/>
-                <a:cs typeface="Be Vietnam Pro" pitchFamily="34" charset="-120"/>
-              </a:rPr>
-              <a:t> hai:</a:t>
+              <a:t>Bài chỉ</a:t>
+            </a:r>
+            <a:r>
+              <a:rPr lang="en-US" sz="2700" dirty="0" spc="9" kern="0">
+                <a:solidFill>
+                  <a:srgbClr val="14161C"/>
+                </a:solidFill>
+                <a:latin typeface="Be Vietnam Pro" pitchFamily="34" charset="0"/>
+                <a:ea typeface="Be Vietnam Pro" pitchFamily="34" charset="-122"/>
+                <a:cs typeface="Be Vietnam Pro" pitchFamily="34" charset="-120"/>
+              </a:rPr>
+              <a:t> đọc</a:t>
+            </a:r>
+            <a:r>
+              <a:rPr lang="en-US" sz="2700" dirty="0" spc="-13" kern="0">
+                <a:solidFill>
+                  <a:srgbClr val="14161C"/>
+                </a:solidFill>
+                <a:latin typeface="Be Vietnam Pro" pitchFamily="34" charset="0"/>
+                <a:ea typeface="Be Vietnam Pro" pitchFamily="34" charset="-122"/>
+                <a:cs typeface="Be Vietnam Pro" pitchFamily="34" charset="-120"/>
+              </a:rPr>
+              <a:t> tài</a:t>
+            </a:r>
+            <a:r>
+              <a:rPr lang="en-US" sz="2700" dirty="0" spc="-1" kern="0">
+                <a:solidFill>
+                  <a:srgbClr val="14161C"/>
+                </a:solidFill>
+                <a:latin typeface="Be Vietnam Pro" pitchFamily="34" charset="0"/>
+                <a:ea typeface="Be Vietnam Pro" pitchFamily="34" charset="-122"/>
+                <a:cs typeface="Be Vietnam Pro" pitchFamily="34" charset="-120"/>
+              </a:rPr>
+              <a:t> liệu</a:t>
+            </a:r>
+            <a:r>
+              <a:rPr lang="en-US" sz="2700" dirty="0" spc="-38" kern="0">
+                <a:solidFill>
+                  <a:srgbClr val="14161C"/>
+                </a:solidFill>
+                <a:latin typeface="Be Vietnam Pro" pitchFamily="34" charset="0"/>
+                <a:ea typeface="Be Vietnam Pro" pitchFamily="34" charset="-122"/>
+                <a:cs typeface="Be Vietnam Pro" pitchFamily="34" charset="-120"/>
+              </a:rPr>
+              <a:t> PyTorch,</a:t>
             </a:r>
             <a:endParaRPr lang="en-US" sz="2700" dirty="0"/>
           </a:p>
@@ -13214,26 +12959,15 @@
               <a:buNone/>
             </a:pPr>
             <a:r>
-              <a:rPr lang="en-US" sz="2700" dirty="0" spc="-36" kern="0">
-                <a:solidFill>
-                  <a:srgbClr val="14161C"/>
-                </a:solidFill>
-                <a:latin typeface="Be Vietnam Pro" pitchFamily="34" charset="0"/>
-                <a:ea typeface="Be Vietnam Pro" pitchFamily="34" charset="-122"/>
-                <a:cs typeface="Be Vietnam Pro" pitchFamily="34" charset="-120"/>
-              </a:rPr>
-              <a:t>Transformer</a:t>
-            </a:r>
-            <a:r>
-              <a:rPr lang="en-US" sz="2700" dirty="0" spc="-16" kern="0">
-                <a:solidFill>
-                  <a:srgbClr val="14161C"/>
-                </a:solidFill>
-                <a:latin typeface="Be Vietnam Pro" pitchFamily="34" charset="0"/>
-                <a:ea typeface="Be Vietnam Pro" pitchFamily="34" charset="-122"/>
-                <a:cs typeface="Be Vietnam Pro" pitchFamily="34" charset="-120"/>
-              </a:rPr>
-              <a:t> và</a:t>
+              <a:rPr lang="en-US" sz="2700" dirty="0" spc="11" kern="0">
+                <a:solidFill>
+                  <a:srgbClr val="14161C"/>
+                </a:solidFill>
+                <a:latin typeface="Be Vietnam Pro" pitchFamily="34" charset="0"/>
+                <a:ea typeface="Be Vietnam Pro" pitchFamily="34" charset="-122"/>
+                <a:cs typeface="Be Vietnam Pro" pitchFamily="34" charset="-120"/>
+              </a:rPr>
+              <a:t>chưa</a:t>
             </a:r>
             <a:r>
               <a:rPr lang="en-US" sz="2700" dirty="0" spc="-8" kern="0">
@@ -13244,7 +12978,40 @@
                 <a:ea typeface="Be Vietnam Pro" pitchFamily="34" charset="-122"/>
                 <a:cs typeface="Be Vietnam Pro" pitchFamily="34" charset="-120"/>
               </a:rPr>
-              <a:t> Conv2d.</a:t>
+              <a:t> chạy</a:t>
+            </a:r>
+            <a:r>
+              <a:rPr lang="en-US" sz="2700" dirty="0" spc="-2" kern="0">
+                <a:solidFill>
+                  <a:srgbClr val="14161C"/>
+                </a:solidFill>
+                <a:latin typeface="Be Vietnam Pro" pitchFamily="34" charset="0"/>
+                <a:ea typeface="Be Vietnam Pro" pitchFamily="34" charset="-122"/>
+                <a:cs typeface="Be Vietnam Pro" pitchFamily="34" charset="-120"/>
+              </a:rPr>
+              <a:t> mô</a:t>
+            </a:r>
+            <a:r>
+              <a:rPr lang="en-US" sz="2700" dirty="0" spc="-3" kern="0">
+                <a:solidFill>
+                  <a:srgbClr val="14161C"/>
+                </a:solidFill>
+                <a:latin typeface="Be Vietnam Pro" pitchFamily="34" charset="0"/>
+                <a:ea typeface="Be Vietnam Pro" pitchFamily="34" charset="-122"/>
+                <a:cs typeface="Be Vietnam Pro" pitchFamily="34" charset="-120"/>
+              </a:rPr>
+              <a:t> hình</a:t>
+            </a:r>
+            <a:r>
+              <a:rPr lang="en-US" sz="2700" dirty="0" spc="-2" kern="0">
+                <a:solidFill>
+                  <a:srgbClr val="14161C"/>
+                </a:solidFill>
+                <a:latin typeface="Be Vietnam Pro" pitchFamily="34" charset="0"/>
+                <a:ea typeface="Be Vietnam Pro" pitchFamily="34" charset="-122"/>
+                <a:cs typeface="Be Vietnam Pro" pitchFamily="34" charset="-120"/>
+              </a:rPr>
+              <a:t> nào.</a:t>
             </a:r>
             <a:endParaRPr lang="en-US" sz="2700" dirty="0"/>
           </a:p>
@@ -13501,17 +13268,6 @@
               <a:t> là</a:t>
             </a:r>
             <a:r>
-              <a:rPr lang="en-US" sz="2550" dirty="0" spc="-5" kern="0">
-                <a:solidFill>
-                  <a:srgbClr val="14161C"/>
-                </a:solidFill>
-                <a:latin typeface="Be Vietnam Pro" pitchFamily="34" charset="0"/>
-                <a:ea typeface="Be Vietnam Pro" pitchFamily="34" charset="-122"/>
-                <a:cs typeface="Be Vietnam Pro" pitchFamily="34" charset="-120"/>
-              </a:rPr>
-              <a:t> một</a:t>
-            </a:r>
-            <a:r>
               <a:rPr lang="en-US" sz="2550" dirty="0" spc="0" kern="0">
                 <a:solidFill>
                   <a:srgbClr val="14161C"/>
@@ -13622,7 +13378,7 @@
               <a:t> người</a:t>
             </a:r>
             <a:r>
-              <a:rPr lang="en-US" sz="2550" dirty="0" spc="-1" kern="0">
+              <a:rPr lang="en-US" sz="2550" dirty="0" spc="0" kern="0">
                 <a:solidFill>
                   <a:srgbClr val="14161C"/>
                 </a:solidFill>
@@ -13633,7 +13389,7 @@
               <a:t> biên</a:t>
             </a:r>
             <a:r>
-              <a:rPr lang="en-US" sz="2550" dirty="0" spc="-6" kern="0">
+              <a:rPr lang="en-US" sz="2550" dirty="0" spc="-7" kern="0">
                 <a:solidFill>
                   <a:srgbClr val="14161C"/>
                 </a:solidFill>
@@ -13978,37 +13734,103 @@
               <a:buNone/>
             </a:pPr>
             <a:r>
-              <a:rPr lang="en-US" sz="2100" dirty="0" spc="3" kern="0">
-                <a:solidFill>
-                  <a:srgbClr val="14161C"/>
-                </a:solidFill>
-                <a:latin typeface="Be Vietnam Pro" pitchFamily="34" charset="0"/>
-                <a:ea typeface="Be Vietnam Pro" pitchFamily="34" charset="-122"/>
-                <a:cs typeface="Be Vietnam Pro" pitchFamily="34" charset="-120"/>
-              </a:rPr>
-              <a:t>Hiện</a:t>
-            </a:r>
-            <a:r>
-              <a:rPr lang="en-US" sz="2100" dirty="0" spc="6" kern="0">
-                <a:solidFill>
-                  <a:srgbClr val="14161C"/>
-                </a:solidFill>
-                <a:latin typeface="Be Vietnam Pro" pitchFamily="34" charset="0"/>
-                <a:ea typeface="Be Vietnam Pro" pitchFamily="34" charset="-122"/>
-                <a:cs typeface="Be Vietnam Pro" pitchFamily="34" charset="-120"/>
-              </a:rPr>
-              <a:t> thực</a:t>
-            </a:r>
-            <a:r>
-              <a:rPr lang="en-US" sz="2100" dirty="0" spc="2" kern="0">
-                <a:solidFill>
-                  <a:srgbClr val="14161C"/>
-                </a:solidFill>
-                <a:latin typeface="Be Vietnam Pro" pitchFamily="34" charset="0"/>
-                <a:ea typeface="Be Vietnam Pro" pitchFamily="34" charset="-122"/>
-                <a:cs typeface="Be Vietnam Pro" pitchFamily="34" charset="-120"/>
-              </a:rPr>
-              <a:t> kiến</a:t>
+              <a:rPr lang="en-US" sz="2100" dirty="0" spc="1" kern="0">
+                <a:solidFill>
+                  <a:srgbClr val="14161C"/>
+                </a:solidFill>
+                <a:latin typeface="Be Vietnam Pro" pitchFamily="34" charset="0"/>
+                <a:ea typeface="Be Vietnam Pro" pitchFamily="34" charset="-122"/>
+                <a:cs typeface="Be Vietnam Pro" pitchFamily="34" charset="-120"/>
+              </a:rPr>
+              <a:t>Bản</a:t>
+            </a:r>
+            <a:r>
+              <a:rPr lang="en-US" sz="2100" dirty="0" spc="-2" kern="0">
+                <a:solidFill>
+                  <a:srgbClr val="14161C"/>
+                </a:solidFill>
+                <a:latin typeface="Be Vietnam Pro" pitchFamily="34" charset="0"/>
+                <a:ea typeface="Be Vietnam Pro" pitchFamily="34" charset="-122"/>
+                <a:cs typeface="Be Vietnam Pro" pitchFamily="34" charset="-120"/>
+              </a:rPr>
+              <a:t> tham</a:t>
+            </a:r>
+            <a:r>
+              <a:rPr lang="en-US" sz="2100" dirty="0" spc="1" kern="0">
+                <a:solidFill>
+                  <a:srgbClr val="14161C"/>
+                </a:solidFill>
+                <a:latin typeface="Be Vietnam Pro" pitchFamily="34" charset="0"/>
+                <a:ea typeface="Be Vietnam Pro" pitchFamily="34" charset="-122"/>
+                <a:cs typeface="Be Vietnam Pro" pitchFamily="34" charset="-120"/>
+              </a:rPr>
+              <a:t> chiếu:</a:t>
+            </a:r>
+            <a:r>
+              <a:rPr lang="en-US" sz="2100" dirty="0" spc="-2" kern="0">
+                <a:solidFill>
+                  <a:srgbClr val="14161C"/>
+                </a:solidFill>
+                <a:latin typeface="Be Vietnam Pro" pitchFamily="34" charset="0"/>
+                <a:ea typeface="Be Vietnam Pro" pitchFamily="34" charset="-122"/>
+                <a:cs typeface="Be Vietnam Pro" pitchFamily="34" charset="-120"/>
+              </a:rPr>
+              <a:t> mặc</a:t>
+            </a:r>
+            <a:r>
+              <a:rPr lang="en-US" sz="2100" dirty="0" spc="18" kern="0">
+                <a:solidFill>
+                  <a:srgbClr val="14161C"/>
+                </a:solidFill>
+                <a:latin typeface="Be Vietnam Pro" pitchFamily="34" charset="0"/>
+                <a:ea typeface="Be Vietnam Pro" pitchFamily="34" charset="-122"/>
+                <a:cs typeface="Be Vietnam Pro" pitchFamily="34" charset="-120"/>
+              </a:rPr>
+              <a:t> định</a:t>
+            </a:r>
+            <a:r>
+              <a:rPr lang="en-US" sz="2100" dirty="0" spc="-6" kern="0">
+                <a:solidFill>
+                  <a:srgbClr val="14161C"/>
+                </a:solidFill>
+                <a:latin typeface="Be Vietnam Pro" pitchFamily="34" charset="0"/>
+                <a:ea typeface="Be Vietnam Pro" pitchFamily="34" charset="-122"/>
+                <a:cs typeface="Be Vietnam Pro" pitchFamily="34" charset="-120"/>
+              </a:rPr>
+              <a:t> 8</a:t>
+            </a:r>
+            <a:r>
+              <a:rPr lang="en-US" sz="2100" dirty="0" spc="9" kern="0">
+                <a:solidFill>
+                  <a:srgbClr val="14161C"/>
+                </a:solidFill>
+                <a:latin typeface="Be Vietnam Pro" pitchFamily="34" charset="0"/>
+                <a:ea typeface="Be Vietnam Pro" pitchFamily="34" charset="-122"/>
+                <a:cs typeface="Be Vietnam Pro" pitchFamily="34" charset="-120"/>
+              </a:rPr>
+              <a:t> đầu</a:t>
+            </a:r>
+            <a:r>
+              <a:rPr lang="en-US" sz="2100" dirty="0" spc="0" kern="0">
+                <a:solidFill>
+                  <a:srgbClr val="14161C"/>
+                </a:solidFill>
+                <a:latin typeface="Be Vietnam Pro" pitchFamily="34" charset="0"/>
+                <a:ea typeface="Be Vietnam Pro" pitchFamily="34" charset="-122"/>
+                <a:cs typeface="Be Vietnam Pro" pitchFamily="34" charset="-120"/>
+              </a:rPr>
+              <a:t> chú</a:t>
+            </a:r>
+            <a:r>
+              <a:rPr lang="en-US" sz="2100" dirty="0" spc="-2" kern="0">
+                <a:solidFill>
+                  <a:srgbClr val="14161C"/>
+                </a:solidFill>
+                <a:latin typeface="Be Vietnam Pro" pitchFamily="34" charset="0"/>
+                <a:ea typeface="Be Vietnam Pro" pitchFamily="34" charset="-122"/>
+                <a:cs typeface="Be Vietnam Pro" pitchFamily="34" charset="-120"/>
+              </a:rPr>
+              <a:t> ý,</a:t>
             </a:r>
             <a:r>
               <a:rPr lang="en-US" sz="2100" dirty="0" spc="-1" kern="0">
@@ -14019,40 +13841,7 @@
                 <a:ea typeface="Be Vietnam Pro" pitchFamily="34" charset="-122"/>
                 <a:cs typeface="Be Vietnam Pro" pitchFamily="34" charset="-120"/>
               </a:rPr>
-              <a:t> trúc</a:t>
-            </a:r>
-            <a:r>
-              <a:rPr lang="en-US" sz="2100" dirty="0" spc="-25" kern="0">
-                <a:solidFill>
-                  <a:srgbClr val="14161C"/>
-                </a:solidFill>
-                <a:latin typeface="Be Vietnam Pro" pitchFamily="34" charset="0"/>
-                <a:ea typeface="Be Vietnam Pro" pitchFamily="34" charset="-122"/>
-                <a:cs typeface="Be Vietnam Pro" pitchFamily="34" charset="-120"/>
-              </a:rPr>
-              <a:t> Transformer</a:t>
-            </a:r>
-            <a:r>
-              <a:rPr lang="en-US" sz="2100" dirty="0" spc="-13" kern="0">
-                <a:solidFill>
-                  <a:srgbClr val="14161C"/>
-                </a:solidFill>
-                <a:latin typeface="Be Vietnam Pro" pitchFamily="34" charset="0"/>
-                <a:ea typeface="Be Vietnam Pro" pitchFamily="34" charset="-122"/>
-                <a:cs typeface="Be Vietnam Pro" pitchFamily="34" charset="-120"/>
-              </a:rPr>
-              <a:t> gốc,</a:t>
-            </a:r>
-            <a:r>
-              <a:rPr lang="en-US" sz="2100" dirty="0" spc="-3" kern="0">
-                <a:solidFill>
-                  <a:srgbClr val="14161C"/>
-                </a:solidFill>
-                <a:latin typeface="Be Vietnam Pro" pitchFamily="34" charset="0"/>
-                <a:ea typeface="Be Vietnam Pro" pitchFamily="34" charset="-122"/>
-                <a:cs typeface="Be Vietnam Pro" pitchFamily="34" charset="-120"/>
-              </a:rPr>
-              <a:t> làm</a:t>
+              <a:t> 6</a:t>
             </a:r>
             <a:r>
               <a:rPr lang="en-US" sz="2100" dirty="0" spc="-5" kern="0">
@@ -14063,7 +13852,7 @@
                 <a:ea typeface="Be Vietnam Pro" pitchFamily="34" charset="-122"/>
                 <a:cs typeface="Be Vietnam Pro" pitchFamily="34" charset="-120"/>
               </a:rPr>
-              <a:t> bản</a:t>
+              <a:t> lớp</a:t>
             </a:r>
             <a:r>
               <a:rPr lang="en-US" sz="2100" dirty="0" spc="-2" kern="0">
@@ -14074,62 +13863,62 @@
                 <a:ea typeface="Be Vietnam Pro" pitchFamily="34" charset="-122"/>
                 <a:cs typeface="Be Vietnam Pro" pitchFamily="34" charset="-120"/>
               </a:rPr>
-              <a:t> tham</a:t>
-            </a:r>
-            <a:r>
-              <a:rPr lang="en-US" sz="2100" dirty="0" spc="1" kern="0">
-                <a:solidFill>
-                  <a:srgbClr val="14161C"/>
-                </a:solidFill>
-                <a:latin typeface="Be Vietnam Pro" pitchFamily="34" charset="0"/>
-                <a:ea typeface="Be Vietnam Pro" pitchFamily="34" charset="-122"/>
-                <a:cs typeface="Be Vietnam Pro" pitchFamily="34" charset="-120"/>
-              </a:rPr>
-              <a:t> chiếu</a:t>
-            </a:r>
-            <a:r>
-              <a:rPr lang="en-US" sz="2100" dirty="0" spc="14" kern="0">
-                <a:solidFill>
-                  <a:srgbClr val="14161C"/>
-                </a:solidFill>
-                <a:latin typeface="Be Vietnam Pro" pitchFamily="34" charset="0"/>
-                <a:ea typeface="Be Vietnam Pro" pitchFamily="34" charset="-122"/>
-                <a:cs typeface="Be Vietnam Pro" pitchFamily="34" charset="-120"/>
-              </a:rPr>
-              <a:t> để</a:t>
-            </a:r>
-            <a:r>
-              <a:rPr lang="en-US" sz="2100" dirty="0" spc="1" kern="0">
-                <a:solidFill>
-                  <a:srgbClr val="14161C"/>
-                </a:solidFill>
-                <a:latin typeface="Be Vietnam Pro" pitchFamily="34" charset="0"/>
-                <a:ea typeface="Be Vietnam Pro" pitchFamily="34" charset="-122"/>
-                <a:cs typeface="Be Vietnam Pro" pitchFamily="34" charset="-120"/>
-              </a:rPr>
-              <a:t> hiểu</a:t>
-            </a:r>
-            <a:r>
-              <a:rPr lang="en-US" sz="2100" dirty="0" spc="2" kern="0">
-                <a:solidFill>
-                  <a:srgbClr val="14161C"/>
-                </a:solidFill>
-                <a:latin typeface="Be Vietnam Pro" pitchFamily="34" charset="0"/>
-                <a:ea typeface="Be Vietnam Pro" pitchFamily="34" charset="-122"/>
-                <a:cs typeface="Be Vietnam Pro" pitchFamily="34" charset="-120"/>
-              </a:rPr>
-              <a:t> nền</a:t>
-            </a:r>
-            <a:r>
-              <a:rPr lang="en-US" sz="2100" dirty="0" spc="-8" kern="0">
-                <a:solidFill>
-                  <a:srgbClr val="14161C"/>
-                </a:solidFill>
-                <a:latin typeface="Be Vietnam Pro" pitchFamily="34" charset="0"/>
-                <a:ea typeface="Be Vietnam Pro" pitchFamily="34" charset="-122"/>
-                <a:cs typeface="Be Vietnam Pro" pitchFamily="34" charset="-120"/>
-              </a:rPr>
-              <a:t> tảng.</a:t>
+              <a:t> mã</a:t>
+            </a:r>
+            <a:r>
+              <a:rPr lang="en-US" sz="2100" dirty="0" spc="-5" kern="0">
+                <a:solidFill>
+                  <a:srgbClr val="14161C"/>
+                </a:solidFill>
+                <a:latin typeface="Be Vietnam Pro" pitchFamily="34" charset="0"/>
+                <a:ea typeface="Be Vietnam Pro" pitchFamily="34" charset="-122"/>
+                <a:cs typeface="Be Vietnam Pro" pitchFamily="34" charset="-120"/>
+              </a:rPr>
+              <a:t> hóa,</a:t>
+            </a:r>
+            <a:r>
+              <a:rPr lang="en-US" sz="2100" dirty="0" spc="-1" kern="0">
+                <a:solidFill>
+                  <a:srgbClr val="14161C"/>
+                </a:solidFill>
+                <a:latin typeface="Be Vietnam Pro" pitchFamily="34" charset="0"/>
+                <a:ea typeface="Be Vietnam Pro" pitchFamily="34" charset="-122"/>
+                <a:cs typeface="Be Vietnam Pro" pitchFamily="34" charset="-120"/>
+              </a:rPr>
+              <a:t> 6</a:t>
+            </a:r>
+            <a:r>
+              <a:rPr lang="en-US" sz="2100" dirty="0" spc="-4" kern="0">
+                <a:solidFill>
+                  <a:srgbClr val="14161C"/>
+                </a:solidFill>
+                <a:latin typeface="Be Vietnam Pro" pitchFamily="34" charset="0"/>
+                <a:ea typeface="Be Vietnam Pro" pitchFamily="34" charset="-122"/>
+                <a:cs typeface="Be Vietnam Pro" pitchFamily="34" charset="-120"/>
+              </a:rPr>
+              <a:t> lớp</a:t>
+            </a:r>
+            <a:r>
+              <a:rPr lang="en-US" sz="2100" dirty="0" spc="0" kern="0">
+                <a:solidFill>
+                  <a:srgbClr val="14161C"/>
+                </a:solidFill>
+                <a:latin typeface="Be Vietnam Pro" pitchFamily="34" charset="0"/>
+                <a:ea typeface="Be Vietnam Pro" pitchFamily="34" charset="-122"/>
+                <a:cs typeface="Be Vietnam Pro" pitchFamily="34" charset="-120"/>
+              </a:rPr>
+              <a:t> giải</a:t>
+            </a:r>
+            <a:r>
+              <a:rPr lang="en-US" sz="2100" dirty="0" spc="-2" kern="0">
+                <a:solidFill>
+                  <a:srgbClr val="14161C"/>
+                </a:solidFill>
+                <a:latin typeface="Be Vietnam Pro" pitchFamily="34" charset="0"/>
+                <a:ea typeface="Be Vietnam Pro" pitchFamily="34" charset="-122"/>
+                <a:cs typeface="Be Vietnam Pro" pitchFamily="34" charset="-120"/>
+              </a:rPr>
+              <a:t> mã.</a:t>
             </a:r>
             <a:endParaRPr lang="en-US" sz="2100" dirty="0"/>
           </a:p>
@@ -14494,37 +14283,70 @@
               <a:buNone/>
             </a:pPr>
             <a:r>
-              <a:rPr lang="en-US" sz="2100" dirty="0" spc="-39" kern="0">
-                <a:solidFill>
-                  <a:srgbClr val="14161C"/>
-                </a:solidFill>
-                <a:latin typeface="Be Vietnam Pro" pitchFamily="34" charset="0"/>
-                <a:ea typeface="Be Vietnam Pro" pitchFamily="34" charset="-122"/>
-                <a:cs typeface="Be Vietnam Pro" pitchFamily="34" charset="-120"/>
-              </a:rPr>
-              <a:t>PyTorch</a:t>
-            </a:r>
-            <a:r>
-              <a:rPr lang="en-US" sz="2100" dirty="0" spc="-4" kern="0">
-                <a:solidFill>
-                  <a:srgbClr val="14161C"/>
-                </a:solidFill>
-                <a:latin typeface="Be Vietnam Pro" pitchFamily="34" charset="0"/>
-                <a:ea typeface="Be Vietnam Pro" pitchFamily="34" charset="-122"/>
-                <a:cs typeface="Be Vietnam Pro" pitchFamily="34" charset="-120"/>
-              </a:rPr>
-              <a:t> có lớp</a:t>
-            </a:r>
-            <a:r>
-              <a:rPr lang="en-US" sz="2100" dirty="0" spc="-6" kern="0">
-                <a:solidFill>
-                  <a:srgbClr val="14161C"/>
-                </a:solidFill>
-                <a:latin typeface="Be Vietnam Pro" pitchFamily="34" charset="0"/>
-                <a:ea typeface="Be Vietnam Pro" pitchFamily="34" charset="-122"/>
-                <a:cs typeface="Be Vietnam Pro" pitchFamily="34" charset="-120"/>
-              </a:rPr>
-              <a:t> Conv2d.</a:t>
+              <a:rPr lang="en-US" sz="2100" dirty="0" spc="-7" kern="0">
+                <a:solidFill>
+                  <a:srgbClr val="14161C"/>
+                </a:solidFill>
+                <a:latin typeface="Be Vietnam Pro" pitchFamily="34" charset="0"/>
+                <a:ea typeface="Be Vietnam Pro" pitchFamily="34" charset="-122"/>
+                <a:cs typeface="Be Vietnam Pro" pitchFamily="34" charset="-120"/>
+              </a:rPr>
+              <a:t>Conv2d</a:t>
+            </a:r>
+            <a:r>
+              <a:rPr lang="en-US" sz="2100" dirty="0" spc="-5" kern="0">
+                <a:solidFill>
+                  <a:srgbClr val="14161C"/>
+                </a:solidFill>
+                <a:latin typeface="Be Vietnam Pro" pitchFamily="34" charset="0"/>
+                <a:ea typeface="Be Vietnam Pro" pitchFamily="34" charset="-122"/>
+                <a:cs typeface="Be Vietnam Pro" pitchFamily="34" charset="-120"/>
+              </a:rPr>
+              <a:t> áp</a:t>
+            </a:r>
+            <a:r>
+              <a:rPr lang="en-US" sz="2100" dirty="0" spc="-2" kern="0">
+                <a:solidFill>
+                  <a:srgbClr val="14161C"/>
+                </a:solidFill>
+                <a:latin typeface="Be Vietnam Pro" pitchFamily="34" charset="0"/>
+                <a:ea typeface="Be Vietnam Pro" pitchFamily="34" charset="-122"/>
+                <a:cs typeface="Be Vietnam Pro" pitchFamily="34" charset="-120"/>
+              </a:rPr>
+              <a:t> phép</a:t>
+            </a:r>
+            <a:r>
+              <a:rPr lang="en-US" sz="2100" dirty="0" spc="-1" kern="0">
+                <a:solidFill>
+                  <a:srgbClr val="14161C"/>
+                </a:solidFill>
+                <a:latin typeface="Be Vietnam Pro" pitchFamily="34" charset="0"/>
+                <a:ea typeface="Be Vietnam Pro" pitchFamily="34" charset="-122"/>
+                <a:cs typeface="Be Vietnam Pro" pitchFamily="34" charset="-120"/>
+              </a:rPr>
+              <a:t> tích</a:t>
+            </a:r>
+            <a:r>
+              <a:rPr lang="en-US" sz="2100" dirty="0" spc="-3" kern="0">
+                <a:solidFill>
+                  <a:srgbClr val="14161C"/>
+                </a:solidFill>
+                <a:latin typeface="Be Vietnam Pro" pitchFamily="34" charset="0"/>
+                <a:ea typeface="Be Vietnam Pro" pitchFamily="34" charset="-122"/>
+                <a:cs typeface="Be Vietnam Pro" pitchFamily="34" charset="-120"/>
+              </a:rPr>
+              <a:t> chập</a:t>
+            </a:r>
+            <a:r>
+              <a:rPr lang="en-US" sz="2100" dirty="0" spc="2" kern="0">
+                <a:solidFill>
+                  <a:srgbClr val="14161C"/>
+                </a:solidFill>
+                <a:latin typeface="Be Vietnam Pro" pitchFamily="34" charset="0"/>
+                <a:ea typeface="Be Vietnam Pro" pitchFamily="34" charset="-122"/>
+                <a:cs typeface="Be Vietnam Pro" pitchFamily="34" charset="-120"/>
+              </a:rPr>
+              <a:t> 2D</a:t>
             </a:r>
             <a:r>
               <a:rPr lang="en-US" sz="2100" dirty="0" spc="0" kern="0">
@@ -14535,18 +14357,51 @@
                 <a:ea typeface="Be Vietnam Pro" pitchFamily="34" charset="-122"/>
                 <a:cs typeface="Be Vietnam Pro" pitchFamily="34" charset="-120"/>
               </a:rPr>
-              <a:t> CNN</a:t>
-            </a:r>
-            <a:r>
-              <a:rPr lang="en-US" sz="2100" dirty="0" spc="-4" kern="0">
-                <a:solidFill>
-                  <a:srgbClr val="14161C"/>
-                </a:solidFill>
-                <a:latin typeface="Be Vietnam Pro" pitchFamily="34" charset="0"/>
-                <a:ea typeface="Be Vietnam Pro" pitchFamily="34" charset="-122"/>
-                <a:cs typeface="Be Vietnam Pro" pitchFamily="34" charset="-120"/>
-              </a:rPr>
-              <a:t> là</a:t>
+              <a:t> lên</a:t>
+            </a:r>
+            <a:r>
+              <a:rPr lang="en-US" sz="2100" dirty="0" spc="9" kern="0">
+                <a:solidFill>
+                  <a:srgbClr val="14161C"/>
+                </a:solidFill>
+                <a:latin typeface="Be Vietnam Pro" pitchFamily="34" charset="0"/>
+                <a:ea typeface="Be Vietnam Pro" pitchFamily="34" charset="-122"/>
+                <a:cs typeface="Be Vietnam Pro" pitchFamily="34" charset="-120"/>
+              </a:rPr>
+              <a:t> đầu</a:t>
+            </a:r>
+            <a:r>
+              <a:rPr lang="en-US" sz="2100" dirty="0" spc="-13" kern="0">
+                <a:solidFill>
+                  <a:srgbClr val="14161C"/>
+                </a:solidFill>
+                <a:latin typeface="Be Vietnam Pro" pitchFamily="34" charset="0"/>
+                <a:ea typeface="Be Vietnam Pro" pitchFamily="34" charset="-122"/>
+                <a:cs typeface="Be Vietnam Pro" pitchFamily="34" charset="-120"/>
+              </a:rPr>
+              <a:t> vào</a:t>
+            </a:r>
+            <a:r>
+              <a:rPr lang="en-US" sz="2100" dirty="0" spc="1" kern="0">
+                <a:solidFill>
+                  <a:srgbClr val="14161C"/>
+                </a:solidFill>
+                <a:latin typeface="Be Vietnam Pro" pitchFamily="34" charset="0"/>
+                <a:ea typeface="Be Vietnam Pro" pitchFamily="34" charset="-122"/>
+                <a:cs typeface="Be Vietnam Pro" pitchFamily="34" charset="-120"/>
+              </a:rPr>
+              <a:t> nhiều</a:t>
+            </a:r>
+            <a:r>
+              <a:rPr lang="en-US" sz="2100" dirty="0" spc="-13" kern="0">
+                <a:solidFill>
+                  <a:srgbClr val="14161C"/>
+                </a:solidFill>
+                <a:latin typeface="Be Vietnam Pro" pitchFamily="34" charset="0"/>
+                <a:ea typeface="Be Vietnam Pro" pitchFamily="34" charset="-122"/>
+                <a:cs typeface="Be Vietnam Pro" pitchFamily="34" charset="-120"/>
+              </a:rPr>
+              <a:t> mặt</a:t>
             </a:r>
             <a:r>
               <a:rPr lang="en-US" sz="2100" dirty="0" spc="-1" kern="0">
@@ -14557,73 +14412,7 @@
                 <a:ea typeface="Be Vietnam Pro" pitchFamily="34" charset="-122"/>
                 <a:cs typeface="Be Vietnam Pro" pitchFamily="34" charset="-120"/>
               </a:rPr>
-              <a:t> mạng</a:t>
-            </a:r>
-            <a:r>
-              <a:rPr lang="en-US" sz="2100" dirty="0" spc="-12" kern="0">
-                <a:solidFill>
-                  <a:srgbClr val="14161C"/>
-                </a:solidFill>
-                <a:latin typeface="Be Vietnam Pro" pitchFamily="34" charset="0"/>
-                <a:ea typeface="Be Vietnam Pro" pitchFamily="34" charset="-122"/>
-                <a:cs typeface="Be Vietnam Pro" pitchFamily="34" charset="-120"/>
-              </a:rPr>
-              <a:t> nơ-ron</a:t>
-            </a:r>
-            <a:r>
-              <a:rPr lang="en-US" sz="2100" dirty="0" spc="9" kern="0">
-                <a:solidFill>
-                  <a:srgbClr val="14161C"/>
-                </a:solidFill>
-                <a:latin typeface="Be Vietnam Pro" pitchFamily="34" charset="0"/>
-                <a:ea typeface="Be Vietnam Pro" pitchFamily="34" charset="-122"/>
-                <a:cs typeface="Be Vietnam Pro" pitchFamily="34" charset="-120"/>
-              </a:rPr>
-              <a:t> đặc</a:t>
-            </a:r>
-            <a:r>
-              <a:rPr lang="en-US" sz="2100" dirty="0" spc="-5" kern="0">
-                <a:solidFill>
-                  <a:srgbClr val="14161C"/>
-                </a:solidFill>
-                <a:latin typeface="Be Vietnam Pro" pitchFamily="34" charset="0"/>
-                <a:ea typeface="Be Vietnam Pro" pitchFamily="34" charset="-122"/>
-                <a:cs typeface="Be Vietnam Pro" pitchFamily="34" charset="-120"/>
-              </a:rPr>
-              <a:t> biệt</a:t>
-            </a:r>
-            <a:r>
-              <a:rPr lang="en-US" sz="2100" dirty="0" spc="-1" kern="0">
-                <a:solidFill>
-                  <a:srgbClr val="14161C"/>
-                </a:solidFill>
-                <a:latin typeface="Be Vietnam Pro" pitchFamily="34" charset="0"/>
-                <a:ea typeface="Be Vietnam Pro" pitchFamily="34" charset="-122"/>
-                <a:cs typeface="Be Vietnam Pro" pitchFamily="34" charset="-120"/>
-              </a:rPr>
-              <a:t> mạnh</a:t>
-            </a:r>
-            <a:r>
-              <a:rPr lang="en-US" sz="2100" dirty="0" spc="-13" kern="0">
-                <a:solidFill>
-                  <a:srgbClr val="14161C"/>
-                </a:solidFill>
-                <a:latin typeface="Be Vietnam Pro" pitchFamily="34" charset="0"/>
-                <a:ea typeface="Be Vietnam Pro" pitchFamily="34" charset="-122"/>
-                <a:cs typeface="Be Vietnam Pro" pitchFamily="34" charset="-120"/>
-              </a:rPr>
-              <a:t> với</a:t>
-            </a:r>
-            <a:r>
-              <a:rPr lang="en-US" sz="2100" dirty="0" spc="-1" kern="0">
-                <a:solidFill>
-                  <a:srgbClr val="14161C"/>
-                </a:solidFill>
-                <a:latin typeface="Be Vietnam Pro" pitchFamily="34" charset="0"/>
-                <a:ea typeface="Be Vietnam Pro" pitchFamily="34" charset="-122"/>
-                <a:cs typeface="Be Vietnam Pro" pitchFamily="34" charset="-120"/>
-              </a:rPr>
-              <a:t> ảnh.</a:t>
+              <a:t> phẳng.</a:t>
             </a:r>
             <a:endParaRPr lang="en-US" sz="2100" dirty="0"/>
           </a:p>
@@ -15241,7 +15030,7 @@
               <a:buNone/>
             </a:pPr>
             <a:r>
-              <a:rPr lang="en-US" sz="3000" b="1" dirty="0" spc="35" kern="0">
+              <a:rPr lang="en-US" sz="3000" b="1" dirty="0" spc="2" kern="0">
                 <a:solidFill>
                   <a:srgbClr val="FF6A4D"/>
                 </a:solidFill>
@@ -15249,7 +15038,40 @@
                 <a:ea typeface="Be Vietnam Pro" pitchFamily="34" charset="-122"/>
                 <a:cs typeface="Be Vietnam Pro" pitchFamily="34" charset="-120"/>
               </a:rPr>
-              <a:t>Đừng</a:t>
+              <a:t>Ví</a:t>
+            </a:r>
+            <a:r>
+              <a:rPr lang="en-US" sz="3000" b="1" dirty="0" spc="3" kern="0">
+                <a:solidFill>
+                  <a:srgbClr val="FF6A4D"/>
+                </a:solidFill>
+                <a:latin typeface="Be Vietnam Pro" pitchFamily="34" charset="0"/>
+                <a:ea typeface="Be Vietnam Pro" pitchFamily="34" charset="-122"/>
+                <a:cs typeface="Be Vietnam Pro" pitchFamily="34" charset="-120"/>
+              </a:rPr>
+              <a:t> dụ</a:t>
+            </a:r>
+            <a:r>
+              <a:rPr lang="en-US" sz="3000" b="1" dirty="0" spc="-5" kern="0">
+                <a:solidFill>
+                  <a:srgbClr val="FF6A4D"/>
+                </a:solidFill>
+                <a:latin typeface="Be Vietnam Pro" pitchFamily="34" charset="0"/>
+                <a:ea typeface="Be Vietnam Pro" pitchFamily="34" charset="-122"/>
+                <a:cs typeface="Be Vietnam Pro" pitchFamily="34" charset="-120"/>
+              </a:rPr>
+              <a:t> nhỏ,</a:t>
+            </a:r>
+            <a:r>
+              <a:rPr lang="en-US" sz="3000" b="1" dirty="0" spc="-10" kern="0">
+                <a:solidFill>
+                  <a:srgbClr val="FF6A4D"/>
+                </a:solidFill>
+                <a:latin typeface="Be Vietnam Pro" pitchFamily="34" charset="0"/>
+                <a:ea typeface="Be Vietnam Pro" pitchFamily="34" charset="-122"/>
+                <a:cs typeface="Be Vietnam Pro" pitchFamily="34" charset="-120"/>
+              </a:rPr>
+              <a:t> không</a:t>
             </a:r>
             <a:r>
               <a:rPr lang="en-US" sz="3000" b="1" dirty="0" spc="-4" kern="0">
@@ -15260,7 +15082,18 @@
                 <a:ea typeface="Be Vietnam Pro" pitchFamily="34" charset="-122"/>
                 <a:cs typeface="Be Vietnam Pro" pitchFamily="34" charset="-120"/>
               </a:rPr>
-              <a:t> gán</a:t>
+              <a:t> phải</a:t>
+            </a:r>
+            <a:r>
+              <a:rPr lang="en-US" sz="3000" b="1" dirty="0" spc="1" kern="0">
+                <a:solidFill>
+                  <a:srgbClr val="FF6A4D"/>
+                </a:solidFill>
+                <a:latin typeface="Be Vietnam Pro" pitchFamily="34" charset="0"/>
+                <a:ea typeface="Be Vietnam Pro" pitchFamily="34" charset="-122"/>
+                <a:cs typeface="Be Vietnam Pro" pitchFamily="34" charset="-120"/>
+              </a:rPr>
+              <a:t> cách</a:t>
             </a:r>
             <a:r>
               <a:rPr lang="en-US" sz="3000" b="1" dirty="0" spc="-3" kern="0">
@@ -15271,10 +15104,10 @@
                 <a:ea typeface="Be Vietnam Pro" pitchFamily="34" charset="-122"/>
                 <a:cs typeface="Be Vietnam Pro" pitchFamily="34" charset="-120"/>
               </a:rPr>
-              <a:t> thuật</a:t>
-            </a:r>
-            <a:r>
-              <a:rPr lang="en-US" sz="3000" b="1" dirty="0" spc="-6" kern="0">
+              <a:t> dùng</a:t>
+            </a:r>
+            <a:r>
+              <a:rPr lang="en-US" sz="3000" b="1" dirty="0" spc="-7" kern="0">
                 <a:solidFill>
                   <a:srgbClr val="FF6A4D"/>
                 </a:solidFill>
@@ -15282,40 +15115,7 @@
                 <a:ea typeface="Be Vietnam Pro" pitchFamily="34" charset="-122"/>
                 <a:cs typeface="Be Vietnam Pro" pitchFamily="34" charset="-120"/>
               </a:rPr>
-              <a:t> toán</a:t>
-            </a:r>
-            <a:r>
-              <a:rPr lang="en-US" sz="3000" b="1" dirty="0" spc="-16" kern="0">
-                <a:solidFill>
-                  <a:srgbClr val="FF6A4D"/>
-                </a:solidFill>
-                <a:latin typeface="Be Vietnam Pro" pitchFamily="34" charset="0"/>
-                <a:ea typeface="Be Vietnam Pro" pitchFamily="34" charset="-122"/>
-                <a:cs typeface="Be Vietnam Pro" pitchFamily="34" charset="-120"/>
-              </a:rPr>
-              <a:t> vào</a:t>
-            </a:r>
-            <a:r>
-              <a:rPr lang="en-US" sz="3000" b="1" dirty="0" spc="0" kern="0">
-                <a:solidFill>
-                  <a:srgbClr val="FF6A4D"/>
-                </a:solidFill>
-                <a:latin typeface="Be Vietnam Pro" pitchFamily="34" charset="0"/>
-                <a:ea typeface="Be Vietnam Pro" pitchFamily="34" charset="-122"/>
-                <a:cs typeface="Be Vietnam Pro" pitchFamily="34" charset="-120"/>
-              </a:rPr>
-              <a:t> nơi</a:t>
-            </a:r>
-            <a:r>
-              <a:rPr lang="en-US" sz="3000" b="1" dirty="0" spc="-2" kern="0">
-                <a:solidFill>
-                  <a:srgbClr val="FF6A4D"/>
-                </a:solidFill>
-                <a:latin typeface="Be Vietnam Pro" pitchFamily="34" charset="0"/>
-                <a:ea typeface="Be Vietnam Pro" pitchFamily="34" charset="-122"/>
-                <a:cs typeface="Be Vietnam Pro" pitchFamily="34" charset="-120"/>
-              </a:rPr>
-              <a:t> dùng</a:t>
+              <a:t> thật</a:t>
             </a:r>
             <a:endParaRPr lang="en-US" sz="3000" dirty="0"/>
           </a:p>
@@ -15349,6 +15149,72 @@
               <a:buNone/>
             </a:pPr>
             <a:r>
+              <a:rPr lang="en-US" sz="2700" dirty="0" spc="-25" kern="0">
+                <a:solidFill>
+                  <a:srgbClr val="F3EEE3"/>
+                </a:solidFill>
+                <a:latin typeface="Be Vietnam Pro" pitchFamily="34" charset="0"/>
+                <a:ea typeface="Be Vietnam Pro" pitchFamily="34" charset="-122"/>
+                <a:cs typeface="Be Vietnam Pro" pitchFamily="34" charset="-120"/>
+              </a:rPr>
+              <a:t>RSA</a:t>
+            </a:r>
+            <a:r>
+              <a:rPr lang="en-US" sz="2700" dirty="0" spc="-12" kern="0">
+                <a:solidFill>
+                  <a:srgbClr val="F3EEE3"/>
+                </a:solidFill>
+                <a:latin typeface="Be Vietnam Pro" pitchFamily="34" charset="0"/>
+                <a:ea typeface="Be Vietnam Pro" pitchFamily="34" charset="-122"/>
+                <a:cs typeface="Be Vietnam Pro" pitchFamily="34" charset="-120"/>
+              </a:rPr>
+              <a:t> số</a:t>
+            </a:r>
+            <a:r>
+              <a:rPr lang="en-US" sz="2700" dirty="0" spc="-3" kern="0">
+                <a:solidFill>
+                  <a:srgbClr val="F3EEE3"/>
+                </a:solidFill>
+                <a:latin typeface="Be Vietnam Pro" pitchFamily="34" charset="0"/>
+                <a:ea typeface="Be Vietnam Pro" pitchFamily="34" charset="-122"/>
+                <a:cs typeface="Be Vietnam Pro" pitchFamily="34" charset="-120"/>
+              </a:rPr>
+              <a:t> nhỏ</a:t>
+            </a:r>
+            <a:r>
+              <a:rPr lang="en-US" sz="2700" dirty="0" spc="-2" kern="0">
+                <a:solidFill>
+                  <a:srgbClr val="F3EEE3"/>
+                </a:solidFill>
+                <a:latin typeface="Be Vietnam Pro" pitchFamily="34" charset="0"/>
+                <a:ea typeface="Be Vietnam Pro" pitchFamily="34" charset="-122"/>
+                <a:cs typeface="Be Vietnam Pro" pitchFamily="34" charset="-120"/>
+              </a:rPr>
+              <a:t> không</a:t>
+            </a:r>
+            <a:r>
+              <a:rPr lang="en-US" sz="2700" dirty="0" spc="-6" kern="0">
+                <a:solidFill>
+                  <a:srgbClr val="F3EEE3"/>
+                </a:solidFill>
+                <a:latin typeface="Be Vietnam Pro" pitchFamily="34" charset="0"/>
+                <a:ea typeface="Be Vietnam Pro" pitchFamily="34" charset="-122"/>
+                <a:cs typeface="Be Vietnam Pro" pitchFamily="34" charset="-120"/>
+              </a:rPr>
+              <a:t> bảo</a:t>
+            </a:r>
+            <a:r>
+              <a:rPr lang="en-US" sz="2700" dirty="0" spc="-13" kern="0">
+                <a:solidFill>
+                  <a:srgbClr val="F3EEE3"/>
+                </a:solidFill>
+                <a:latin typeface="Be Vietnam Pro" pitchFamily="34" charset="0"/>
+                <a:ea typeface="Be Vietnam Pro" pitchFamily="34" charset="-122"/>
+                <a:cs typeface="Be Vietnam Pro" pitchFamily="34" charset="-120"/>
+              </a:rPr>
+              <a:t> mật</a:t>
+            </a:r>
+            <a:r>
               <a:rPr lang="en-US" sz="2700" dirty="0" spc="-1" kern="0">
                 <a:solidFill>
                   <a:srgbClr val="F3EEE3"/>
@@ -15357,62 +15223,7 @@
                 <a:ea typeface="Be Vietnam Pro" pitchFamily="34" charset="-122"/>
                 <a:cs typeface="Be Vietnam Pro" pitchFamily="34" charset="-120"/>
               </a:rPr>
-              <a:t>Danh</a:t>
-            </a:r>
-            <a:r>
-              <a:rPr lang="en-US" sz="2700" dirty="0" spc="-6" kern="0">
-                <a:solidFill>
-                  <a:srgbClr val="F3EEE3"/>
-                </a:solidFill>
-                <a:latin typeface="Be Vietnam Pro" pitchFamily="34" charset="0"/>
-                <a:ea typeface="Be Vietnam Pro" pitchFamily="34" charset="-122"/>
-                <a:cs typeface="Be Vietnam Pro" pitchFamily="34" charset="-120"/>
-              </a:rPr>
-              <a:t> sách</a:t>
-            </a:r>
-            <a:r>
-              <a:rPr lang="en-US" sz="2700" dirty="0" spc="-3" kern="0">
-                <a:solidFill>
-                  <a:srgbClr val="F3EEE3"/>
-                </a:solidFill>
-                <a:latin typeface="Be Vietnam Pro" pitchFamily="34" charset="0"/>
-                <a:ea typeface="Be Vietnam Pro" pitchFamily="34" charset="-122"/>
-                <a:cs typeface="Be Vietnam Pro" pitchFamily="34" charset="-120"/>
-              </a:rPr>
-              <a:t> nơi dùng</a:t>
-            </a:r>
-            <a:r>
-              <a:rPr lang="en-US" sz="2700" dirty="0" spc="-1" kern="0">
-                <a:solidFill>
-                  <a:srgbClr val="F3EEE3"/>
-                </a:solidFill>
-                <a:latin typeface="Be Vietnam Pro" pitchFamily="34" charset="0"/>
-                <a:ea typeface="Be Vietnam Pro" pitchFamily="34" charset="-122"/>
-                <a:cs typeface="Be Vietnam Pro" pitchFamily="34" charset="-120"/>
-              </a:rPr>
-              <a:t> chỉ là</a:t>
-            </a:r>
-            <a:r>
-              <a:rPr lang="en-US" sz="2700" dirty="0" spc="-7" kern="0">
-                <a:solidFill>
-                  <a:srgbClr val="F3EEE3"/>
-                </a:solidFill>
-                <a:latin typeface="Be Vietnam Pro" pitchFamily="34" charset="0"/>
-                <a:ea typeface="Be Vietnam Pro" pitchFamily="34" charset="-122"/>
-                <a:cs typeface="Be Vietnam Pro" pitchFamily="34" charset="-120"/>
-              </a:rPr>
-              <a:t> một</a:t>
-            </a:r>
-            <a:r>
-              <a:rPr lang="en-US" sz="2700" dirty="0" spc="1" kern="0">
-                <a:solidFill>
-                  <a:srgbClr val="F3EEE3"/>
-                </a:solidFill>
-                <a:latin typeface="Be Vietnam Pro" pitchFamily="34" charset="0"/>
-                <a:ea typeface="Be Vietnam Pro" pitchFamily="34" charset="-122"/>
-                <a:cs typeface="Be Vietnam Pro" pitchFamily="34" charset="-120"/>
-              </a:rPr>
-              <a:t> câu</a:t>
+              <a:t> gì;</a:t>
             </a:r>
             <a:endParaRPr lang="en-US" sz="2700" dirty="0"/>
           </a:p>
@@ -15424,7 +15235,7 @@
               <a:buNone/>
             </a:pPr>
             <a:r>
-              <a:rPr lang="en-US" sz="2700" dirty="0" spc="1" kern="0">
+              <a:rPr lang="en-US" sz="2700" dirty="0" spc="-7" kern="0">
                 <a:solidFill>
                   <a:srgbClr val="F3EEE3"/>
                 </a:solidFill>
@@ -15432,7 +15243,7 @@
                 <a:ea typeface="Be Vietnam Pro" pitchFamily="34" charset="-122"/>
                 <a:cs typeface="Be Vietnam Pro" pitchFamily="34" charset="-120"/>
               </a:rPr>
-              <a:t>chung</a:t>
+              <a:t>Huffman</a:t>
             </a:r>
             <a:r>
               <a:rPr lang="en-US" sz="2700" dirty="0" spc="-1" kern="0">
@@ -15443,10 +15254,10 @@
                 <a:ea typeface="Be Vietnam Pro" pitchFamily="34" charset="-122"/>
                 <a:cs typeface="Be Vietnam Pro" pitchFamily="34" charset="-120"/>
               </a:rPr>
-              <a:t> cho</a:t>
-            </a:r>
-            <a:r>
-              <a:rPr lang="en-US" sz="2700" dirty="0" spc="0" kern="0">
+              <a:t> chỉ tính</a:t>
+            </a:r>
+            <a:r>
+              <a:rPr lang="en-US" sz="2700" dirty="0" spc="15" kern="0">
                 <a:solidFill>
                   <a:srgbClr val="F3EEE3"/>
                 </a:solidFill>
@@ -15454,7 +15265,18 @@
                 <a:ea typeface="Be Vietnam Pro" pitchFamily="34" charset="-122"/>
                 <a:cs typeface="Be Vietnam Pro" pitchFamily="34" charset="-120"/>
               </a:rPr>
-              <a:t> cả</a:t>
+              <a:t> độ</a:t>
+            </a:r>
+            <a:r>
+              <a:rPr lang="en-US" sz="2700" dirty="0" spc="-1" kern="0">
+                <a:solidFill>
+                  <a:srgbClr val="F3EEE3"/>
+                </a:solidFill>
+                <a:latin typeface="Be Vietnam Pro" pitchFamily="34" charset="0"/>
+                <a:ea typeface="Be Vietnam Pro" pitchFamily="34" charset="-122"/>
+                <a:cs typeface="Be Vietnam Pro" pitchFamily="34" charset="-120"/>
+              </a:rPr>
+              <a:t> dài</a:t>
             </a:r>
             <a:r>
               <a:rPr lang="en-US" sz="2700" dirty="0" spc="-2" kern="0">
@@ -15465,29 +15287,7 @@
                 <a:ea typeface="Be Vietnam Pro" pitchFamily="34" charset="-122"/>
                 <a:cs typeface="Be Vietnam Pro" pitchFamily="34" charset="-120"/>
               </a:rPr>
-              <a:t> chín</a:t>
-            </a:r>
-            <a:r>
-              <a:rPr lang="en-US" sz="2700" dirty="0" spc="-7" kern="0">
-                <a:solidFill>
-                  <a:srgbClr val="F3EEE3"/>
-                </a:solidFill>
-                <a:latin typeface="Be Vietnam Pro" pitchFamily="34" charset="0"/>
-                <a:ea typeface="Be Vietnam Pro" pitchFamily="34" charset="-122"/>
-                <a:cs typeface="Be Vietnam Pro" pitchFamily="34" charset="-120"/>
-              </a:rPr>
-              <a:t> thuật</a:t>
-            </a:r>
-            <a:r>
-              <a:rPr lang="en-US" sz="2700" dirty="0" spc="-12" kern="0">
-                <a:solidFill>
-                  <a:srgbClr val="F3EEE3"/>
-                </a:solidFill>
-                <a:latin typeface="Be Vietnam Pro" pitchFamily="34" charset="0"/>
-                <a:ea typeface="Be Vietnam Pro" pitchFamily="34" charset="-122"/>
-                <a:cs typeface="Be Vietnam Pro" pitchFamily="34" charset="-120"/>
-              </a:rPr>
-              <a:t> toán.</a:t>
+              <a:t> mã.</a:t>
             </a:r>
             <a:endParaRPr lang="en-US" sz="2700" dirty="0"/>
           </a:p>
@@ -15717,6 +15517,72 @@
               <a:buNone/>
             </a:pPr>
             <a:r>
+              <a:rPr lang="en-US" sz="2550" dirty="0" spc="2" kern="0">
+                <a:solidFill>
+                  <a:srgbClr val="F3EEE3"/>
+                </a:solidFill>
+                <a:latin typeface="Be Vietnam Pro" pitchFamily="34" charset="0"/>
+                <a:ea typeface="Be Vietnam Pro" pitchFamily="34" charset="-122"/>
+                <a:cs typeface="Be Vietnam Pro" pitchFamily="34" charset="-120"/>
+              </a:rPr>
+              <a:t>Bài</a:t>
+            </a:r>
+            <a:r>
+              <a:rPr lang="en-US" sz="2550" dirty="0" spc="0" kern="0">
+                <a:solidFill>
+                  <a:srgbClr val="F3EEE3"/>
+                </a:solidFill>
+                <a:latin typeface="Be Vietnam Pro" pitchFamily="34" charset="0"/>
+                <a:ea typeface="Be Vietnam Pro" pitchFamily="34" charset="-122"/>
+                <a:cs typeface="Be Vietnam Pro" pitchFamily="34" charset="-120"/>
+              </a:rPr>
+              <a:t> không nói</a:t>
+            </a:r>
+            <a:r>
+              <a:rPr lang="en-US" sz="2550" dirty="0" spc="-6" kern="0">
+                <a:solidFill>
+                  <a:srgbClr val="F3EEE3"/>
+                </a:solidFill>
+                <a:latin typeface="Be Vietnam Pro" pitchFamily="34" charset="0"/>
+                <a:ea typeface="Be Vietnam Pro" pitchFamily="34" charset="-122"/>
+                <a:cs typeface="Be Vietnam Pro" pitchFamily="34" charset="-120"/>
+              </a:rPr>
+              <a:t> thuật</a:t>
+            </a:r>
+            <a:r>
+              <a:rPr lang="en-US" sz="2550" dirty="0" spc="-12" kern="0">
+                <a:solidFill>
+                  <a:srgbClr val="F3EEE3"/>
+                </a:solidFill>
+                <a:latin typeface="Be Vietnam Pro" pitchFamily="34" charset="0"/>
+                <a:ea typeface="Be Vietnam Pro" pitchFamily="34" charset="-122"/>
+                <a:cs typeface="Be Vietnam Pro" pitchFamily="34" charset="-120"/>
+              </a:rPr>
+              <a:t> toán</a:t>
+            </a:r>
+            <a:r>
+              <a:rPr lang="en-US" sz="2550" dirty="0" spc="0" kern="0">
+                <a:solidFill>
+                  <a:srgbClr val="F3EEE3"/>
+                </a:solidFill>
+                <a:latin typeface="Be Vietnam Pro" pitchFamily="34" charset="0"/>
+                <a:ea typeface="Be Vietnam Pro" pitchFamily="34" charset="-122"/>
+                <a:cs typeface="Be Vietnam Pro" pitchFamily="34" charset="-120"/>
+              </a:rPr>
+              <a:t> nào</a:t>
+            </a:r>
+            <a:r>
+              <a:rPr lang="en-US" sz="2550" dirty="0" spc="-1" kern="0">
+                <a:solidFill>
+                  <a:srgbClr val="F3EEE3"/>
+                </a:solidFill>
+                <a:latin typeface="Be Vietnam Pro" pitchFamily="34" charset="0"/>
+                <a:ea typeface="Be Vietnam Pro" pitchFamily="34" charset="-122"/>
+                <a:cs typeface="Be Vietnam Pro" pitchFamily="34" charset="-120"/>
+              </a:rPr>
+              <a:t> dùng</a:t>
+            </a:r>
+            <a:r>
               <a:rPr lang="en-US" sz="2550" dirty="0" spc="-2" kern="0">
                 <a:solidFill>
                   <a:srgbClr val="F3EEE3"/>
@@ -15725,7 +15591,29 @@
                 <a:ea typeface="Be Vietnam Pro" pitchFamily="34" charset="-122"/>
                 <a:cs typeface="Be Vietnam Pro" pitchFamily="34" charset="-120"/>
               </a:rPr>
-              <a:t>Chữ</a:t>
+              <a:t> ở</a:t>
+            </a:r>
+            <a:r>
+              <a:rPr lang="en-US" sz="2550" dirty="0" spc="-7" kern="0">
+                <a:solidFill>
+                  <a:srgbClr val="F3EEE3"/>
+                </a:solidFill>
+                <a:latin typeface="Be Vietnam Pro" pitchFamily="34" charset="0"/>
+                <a:ea typeface="Be Vietnam Pro" pitchFamily="34" charset="-122"/>
+                <a:cs typeface="Be Vietnam Pro" pitchFamily="34" charset="-120"/>
+              </a:rPr>
+              <a:t> sản</a:t>
+            </a:r>
+            <a:r>
+              <a:rPr lang="en-US" sz="2550" dirty="0" spc="0" kern="0">
+                <a:solidFill>
+                  <a:srgbClr val="F3EEE3"/>
+                </a:solidFill>
+                <a:latin typeface="Be Vietnam Pro" pitchFamily="34" charset="0"/>
+                <a:ea typeface="Be Vietnam Pro" pitchFamily="34" charset="-122"/>
+                <a:cs typeface="Be Vietnam Pro" pitchFamily="34" charset="-120"/>
+              </a:rPr>
+              <a:t> phẩm</a:t>
             </a:r>
             <a:r>
               <a:rPr lang="en-US" sz="2550" dirty="0" spc="1" kern="0">
@@ -15736,95 +15624,7 @@
                 <a:ea typeface="Be Vietnam Pro" pitchFamily="34" charset="-122"/>
                 <a:cs typeface="Be Vietnam Pro" pitchFamily="34" charset="-120"/>
               </a:rPr>
-              <a:t> “chi</a:t>
-            </a:r>
-            <a:r>
-              <a:rPr lang="en-US" sz="2550" dirty="0" spc="-1" kern="0">
-                <a:solidFill>
-                  <a:srgbClr val="F3EEE3"/>
-                </a:solidFill>
-                <a:latin typeface="Be Vietnam Pro" pitchFamily="34" charset="0"/>
-                <a:ea typeface="Be Vietnam Pro" pitchFamily="34" charset="-122"/>
-                <a:cs typeface="Be Vietnam Pro" pitchFamily="34" charset="-120"/>
-              </a:rPr>
-              <a:t> phối</a:t>
-            </a:r>
-            <a:r>
-              <a:rPr lang="en-US" sz="2550" dirty="0" spc="1" kern="0">
-                <a:solidFill>
-                  <a:srgbClr val="F3EEE3"/>
-                </a:solidFill>
-                <a:latin typeface="Be Vietnam Pro" pitchFamily="34" charset="0"/>
-                <a:ea typeface="Be Vietnam Pro" pitchFamily="34" charset="-122"/>
-                <a:cs typeface="Be Vietnam Pro" pitchFamily="34" charset="-120"/>
-              </a:rPr>
-              <a:t> thế</a:t>
-            </a:r>
-            <a:r>
-              <a:rPr lang="en-US" sz="2550" dirty="0" spc="0" kern="0">
-                <a:solidFill>
-                  <a:srgbClr val="F3EEE3"/>
-                </a:solidFill>
-                <a:latin typeface="Be Vietnam Pro" pitchFamily="34" charset="0"/>
-                <a:ea typeface="Be Vietnam Pro" pitchFamily="34" charset="-122"/>
-                <a:cs typeface="Be Vietnam Pro" pitchFamily="34" charset="-120"/>
-              </a:rPr>
-              <a:t> giới” là lời</a:t>
-            </a:r>
-            <a:r>
-              <a:rPr lang="en-US" sz="2550" dirty="0" spc="-2" kern="0">
-                <a:solidFill>
-                  <a:srgbClr val="F3EEE3"/>
-                </a:solidFill>
-                <a:latin typeface="Be Vietnam Pro" pitchFamily="34" charset="0"/>
-                <a:ea typeface="Be Vietnam Pro" pitchFamily="34" charset="-122"/>
-                <a:cs typeface="Be Vietnam Pro" pitchFamily="34" charset="-120"/>
-              </a:rPr>
-              <a:t> của</a:t>
-            </a:r>
-            <a:r>
-              <a:rPr lang="en-US" sz="2550" dirty="0" spc="0" kern="0">
-                <a:solidFill>
-                  <a:srgbClr val="F3EEE3"/>
-                </a:solidFill>
-                <a:latin typeface="Be Vietnam Pro" pitchFamily="34" charset="0"/>
-                <a:ea typeface="Be Vietnam Pro" pitchFamily="34" charset="-122"/>
-                <a:cs typeface="Be Vietnam Pro" pitchFamily="34" charset="-120"/>
-              </a:rPr>
-              <a:t> nguồn,</a:t>
-            </a:r>
-            <a:r>
-              <a:rPr lang="en-US" sz="2550" dirty="0" spc="-3" kern="0">
-                <a:solidFill>
-                  <a:srgbClr val="F3EEE3"/>
-                </a:solidFill>
-                <a:latin typeface="Be Vietnam Pro" pitchFamily="34" charset="0"/>
-                <a:ea typeface="Be Vietnam Pro" pitchFamily="34" charset="-122"/>
-                <a:cs typeface="Be Vietnam Pro" pitchFamily="34" charset="-120"/>
-              </a:rPr>
-              <a:t> bài</a:t>
-            </a:r>
-            <a:r>
-              <a:rPr lang="en-US" sz="2550" dirty="0" spc="1" kern="0">
-                <a:solidFill>
-                  <a:srgbClr val="F3EEE3"/>
-                </a:solidFill>
-                <a:latin typeface="Be Vietnam Pro" pitchFamily="34" charset="0"/>
-                <a:ea typeface="Be Vietnam Pro" pitchFamily="34" charset="-122"/>
-                <a:cs typeface="Be Vietnam Pro" pitchFamily="34" charset="-120"/>
-              </a:rPr>
-              <a:t> không kiểm</a:t>
-            </a:r>
-            <a:r>
-              <a:rPr lang="en-US" sz="2550" dirty="0" spc="-20" kern="0">
-                <a:solidFill>
-                  <a:srgbClr val="F3EEE3"/>
-                </a:solidFill>
-                <a:latin typeface="Be Vietnam Pro" pitchFamily="34" charset="0"/>
-                <a:ea typeface="Be Vietnam Pro" pitchFamily="34" charset="-122"/>
-                <a:cs typeface="Be Vietnam Pro" pitchFamily="34" charset="-120"/>
-              </a:rPr>
-              <a:t> tra.</a:t>
+              <a:t> nào.</a:t>
             </a:r>
             <a:endParaRPr lang="en-US" sz="2550" dirty="0"/>
           </a:p>
@@ -15952,6 +15752,50 @@
               <a:buNone/>
             </a:pPr>
             <a:r>
+              <a:rPr lang="en-US" sz="2700" b="1" dirty="0" spc="0" kern="0">
+                <a:solidFill>
+                  <a:srgbClr val="F3EEE3"/>
+                </a:solidFill>
+                <a:latin typeface="Be Vietnam Pro" pitchFamily="34" charset="0"/>
+                <a:ea typeface="Be Vietnam Pro" pitchFamily="34" charset="-122"/>
+                <a:cs typeface="Be Vietnam Pro" pitchFamily="34" charset="-120"/>
+              </a:rPr>
+              <a:t>Số</a:t>
+            </a:r>
+            <a:r>
+              <a:rPr lang="en-US" sz="2700" b="1" dirty="0" spc="-3" kern="0">
+                <a:solidFill>
+                  <a:srgbClr val="F3EEE3"/>
+                </a:solidFill>
+                <a:latin typeface="Be Vietnam Pro" pitchFamily="34" charset="0"/>
+                <a:ea typeface="Be Vietnam Pro" pitchFamily="34" charset="-122"/>
+                <a:cs typeface="Be Vietnam Pro" pitchFamily="34" charset="-120"/>
+              </a:rPr>
+              <a:t> nhỏ,</a:t>
+            </a:r>
+            <a:r>
+              <a:rPr lang="en-US" sz="2700" b="1" dirty="0" spc="0" kern="0">
+                <a:solidFill>
+                  <a:srgbClr val="F3EEE3"/>
+                </a:solidFill>
+                <a:latin typeface="Be Vietnam Pro" pitchFamily="34" charset="0"/>
+                <a:ea typeface="Be Vietnam Pro" pitchFamily="34" charset="-122"/>
+                <a:cs typeface="Be Vietnam Pro" pitchFamily="34" charset="-120"/>
+              </a:rPr>
+              <a:t> chỉ</a:t>
+            </a:r>
+            <a:r>
+              <a:rPr lang="en-US" sz="2700" b="1" dirty="0" spc="7" kern="0">
+                <a:solidFill>
+                  <a:srgbClr val="F3EEE3"/>
+                </a:solidFill>
+                <a:latin typeface="Be Vietnam Pro" pitchFamily="34" charset="0"/>
+                <a:ea typeface="Be Vietnam Pro" pitchFamily="34" charset="-122"/>
+                <a:cs typeface="Be Vietnam Pro" pitchFamily="34" charset="-120"/>
+              </a:rPr>
+              <a:t> để</a:t>
+            </a:r>
+            <a:r>
               <a:rPr lang="en-US" sz="2700" b="1" dirty="0" spc="-1" kern="0">
                 <a:solidFill>
                   <a:srgbClr val="F3EEE3"/>
@@ -15960,10 +15804,10 @@
                 <a:ea typeface="Be Vietnam Pro" pitchFamily="34" charset="-122"/>
                 <a:cs typeface="Be Vietnam Pro" pitchFamily="34" charset="-120"/>
               </a:rPr>
-              <a:t>Nơi</a:t>
-            </a:r>
-            <a:r>
-              <a:rPr lang="en-US" sz="2700" b="1" dirty="0" spc="-2" kern="0">
+              <a:t> minh</a:t>
+            </a:r>
+            <a:r>
+              <a:rPr lang="en-US" sz="2700" b="1" dirty="0" spc="-6" kern="0">
                 <a:solidFill>
                   <a:srgbClr val="F3EEE3"/>
                 </a:solidFill>
@@ -15971,51 +15815,7 @@
                 <a:ea typeface="Be Vietnam Pro" pitchFamily="34" charset="-122"/>
                 <a:cs typeface="Be Vietnam Pro" pitchFamily="34" charset="-120"/>
               </a:rPr>
-              <a:t> dùng</a:t>
-            </a:r>
-            <a:r>
-              <a:rPr lang="en-US" sz="2700" b="1" dirty="0" spc="0" kern="0">
-                <a:solidFill>
-                  <a:srgbClr val="F3EEE3"/>
-                </a:solidFill>
-                <a:latin typeface="Be Vietnam Pro" pitchFamily="34" charset="0"/>
-                <a:ea typeface="Be Vietnam Pro" pitchFamily="34" charset="-122"/>
-                <a:cs typeface="Be Vietnam Pro" pitchFamily="34" charset="-120"/>
-              </a:rPr>
-              <a:t> chỉ</a:t>
-            </a:r>
-            <a:r>
-              <a:rPr lang="en-US" sz="2700" b="1" dirty="0" spc="-5" kern="0">
-                <a:solidFill>
-                  <a:srgbClr val="F3EEE3"/>
-                </a:solidFill>
-                <a:latin typeface="Be Vietnam Pro" pitchFamily="34" charset="0"/>
-                <a:ea typeface="Be Vietnam Pro" pitchFamily="34" charset="-122"/>
-                <a:cs typeface="Be Vietnam Pro" pitchFamily="34" charset="-120"/>
-              </a:rPr>
-              <a:t> là</a:t>
-            </a:r>
-            <a:r>
-              <a:rPr lang="en-US" sz="2700" b="1" dirty="0" spc="-1" kern="0">
-                <a:solidFill>
-                  <a:srgbClr val="F3EEE3"/>
-                </a:solidFill>
-                <a:latin typeface="Be Vietnam Pro" pitchFamily="34" charset="0"/>
-                <a:ea typeface="Be Vietnam Pro" pitchFamily="34" charset="-122"/>
-                <a:cs typeface="Be Vietnam Pro" pitchFamily="34" charset="-120"/>
-              </a:rPr>
-              <a:t> câu</a:t>
-            </a:r>
-            <a:r>
-              <a:rPr lang="en-US" sz="2700" b="1" dirty="0" spc="-2" kern="0">
-                <a:solidFill>
-                  <a:srgbClr val="F3EEE3"/>
-                </a:solidFill>
-                <a:latin typeface="Be Vietnam Pro" pitchFamily="34" charset="0"/>
-                <a:ea typeface="Be Vietnam Pro" pitchFamily="34" charset="-122"/>
-                <a:cs typeface="Be Vietnam Pro" pitchFamily="34" charset="-120"/>
-              </a:rPr>
-              <a:t> chung</a:t>
+              <a:t> họa</a:t>
             </a:r>
             <a:endParaRPr lang="en-US" sz="2700" dirty="0"/>
           </a:p>
@@ -16055,7 +15855,7 @@
               <a:buNone/>
             </a:pPr>
             <a:r>
-              <a:rPr lang="en-US" sz="2250" b="1" dirty="0" spc="3" kern="0">
+              <a:rPr lang="en-US" sz="2250" b="1" dirty="0" spc="-21" kern="0">
                 <a:solidFill>
                   <a:srgbClr val="F3EEE3"/>
                 </a:solidFill>
@@ -16063,10 +15863,10 @@
                 <a:ea typeface="Be Vietnam Pro" pitchFamily="34" charset="-122"/>
                 <a:cs typeface="Be Vietnam Pro" pitchFamily="34" charset="-120"/>
               </a:rPr>
-              <a:t>Chín</a:t>
-            </a:r>
-            <a:r>
-              <a:rPr lang="en-US" sz="2250" b="1" dirty="0" spc="-2" kern="0">
+              <a:t>RSA,</a:t>
+            </a:r>
+            <a:r>
+              <a:rPr lang="en-US" sz="2250" b="1" dirty="0" spc="-11" kern="0">
                 <a:solidFill>
                   <a:srgbClr val="F3EEE3"/>
                 </a:solidFill>
@@ -16074,18 +15874,7 @@
                 <a:ea typeface="Be Vietnam Pro" pitchFamily="34" charset="-122"/>
                 <a:cs typeface="Be Vietnam Pro" pitchFamily="34" charset="-120"/>
               </a:rPr>
-              <a:t> thuật</a:t>
-            </a:r>
-            <a:r>
-              <a:rPr lang="en-US" sz="2250" b="1" dirty="0" spc="-3" kern="0">
-                <a:solidFill>
-                  <a:srgbClr val="F3EEE3"/>
-                </a:solidFill>
-                <a:latin typeface="Be Vietnam Pro" pitchFamily="34" charset="0"/>
-                <a:ea typeface="Be Vietnam Pro" pitchFamily="34" charset="-122"/>
-                <a:cs typeface="Be Vietnam Pro" pitchFamily="34" charset="-120"/>
-              </a:rPr>
-              <a:t> toán</a:t>
+              <a:t> Huffman</a:t>
             </a:r>
             <a:endParaRPr lang="en-US" sz="2250" dirty="0"/>
           </a:p>
@@ -16150,7 +15939,7 @@
               <a:buNone/>
             </a:pPr>
             <a:r>
-              <a:rPr lang="en-US" sz="1950" b="1" dirty="0" spc="0" kern="0">
+              <a:rPr lang="en-US" sz="1950" b="1" dirty="0" spc="-9" kern="0">
                 <a:solidFill>
                   <a:srgbClr val="F3EEE3"/>
                 </a:solidFill>
@@ -16158,7 +15947,40 @@
                 <a:ea typeface="Be Vietnam Pro" pitchFamily="34" charset="-122"/>
                 <a:cs typeface="Be Vietnam Pro" pitchFamily="34" charset="-120"/>
               </a:rPr>
-              <a:t>Tìm</a:t>
+              <a:t>Không</a:t>
+            </a:r>
+            <a:r>
+              <a:rPr lang="en-US" sz="1950" b="1" dirty="0" spc="1" kern="0">
+                <a:solidFill>
+                  <a:srgbClr val="F3EEE3"/>
+                </a:solidFill>
+                <a:latin typeface="Be Vietnam Pro" pitchFamily="34" charset="0"/>
+                <a:ea typeface="Be Vietnam Pro" pitchFamily="34" charset="-122"/>
+                <a:cs typeface="Be Vietnam Pro" pitchFamily="34" charset="-120"/>
+              </a:rPr>
+              <a:t> bảo</a:t>
+            </a:r>
+            <a:r>
+              <a:rPr lang="en-US" sz="1950" b="1" dirty="0" spc="-4" kern="0">
+                <a:solidFill>
+                  <a:srgbClr val="F3EEE3"/>
+                </a:solidFill>
+                <a:latin typeface="Be Vietnam Pro" pitchFamily="34" charset="0"/>
+                <a:ea typeface="Be Vietnam Pro" pitchFamily="34" charset="-122"/>
+                <a:cs typeface="Be Vietnam Pro" pitchFamily="34" charset="-120"/>
+              </a:rPr>
+              <a:t> mật,</a:t>
+            </a:r>
+            <a:r>
+              <a:rPr lang="en-US" sz="1950" b="1" dirty="0" spc="-6" kern="0">
+                <a:solidFill>
+                  <a:srgbClr val="F3EEE3"/>
+                </a:solidFill>
+                <a:latin typeface="Be Vietnam Pro" pitchFamily="34" charset="0"/>
+                <a:ea typeface="Be Vietnam Pro" pitchFamily="34" charset="-122"/>
+                <a:cs typeface="Be Vietnam Pro" pitchFamily="34" charset="-120"/>
+              </a:rPr>
+              <a:t> không</a:t>
             </a:r>
             <a:r>
               <a:rPr lang="en-US" sz="1950" b="1" dirty="0" spc="-1" kern="0">
@@ -16169,10 +15991,10 @@
                 <a:ea typeface="Be Vietnam Pro" pitchFamily="34" charset="-122"/>
                 <a:cs typeface="Be Vietnam Pro" pitchFamily="34" charset="-120"/>
               </a:rPr>
-              <a:t> kiếm,</a:t>
-            </a:r>
-            <a:r>
-              <a:rPr lang="en-US" sz="1950" b="1" dirty="0" spc="-3" kern="0">
+              <a:t> ghi</a:t>
+            </a:r>
+            <a:r>
+              <a:rPr lang="en-US" sz="1950" b="1" dirty="0" spc="-5" kern="0">
                 <a:solidFill>
                   <a:srgbClr val="F3EEE3"/>
                 </a:solidFill>
@@ -16180,84 +16002,7 @@
                 <a:ea typeface="Be Vietnam Pro" pitchFamily="34" charset="-122"/>
                 <a:cs typeface="Be Vietnam Pro" pitchFamily="34" charset="-120"/>
               </a:rPr>
-              <a:t> mạng</a:t>
-            </a:r>
-            <a:r>
-              <a:rPr lang="en-US" sz="1950" b="1" dirty="0" spc="-22" kern="0">
-                <a:solidFill>
-                  <a:srgbClr val="F3EEE3"/>
-                </a:solidFill>
-                <a:latin typeface="Be Vietnam Pro" pitchFamily="34" charset="0"/>
-                <a:ea typeface="Be Vietnam Pro" pitchFamily="34" charset="-122"/>
-                <a:cs typeface="Be Vietnam Pro" pitchFamily="34" charset="-120"/>
-              </a:rPr>
-              <a:t> xã</a:t>
-            </a:r>
-            <a:r>
-              <a:rPr lang="en-US" sz="1950" b="1" dirty="0" spc="-4" kern="0">
-                <a:solidFill>
-                  <a:srgbClr val="F3EEE3"/>
-                </a:solidFill>
-                <a:latin typeface="Be Vietnam Pro" pitchFamily="34" charset="0"/>
-                <a:ea typeface="Be Vietnam Pro" pitchFamily="34" charset="-122"/>
-                <a:cs typeface="Be Vietnam Pro" pitchFamily="34" charset="-120"/>
-              </a:rPr>
-              <a:t> hội,</a:t>
-            </a:r>
-            <a:r>
-              <a:rPr lang="en-US" sz="1950" b="1" dirty="0" spc="1" kern="0">
-                <a:solidFill>
-                  <a:srgbClr val="F3EEE3"/>
-                </a:solidFill>
-                <a:latin typeface="Be Vietnam Pro" pitchFamily="34" charset="0"/>
-                <a:ea typeface="Be Vietnam Pro" pitchFamily="34" charset="-122"/>
-                <a:cs typeface="Be Vietnam Pro" pitchFamily="34" charset="-120"/>
-              </a:rPr>
-              <a:t> WiFi,</a:t>
-            </a:r>
-            <a:r>
-              <a:rPr lang="en-US" sz="1950" b="1" dirty="0" spc="10" kern="0">
-                <a:solidFill>
-                  <a:srgbClr val="F3EEE3"/>
-                </a:solidFill>
-                <a:latin typeface="Be Vietnam Pro" pitchFamily="34" charset="0"/>
-                <a:ea typeface="Be Vietnam Pro" pitchFamily="34" charset="-122"/>
-                <a:cs typeface="Be Vietnam Pro" pitchFamily="34" charset="-120"/>
-              </a:rPr>
-              <a:t> điện</a:t>
-            </a:r>
-            <a:r>
-              <a:rPr lang="en-US" sz="1950" b="1" dirty="0" spc="-2" kern="0">
-                <a:solidFill>
-                  <a:srgbClr val="F3EEE3"/>
-                </a:solidFill>
-                <a:latin typeface="Be Vietnam Pro" pitchFamily="34" charset="0"/>
-                <a:ea typeface="Be Vietnam Pro" pitchFamily="34" charset="-122"/>
-                <a:cs typeface="Be Vietnam Pro" pitchFamily="34" charset="-120"/>
-              </a:rPr>
-              <a:t> thoại,</a:t>
-            </a:r>
-            <a:r>
-              <a:rPr lang="en-US" sz="1950" b="1" dirty="0" spc="-16" kern="0">
-                <a:solidFill>
-                  <a:srgbClr val="F3EEE3"/>
-                </a:solidFill>
-                <a:latin typeface="Be Vietnam Pro" pitchFamily="34" charset="0"/>
-                <a:ea typeface="Be Vietnam Pro" pitchFamily="34" charset="-122"/>
-                <a:cs typeface="Be Vietnam Pro" pitchFamily="34" charset="-120"/>
-              </a:rPr>
-              <a:t> vệ</a:t>
-            </a:r>
-            <a:r>
-              <a:rPr lang="en-US" sz="1950" b="1" dirty="0" spc="1" kern="0">
-                <a:solidFill>
-                  <a:srgbClr val="F3EEE3"/>
-                </a:solidFill>
-                <a:latin typeface="Be Vietnam Pro" pitchFamily="34" charset="0"/>
-                <a:ea typeface="Be Vietnam Pro" pitchFamily="34" charset="-122"/>
-                <a:cs typeface="Be Vietnam Pro" pitchFamily="34" charset="-120"/>
-              </a:rPr>
-              <a:t> tinh</a:t>
+              <a:t> tệp</a:t>
             </a:r>
             <a:endParaRPr lang="en-US" sz="1950" dirty="0"/>
           </a:p>
@@ -16288,7 +16033,7 @@
               <a:buNone/>
             </a:pPr>
             <a:r>
-              <a:rPr lang="en-US" sz="2100" dirty="0" spc="1" kern="0">
+              <a:rPr lang="en-US" sz="2100" dirty="0" spc="-23" kern="0">
                 <a:solidFill>
                   <a:srgbClr val="C4C8D6"/>
                 </a:solidFill>
@@ -16296,7 +16041,40 @@
                 <a:ea typeface="Be Vietnam Pro" pitchFamily="34" charset="-122"/>
                 <a:cs typeface="Be Vietnam Pro" pitchFamily="34" charset="-120"/>
               </a:rPr>
-              <a:t>Bài</a:t>
+              <a:t>PageRank</a:t>
+            </a:r>
+            <a:r>
+              <a:rPr lang="en-US" sz="2100" dirty="0" spc="-4" kern="0">
+                <a:solidFill>
+                  <a:srgbClr val="C4C8D6"/>
+                </a:solidFill>
+                <a:latin typeface="Be Vietnam Pro" pitchFamily="34" charset="0"/>
+                <a:ea typeface="Be Vietnam Pro" pitchFamily="34" charset="-122"/>
+                <a:cs typeface="Be Vietnam Pro" pitchFamily="34" charset="-120"/>
+              </a:rPr>
+              <a:t> là</a:t>
+            </a:r>
+            <a:r>
+              <a:rPr lang="en-US" sz="2100" dirty="0" spc="-5" kern="0">
+                <a:solidFill>
+                  <a:srgbClr val="C4C8D6"/>
+                </a:solidFill>
+                <a:latin typeface="Be Vietnam Pro" pitchFamily="34" charset="0"/>
+                <a:ea typeface="Be Vietnam Pro" pitchFamily="34" charset="-122"/>
+                <a:cs typeface="Be Vietnam Pro" pitchFamily="34" charset="-120"/>
+              </a:rPr>
+              <a:t> bản</a:t>
+            </a:r>
+            <a:r>
+              <a:rPr lang="en-US" sz="2100" dirty="0" spc="-4" kern="0">
+                <a:solidFill>
+                  <a:srgbClr val="C4C8D6"/>
+                </a:solidFill>
+                <a:latin typeface="Be Vietnam Pro" pitchFamily="34" charset="0"/>
+                <a:ea typeface="Be Vietnam Pro" pitchFamily="34" charset="-122"/>
+                <a:cs typeface="Be Vietnam Pro" pitchFamily="34" charset="-120"/>
+              </a:rPr>
+              <a:t> lặp</a:t>
             </a:r>
             <a:r>
               <a:rPr lang="en-US" sz="2100" dirty="0" spc="-1" kern="0">
@@ -16307,10 +16085,10 @@
                 <a:ea typeface="Be Vietnam Pro" pitchFamily="34" charset="-122"/>
                 <a:cs typeface="Be Vietnam Pro" pitchFamily="34" charset="-120"/>
               </a:rPr>
-              <a:t> không</a:t>
-            </a:r>
-            <a:r>
-              <a:rPr lang="en-US" sz="2100" dirty="0" spc="-11" kern="0">
+              <a:t> tự</a:t>
+            </a:r>
+            <a:r>
+              <a:rPr lang="en-US" sz="2100" dirty="0" spc="-4" kern="0">
                 <a:solidFill>
                   <a:srgbClr val="C4C8D6"/>
                 </a:solidFill>
@@ -16318,10 +16096,10 @@
                 <a:ea typeface="Be Vietnam Pro" pitchFamily="34" charset="-122"/>
                 <a:cs typeface="Be Vietnam Pro" pitchFamily="34" charset="-120"/>
               </a:rPr>
-              <a:t> gán</a:t>
-            </a:r>
-            <a:r>
-              <a:rPr lang="en-US" sz="2100" dirty="0" spc="17" kern="0">
+              <a:t> viết</a:t>
+            </a:r>
+            <a:r>
+              <a:rPr lang="en-US" sz="2100" dirty="0" spc="-2" kern="0">
                 <a:solidFill>
                   <a:srgbClr val="C4C8D6"/>
                 </a:solidFill>
@@ -16329,10 +16107,10 @@
                 <a:ea typeface="Be Vietnam Pro" pitchFamily="34" charset="-122"/>
                 <a:cs typeface="Be Vietnam Pro" pitchFamily="34" charset="-120"/>
               </a:rPr>
-              <a:t> từng</a:t>
-            </a:r>
-            <a:r>
-              <a:rPr lang="en-US" sz="2100" dirty="0" spc="-9" kern="0">
+              <a:t> cho</a:t>
+            </a:r>
+            <a:r>
+              <a:rPr lang="en-US" sz="2100" dirty="0" spc="-6" kern="0">
                 <a:solidFill>
                   <a:srgbClr val="C4C8D6"/>
                 </a:solidFill>
@@ -16340,10 +16118,10 @@
                 <a:ea typeface="Be Vietnam Pro" pitchFamily="34" charset="-122"/>
                 <a:cs typeface="Be Vietnam Pro" pitchFamily="34" charset="-120"/>
               </a:rPr>
-              <a:t> thuật</a:t>
-            </a:r>
-            <a:r>
-              <a:rPr lang="en-US" sz="2100" dirty="0" spc="-12" kern="0">
+              <a:t> bốn</a:t>
+            </a:r>
+            <a:r>
+              <a:rPr lang="en-US" sz="2100" dirty="0" spc="-13" kern="0">
                 <a:solidFill>
                   <a:srgbClr val="C4C8D6"/>
                 </a:solidFill>
@@ -16351,40 +16129,7 @@
                 <a:ea typeface="Be Vietnam Pro" pitchFamily="34" charset="-122"/>
                 <a:cs typeface="Be Vietnam Pro" pitchFamily="34" charset="-120"/>
               </a:rPr>
-              <a:t> toán</a:t>
-            </a:r>
-            <a:r>
-              <a:rPr lang="en-US" sz="2100" dirty="0" spc="-13" kern="0">
-                <a:solidFill>
-                  <a:srgbClr val="C4C8D6"/>
-                </a:solidFill>
-                <a:latin typeface="Be Vietnam Pro" pitchFamily="34" charset="0"/>
-                <a:ea typeface="Be Vietnam Pro" pitchFamily="34" charset="-122"/>
-                <a:cs typeface="Be Vietnam Pro" pitchFamily="34" charset="-120"/>
-              </a:rPr>
-              <a:t> vào</a:t>
-            </a:r>
-            <a:r>
-              <a:rPr lang="en-US" sz="2100" dirty="0" spc="17" kern="0">
-                <a:solidFill>
-                  <a:srgbClr val="C4C8D6"/>
-                </a:solidFill>
-                <a:latin typeface="Be Vietnam Pro" pitchFamily="34" charset="0"/>
-                <a:ea typeface="Be Vietnam Pro" pitchFamily="34" charset="-122"/>
-                <a:cs typeface="Be Vietnam Pro" pitchFamily="34" charset="-120"/>
-              </a:rPr>
-              <a:t> từng</a:t>
-            </a:r>
-            <a:r>
-              <a:rPr lang="en-US" sz="2100" dirty="0" spc="0" kern="0">
-                <a:solidFill>
-                  <a:srgbClr val="C4C8D6"/>
-                </a:solidFill>
-                <a:latin typeface="Be Vietnam Pro" pitchFamily="34" charset="0"/>
-                <a:ea typeface="Be Vietnam Pro" pitchFamily="34" charset="-122"/>
-                <a:cs typeface="Be Vietnam Pro" pitchFamily="34" charset="-120"/>
-              </a:rPr>
-              <a:t> nơi.</a:t>
+              <a:t> trang.</a:t>
             </a:r>
             <a:endParaRPr lang="en-US" sz="2100" dirty="0"/>
           </a:p>
@@ -16812,7 +16557,7 @@
               <a:buNone/>
             </a:pPr>
             <a:r>
-              <a:rPr lang="en-US" sz="2700" b="1" dirty="0" spc="-2" kern="0">
+              <a:rPr lang="en-US" sz="2700" b="1" dirty="0" spc="-9" kern="0">
                 <a:solidFill>
                   <a:srgbClr val="F3EEE3"/>
                 </a:solidFill>
@@ -16820,10 +16565,10 @@
                 <a:ea typeface="Be Vietnam Pro" pitchFamily="34" charset="-122"/>
                 <a:cs typeface="Be Vietnam Pro" pitchFamily="34" charset="-120"/>
               </a:rPr>
-              <a:t>Hai</a:t>
-            </a:r>
-            <a:r>
-              <a:rPr lang="en-US" sz="2700" b="1" dirty="0" spc="-10" kern="0">
+              <a:t>Học</a:t>
+            </a:r>
+            <a:r>
+              <a:rPr lang="en-US" sz="2700" b="1" dirty="0" spc="-14" kern="0">
                 <a:solidFill>
                   <a:srgbClr val="F3EEE3"/>
                 </a:solidFill>
@@ -16831,10 +16576,10 @@
                 <a:ea typeface="Be Vietnam Pro" pitchFamily="34" charset="-122"/>
                 <a:cs typeface="Be Vietnam Pro" pitchFamily="34" charset="-120"/>
               </a:rPr>
-              <a:t> tên</a:t>
-            </a:r>
-            <a:r>
-              <a:rPr lang="en-US" sz="2700" b="1" dirty="0" spc="-4" kern="0">
+              <a:t> máy</a:t>
+            </a:r>
+            <a:r>
+              <a:rPr lang="en-US" sz="2700" b="1" dirty="0" spc="0" kern="0">
                 <a:solidFill>
                   <a:srgbClr val="F3EEE3"/>
                 </a:solidFill>
@@ -16842,10 +16587,10 @@
                 <a:ea typeface="Be Vietnam Pro" pitchFamily="34" charset="-122"/>
                 <a:cs typeface="Be Vietnam Pro" pitchFamily="34" charset="-120"/>
               </a:rPr>
-              <a:t> là</a:t>
-            </a:r>
-            <a:r>
-              <a:rPr lang="en-US" sz="2700" b="1" dirty="0" spc="-10" kern="0">
+              <a:t> chỉ đọc</a:t>
+            </a:r>
+            <a:r>
+              <a:rPr lang="en-US" sz="2700" b="1" dirty="0" spc="-5" kern="0">
                 <a:solidFill>
                   <a:srgbClr val="F3EEE3"/>
                 </a:solidFill>
@@ -16853,10 +16598,10 @@
                 <a:ea typeface="Be Vietnam Pro" pitchFamily="34" charset="-122"/>
                 <a:cs typeface="Be Vietnam Pro" pitchFamily="34" charset="-120"/>
               </a:rPr>
-              <a:t> tên</a:t>
-            </a:r>
-            <a:r>
-              <a:rPr lang="en-US" sz="2700" b="1" dirty="0" spc="-3" kern="0">
+              <a:t> tài</a:t>
+            </a:r>
+            <a:r>
+              <a:rPr lang="en-US" sz="2700" b="1" dirty="0" spc="1" kern="0">
                 <a:solidFill>
                   <a:srgbClr val="F3EEE3"/>
                 </a:solidFill>
@@ -16864,29 +16609,7 @@
                 <a:ea typeface="Be Vietnam Pro" pitchFamily="34" charset="-122"/>
                 <a:cs typeface="Be Vietnam Pro" pitchFamily="34" charset="-120"/>
               </a:rPr>
-              <a:t> mục</a:t>
-            </a:r>
-            <a:r>
-              <a:rPr lang="en-US" sz="2700" b="1" dirty="0" spc="-2" kern="0">
-                <a:solidFill>
-                  <a:srgbClr val="F3EEE3"/>
-                </a:solidFill>
-                <a:latin typeface="Be Vietnam Pro" pitchFamily="34" charset="0"/>
-                <a:ea typeface="Be Vietnam Pro" pitchFamily="34" charset="-122"/>
-                <a:cs typeface="Be Vietnam Pro" pitchFamily="34" charset="-120"/>
-              </a:rPr>
-              <a:t> của</a:t>
-            </a:r>
-            <a:r>
-              <a:rPr lang="en-US" sz="2700" b="1" dirty="0" spc="-4" kern="0">
-                <a:solidFill>
-                  <a:srgbClr val="F3EEE3"/>
-                </a:solidFill>
-                <a:latin typeface="Be Vietnam Pro" pitchFamily="34" charset="0"/>
-                <a:ea typeface="Be Vietnam Pro" pitchFamily="34" charset="-122"/>
-                <a:cs typeface="Be Vietnam Pro" pitchFamily="34" charset="-120"/>
-              </a:rPr>
-              <a:t> nguồn</a:t>
+              <a:t> liệu</a:t>
             </a:r>
             <a:endParaRPr lang="en-US" sz="2700" dirty="0"/>
           </a:p>
@@ -16920,7 +16643,7 @@
               <a:buNone/>
             </a:pPr>
             <a:r>
-              <a:rPr lang="en-US" sz="2100" dirty="0" spc="-17" kern="0">
+              <a:rPr lang="en-US" sz="2100" dirty="0" spc="7" kern="0">
                 <a:solidFill>
                   <a:srgbClr val="C4C8D6"/>
                 </a:solidFill>
@@ -16928,10 +16651,10 @@
                 <a:ea typeface="Be Vietnam Pro" pitchFamily="34" charset="-122"/>
                 <a:cs typeface="Be Vietnam Pro" pitchFamily="34" charset="-120"/>
               </a:rPr>
-              <a:t>Dijkstra</a:t>
-            </a:r>
-            <a:r>
-              <a:rPr lang="en-US" sz="2100" dirty="0" spc="-18" kern="0">
+              <a:t>Chưa</a:t>
+            </a:r>
+            <a:r>
+              <a:rPr lang="en-US" sz="2100" dirty="0" spc="-8" kern="0">
                 <a:solidFill>
                   <a:srgbClr val="C4C8D6"/>
                 </a:solidFill>
@@ -16939,10 +16662,10 @@
                 <a:ea typeface="Be Vietnam Pro" pitchFamily="34" charset="-122"/>
                 <a:cs typeface="Be Vietnam Pro" pitchFamily="34" charset="-120"/>
               </a:rPr>
-              <a:t> và</a:t>
-            </a:r>
-            <a:r>
-              <a:rPr lang="en-US" sz="2100" dirty="0" spc="-2" kern="0">
+              <a:t> chạy</a:t>
+            </a:r>
+            <a:r>
+              <a:rPr lang="en-US" sz="2100" dirty="0" spc="-25" kern="0">
                 <a:solidFill>
                   <a:srgbClr val="C4C8D6"/>
                 </a:solidFill>
@@ -16950,10 +16673,10 @@
                 <a:ea typeface="Be Vietnam Pro" pitchFamily="34" charset="-122"/>
                 <a:cs typeface="Be Vietnam Pro" pitchFamily="34" charset="-120"/>
               </a:rPr>
-              <a:t> phân</a:t>
-            </a:r>
-            <a:r>
-              <a:rPr lang="en-US" sz="2100" dirty="0" spc="0" kern="0">
+              <a:t> Transformer</a:t>
+            </a:r>
+            <a:r>
+              <a:rPr lang="en-US" sz="2100" dirty="0" spc="-11" kern="0">
                 <a:solidFill>
                   <a:srgbClr val="C4C8D6"/>
                 </a:solidFill>
@@ -16961,10 +16684,10 @@
                 <a:ea typeface="Be Vietnam Pro" pitchFamily="34" charset="-122"/>
                 <a:cs typeface="Be Vietnam Pro" pitchFamily="34" charset="-120"/>
               </a:rPr>
-              <a:t> tích</a:t>
-            </a:r>
-            <a:r>
-              <a:rPr lang="en-US" sz="2100" dirty="0" spc="1" kern="0">
+              <a:t> hay</a:t>
+            </a:r>
+            <a:r>
+              <a:rPr lang="en-US" sz="2100" dirty="0" spc="-1" kern="0">
                 <a:solidFill>
                   <a:srgbClr val="C4C8D6"/>
                 </a:solidFill>
@@ -16972,106 +16695,7 @@
                 <a:ea typeface="Be Vietnam Pro" pitchFamily="34" charset="-122"/>
                 <a:cs typeface="Be Vietnam Pro" pitchFamily="34" charset="-120"/>
               </a:rPr>
-              <a:t> liên</a:t>
-            </a:r>
-            <a:r>
-              <a:rPr lang="en-US" sz="2100" dirty="0" spc="-23" kern="0">
-                <a:solidFill>
-                  <a:srgbClr val="C4C8D6"/>
-                </a:solidFill>
-                <a:latin typeface="Be Vietnam Pro" pitchFamily="34" charset="0"/>
-                <a:ea typeface="Be Vietnam Pro" pitchFamily="34" charset="-122"/>
-                <a:cs typeface="Be Vietnam Pro" pitchFamily="34" charset="-120"/>
-              </a:rPr>
-              <a:t> kết:</a:t>
-            </a:r>
-            <a:r>
-              <a:rPr lang="en-US" sz="2100" dirty="0" spc="-5" kern="0">
-                <a:solidFill>
-                  <a:srgbClr val="C4C8D6"/>
-                </a:solidFill>
-                <a:latin typeface="Be Vietnam Pro" pitchFamily="34" charset="0"/>
-                <a:ea typeface="Be Vietnam Pro" pitchFamily="34" charset="-122"/>
-                <a:cs typeface="Be Vietnam Pro" pitchFamily="34" charset="-120"/>
-              </a:rPr>
-              <a:t> bài</a:t>
-            </a:r>
-            <a:r>
-              <a:rPr lang="en-US" sz="2100" dirty="0" spc="9" kern="0">
-                <a:solidFill>
-                  <a:srgbClr val="C4C8D6"/>
-                </a:solidFill>
-                <a:latin typeface="Be Vietnam Pro" pitchFamily="34" charset="0"/>
-                <a:ea typeface="Be Vietnam Pro" pitchFamily="34" charset="-122"/>
-                <a:cs typeface="Be Vietnam Pro" pitchFamily="34" charset="-120"/>
-              </a:rPr>
-              <a:t> đối</a:t>
-            </a:r>
-            <a:r>
-              <a:rPr lang="en-US" sz="2100" dirty="0" spc="1" kern="0">
-                <a:solidFill>
-                  <a:srgbClr val="C4C8D6"/>
-                </a:solidFill>
-                <a:latin typeface="Be Vietnam Pro" pitchFamily="34" charset="0"/>
-                <a:ea typeface="Be Vietnam Pro" pitchFamily="34" charset="-122"/>
-                <a:cs typeface="Be Vietnam Pro" pitchFamily="34" charset="-120"/>
-              </a:rPr>
-              <a:t> chiếu</a:t>
-            </a:r>
-            <a:r>
-              <a:rPr lang="en-US" sz="2100" dirty="0" spc="-8" kern="0">
-                <a:solidFill>
-                  <a:srgbClr val="C4C8D6"/>
-                </a:solidFill>
-                <a:latin typeface="Be Vietnam Pro" pitchFamily="34" charset="0"/>
-                <a:ea typeface="Be Vietnam Pro" pitchFamily="34" charset="-122"/>
-                <a:cs typeface="Be Vietnam Pro" pitchFamily="34" charset="-120"/>
-              </a:rPr>
-              <a:t> một</a:t>
-            </a:r>
-            <a:r>
-              <a:rPr lang="en-US" sz="2100" dirty="0" spc="-1" kern="0">
-                <a:solidFill>
-                  <a:srgbClr val="C4C8D6"/>
-                </a:solidFill>
-                <a:latin typeface="Be Vietnam Pro" pitchFamily="34" charset="0"/>
-                <a:ea typeface="Be Vietnam Pro" pitchFamily="34" charset="-122"/>
-                <a:cs typeface="Be Vietnam Pro" pitchFamily="34" charset="-120"/>
-              </a:rPr>
-              <a:t> ví</a:t>
-            </a:r>
-            <a:r>
-              <a:rPr lang="en-US" sz="2100" dirty="0" spc="-2" kern="0">
-                <a:solidFill>
-                  <a:srgbClr val="C4C8D6"/>
-                </a:solidFill>
-                <a:latin typeface="Be Vietnam Pro" pitchFamily="34" charset="0"/>
-                <a:ea typeface="Be Vietnam Pro" pitchFamily="34" charset="-122"/>
-                <a:cs typeface="Be Vietnam Pro" pitchFamily="34" charset="-120"/>
-              </a:rPr>
-              <a:t> dụ cho</a:t>
-            </a:r>
-            <a:r>
-              <a:rPr lang="en-US" sz="2100" dirty="0" spc="-1" kern="0">
-                <a:solidFill>
-                  <a:srgbClr val="C4C8D6"/>
-                </a:solidFill>
-                <a:latin typeface="Be Vietnam Pro" pitchFamily="34" charset="0"/>
-                <a:ea typeface="Be Vietnam Pro" pitchFamily="34" charset="-122"/>
-                <a:cs typeface="Be Vietnam Pro" pitchFamily="34" charset="-120"/>
-              </a:rPr>
-              <a:t> mỗi</a:t>
-            </a:r>
-            <a:r>
-              <a:rPr lang="en-US" sz="2100" dirty="0" spc="-8" kern="0">
-                <a:solidFill>
-                  <a:srgbClr val="C4C8D6"/>
-                </a:solidFill>
-                <a:latin typeface="Be Vietnam Pro" pitchFamily="34" charset="0"/>
-                <a:ea typeface="Be Vietnam Pro" pitchFamily="34" charset="-122"/>
-                <a:cs typeface="Be Vietnam Pro" pitchFamily="34" charset="-120"/>
-              </a:rPr>
-              <a:t> tên.</a:t>
+              <a:t> CNN nào.</a:t>
             </a:r>
             <a:endParaRPr lang="en-US" sz="2100" dirty="0"/>
           </a:p>
@@ -18641,7 +18265,7 @@
               <a:buNone/>
             </a:pPr>
             <a:r>
-              <a:rPr lang="en-US" sz="3300" dirty="0" spc="2" kern="0">
+              <a:rPr lang="en-US" sz="3300" dirty="0" spc="-1" kern="0">
                 <a:solidFill>
                   <a:srgbClr val="B45309"/>
                 </a:solidFill>
@@ -18649,7 +18273,18 @@
                 <a:ea typeface="Bricolage Grotesque ExtraBold" pitchFamily="34" charset="-122"/>
                 <a:cs typeface="Bricolage Grotesque ExtraBold" pitchFamily="34" charset="-120"/>
               </a:rPr>
-              <a:t>Mã Huffman</a:t>
+              <a:t>Họ băm</a:t>
+            </a:r>
+            <a:r>
+              <a:rPr lang="en-US" sz="3300" dirty="0" spc="0" kern="0">
+                <a:solidFill>
+                  <a:srgbClr val="B45309"/>
+                </a:solidFill>
+                <a:latin typeface="Bricolage Grotesque ExtraBold" pitchFamily="34" charset="0"/>
+                <a:ea typeface="Bricolage Grotesque ExtraBold" pitchFamily="34" charset="-122"/>
+                <a:cs typeface="Bricolage Grotesque ExtraBold" pitchFamily="34" charset="-120"/>
+              </a:rPr>
+              <a:t> SHA</a:t>
             </a:r>
             <a:endParaRPr lang="en-US" sz="3300" dirty="0"/>
           </a:p>
@@ -19346,6 +18981,17 @@
               <a:t> nào</a:t>
             </a:r>
             <a:r>
+              <a:rPr lang="en-US" sz="2550" dirty="0" spc="-1" kern="0">
+                <a:solidFill>
+                  <a:srgbClr val="14161C"/>
+                </a:solidFill>
+                <a:latin typeface="Be Vietnam Pro" pitchFamily="34" charset="0"/>
+                <a:ea typeface="Be Vietnam Pro" pitchFamily="34" charset="-122"/>
+                <a:cs typeface="Be Vietnam Pro" pitchFamily="34" charset="-120"/>
+              </a:rPr>
+              <a:t> cho</a:t>
+            </a:r>
+            <a:r>
               <a:rPr lang="en-US" sz="2550" dirty="0" spc="1" kern="0">
                 <a:solidFill>
                   <a:srgbClr val="14161C"/>
@@ -19354,7 +19000,7 @@
                 <a:ea typeface="Be Vietnam Pro" pitchFamily="34" charset="-122"/>
                 <a:cs typeface="Be Vietnam Pro" pitchFamily="34" charset="-120"/>
               </a:rPr>
-              <a:t> nguồn</a:t>
+              <a:t> chuỗi</a:t>
             </a:r>
             <a:r>
               <a:rPr lang="en-US" sz="2550" dirty="0" spc="0" kern="0">
@@ -19365,29 +19011,29 @@
                 <a:ea typeface="Be Vietnam Pro" pitchFamily="34" charset="-122"/>
                 <a:cs typeface="Be Vietnam Pro" pitchFamily="34" charset="-120"/>
               </a:rPr>
-              <a:t> chỉ</a:t>
-            </a:r>
-            <a:r>
-              <a:rPr lang="en-US" sz="2550" dirty="0" spc="2" kern="0">
-                <a:solidFill>
-                  <a:srgbClr val="14161C"/>
-                </a:solidFill>
-                <a:latin typeface="Be Vietnam Pro" pitchFamily="34" charset="0"/>
-                <a:ea typeface="Be Vietnam Pro" pitchFamily="34" charset="-122"/>
-                <a:cs typeface="Be Vietnam Pro" pitchFamily="34" charset="-120"/>
-              </a:rPr>
-              <a:t> nêu</a:t>
-            </a:r>
-            <a:r>
-              <a:rPr lang="en-US" sz="2550" dirty="0" spc="-10" kern="0">
-                <a:solidFill>
-                  <a:srgbClr val="14161C"/>
-                </a:solidFill>
-                <a:latin typeface="Be Vietnam Pro" pitchFamily="34" charset="0"/>
-                <a:ea typeface="Be Vietnam Pro" pitchFamily="34" charset="-122"/>
-                <a:cs typeface="Be Vietnam Pro" pitchFamily="34" charset="-120"/>
-              </a:rPr>
-              <a:t> tên,</a:t>
+              <a:t> dài</a:t>
+            </a:r>
+            <a:r>
+              <a:rPr lang="en-US" sz="2550" dirty="0" spc="-1" kern="0">
+                <a:solidFill>
+                  <a:srgbClr val="14161C"/>
+                </a:solidFill>
+                <a:latin typeface="Be Vietnam Pro" pitchFamily="34" charset="0"/>
+                <a:ea typeface="Be Vietnam Pro" pitchFamily="34" charset="-122"/>
+                <a:cs typeface="Be Vietnam Pro" pitchFamily="34" charset="-120"/>
+              </a:rPr>
+              <a:t> cố</a:t>
+            </a:r>
+            <a:r>
+              <a:rPr lang="en-US" sz="2550" dirty="0" spc="21" kern="0">
+                <a:solidFill>
+                  <a:srgbClr val="14161C"/>
+                </a:solidFill>
+                <a:latin typeface="Be Vietnam Pro" pitchFamily="34" charset="0"/>
+                <a:ea typeface="Be Vietnam Pro" pitchFamily="34" charset="-122"/>
+                <a:cs typeface="Be Vietnam Pro" pitchFamily="34" charset="-120"/>
+              </a:rPr>
+              <a:t> định</a:t>
             </a:r>
             <a:endParaRPr lang="en-US" sz="2550" dirty="0"/>
           </a:p>
@@ -19399,15 +19045,48 @@
               <a:buNone/>
             </a:pPr>
             <a:r>
-              <a:rPr lang="en-US" sz="2550" dirty="0" spc="-4" kern="0">
-                <a:solidFill>
-                  <a:srgbClr val="14161C"/>
-                </a:solidFill>
-                <a:latin typeface="Be Vietnam Pro" pitchFamily="34" charset="0"/>
-                <a:ea typeface="Be Vietnam Pro" pitchFamily="34" charset="-122"/>
-                <a:cs typeface="Be Vietnam Pro" pitchFamily="34" charset="-120"/>
-              </a:rPr>
-              <a:t>bài</a:t>
+              <a:rPr lang="en-US" sz="2550" dirty="0" spc="-20" kern="0">
+                <a:solidFill>
+                  <a:srgbClr val="14161C"/>
+                </a:solidFill>
+                <a:latin typeface="Be Vietnam Pro" pitchFamily="34" charset="0"/>
+                <a:ea typeface="Be Vietnam Pro" pitchFamily="34" charset="-122"/>
+                <a:cs typeface="Be Vietnam Pro" pitchFamily="34" charset="-120"/>
+              </a:rPr>
+              <a:t>với</a:t>
+            </a:r>
+            <a:r>
+              <a:rPr lang="en-US" sz="2550" dirty="0" spc="-2" kern="0">
+                <a:solidFill>
+                  <a:srgbClr val="14161C"/>
+                </a:solidFill>
+                <a:latin typeface="Be Vietnam Pro" pitchFamily="34" charset="0"/>
+                <a:ea typeface="Be Vietnam Pro" pitchFamily="34" charset="-122"/>
+                <a:cs typeface="Be Vietnam Pro" pitchFamily="34" charset="-120"/>
+              </a:rPr>
+              <a:t> dữ</a:t>
+            </a:r>
+            <a:r>
+              <a:rPr lang="en-US" sz="2550" dirty="0" spc="1" kern="0">
+                <a:solidFill>
+                  <a:srgbClr val="14161C"/>
+                </a:solidFill>
+                <a:latin typeface="Be Vietnam Pro" pitchFamily="34" charset="0"/>
+                <a:ea typeface="Be Vietnam Pro" pitchFamily="34" charset="-122"/>
+                <a:cs typeface="Be Vietnam Pro" pitchFamily="34" charset="-120"/>
+              </a:rPr>
+              <a:t> liệu</a:t>
+            </a:r>
+            <a:r>
+              <a:rPr lang="en-US" sz="2550" dirty="0" spc="-14" kern="0">
+                <a:solidFill>
+                  <a:srgbClr val="14161C"/>
+                </a:solidFill>
+                <a:latin typeface="Be Vietnam Pro" pitchFamily="34" charset="0"/>
+                <a:ea typeface="Be Vietnam Pro" pitchFamily="34" charset="-122"/>
+                <a:cs typeface="Be Vietnam Pro" pitchFamily="34" charset="-120"/>
+              </a:rPr>
+              <a:t> vào</a:t>
             </a:r>
             <a:r>
               <a:rPr lang="en-US" sz="2550" dirty="0" spc="0" kern="0">
@@ -19418,29 +19097,29 @@
                 <a:ea typeface="Be Vietnam Pro" pitchFamily="34" charset="-122"/>
                 <a:cs typeface="Be Vietnam Pro" pitchFamily="34" charset="-120"/>
               </a:rPr>
-              <a:t> không</a:t>
-            </a:r>
-            <a:r>
-              <a:rPr lang="en-US" sz="2550" dirty="0" spc="13" kern="0">
-                <a:solidFill>
-                  <a:srgbClr val="14161C"/>
-                </a:solidFill>
-                <a:latin typeface="Be Vietnam Pro" pitchFamily="34" charset="0"/>
-                <a:ea typeface="Be Vietnam Pro" pitchFamily="34" charset="-122"/>
-                <a:cs typeface="Be Vietnam Pro" pitchFamily="34" charset="-120"/>
-              </a:rPr>
-              <a:t> đối</a:t>
-            </a:r>
-            <a:r>
-              <a:rPr lang="en-US" sz="2550" dirty="0" spc="0" kern="0">
-                <a:solidFill>
-                  <a:srgbClr val="14161C"/>
-                </a:solidFill>
-                <a:latin typeface="Be Vietnam Pro" pitchFamily="34" charset="0"/>
-                <a:ea typeface="Be Vietnam Pro" pitchFamily="34" charset="-122"/>
-                <a:cs typeface="Be Vietnam Pro" pitchFamily="34" charset="-120"/>
-              </a:rPr>
-              <a:t> chiếu?</a:t>
+              <a:t> dài</a:t>
+            </a:r>
+            <a:r>
+              <a:rPr lang="en-US" sz="2550" dirty="0" spc="-10" kern="0">
+                <a:solidFill>
+                  <a:srgbClr val="14161C"/>
+                </a:solidFill>
+                <a:latin typeface="Be Vietnam Pro" pitchFamily="34" charset="0"/>
+                <a:ea typeface="Be Vietnam Pro" pitchFamily="34" charset="-122"/>
+                <a:cs typeface="Be Vietnam Pro" pitchFamily="34" charset="-120"/>
+              </a:rPr>
+              <a:t> hay</a:t>
+            </a:r>
+            <a:r>
+              <a:rPr lang="en-US" sz="2550" dirty="0" spc="-8" kern="0">
+                <a:solidFill>
+                  <a:srgbClr val="14161C"/>
+                </a:solidFill>
+                <a:latin typeface="Be Vietnam Pro" pitchFamily="34" charset="0"/>
+                <a:ea typeface="Be Vietnam Pro" pitchFamily="34" charset="-122"/>
+                <a:cs typeface="Be Vietnam Pro" pitchFamily="34" charset="-120"/>
+              </a:rPr>
+              <a:t> ngắn?</a:t>
             </a:r>
             <a:endParaRPr lang="en-US" sz="2550" dirty="0"/>
           </a:p>
@@ -19474,51 +19153,18 @@
               <a:buNone/>
             </a:pPr>
             <a:r>
-              <a:rPr lang="en-US" sz="2250" dirty="0" spc="-2" kern="0">
-                <a:solidFill>
-                  <a:srgbClr val="14161C"/>
-                </a:solidFill>
-                <a:latin typeface="Be Vietnam Pro" pitchFamily="34" charset="0"/>
-                <a:ea typeface="Be Vietnam Pro" pitchFamily="34" charset="-122"/>
-                <a:cs typeface="Be Vietnam Pro" pitchFamily="34" charset="-120"/>
-              </a:rPr>
-              <a:t>Tìm</a:t>
-            </a:r>
-            <a:r>
-              <a:rPr lang="en-US" sz="2250" dirty="0" spc="6" kern="0">
-                <a:solidFill>
-                  <a:srgbClr val="14161C"/>
-                </a:solidFill>
-                <a:latin typeface="Be Vietnam Pro" pitchFamily="34" charset="0"/>
-                <a:ea typeface="Be Vietnam Pro" pitchFamily="34" charset="-122"/>
-                <a:cs typeface="Be Vietnam Pro" pitchFamily="34" charset="-120"/>
-              </a:rPr>
-              <a:t> đường</a:t>
-            </a:r>
-            <a:r>
-              <a:rPr lang="en-US" sz="2250" dirty="0" spc="31" kern="0">
-                <a:solidFill>
-                  <a:srgbClr val="14161C"/>
-                </a:solidFill>
-                <a:latin typeface="Be Vietnam Pro" pitchFamily="34" charset="0"/>
-                <a:ea typeface="Be Vietnam Pro" pitchFamily="34" charset="-122"/>
-                <a:cs typeface="Be Vietnam Pro" pitchFamily="34" charset="-120"/>
-              </a:rPr>
-              <a:t> đi</a:t>
-            </a:r>
-            <a:r>
-              <a:rPr lang="en-US" sz="2250" dirty="0" spc="5" kern="0">
-                <a:solidFill>
-                  <a:srgbClr val="14161C"/>
-                </a:solidFill>
-                <a:latin typeface="Be Vietnam Pro" pitchFamily="34" charset="0"/>
-                <a:ea typeface="Be Vietnam Pro" pitchFamily="34" charset="-122"/>
-                <a:cs typeface="Be Vietnam Pro" pitchFamily="34" charset="-120"/>
-              </a:rPr>
-              <a:t> có</a:t>
-            </a:r>
-            <a:r>
-              <a:rPr lang="en-US" sz="2250" dirty="0" spc="-15" kern="0">
+              <a:rPr lang="en-US" sz="2250" dirty="0" spc="-50" kern="0">
+                <a:solidFill>
+                  <a:srgbClr val="14161C"/>
+                </a:solidFill>
+                <a:latin typeface="Be Vietnam Pro" pitchFamily="34" charset="0"/>
+                <a:ea typeface="Be Vietnam Pro" pitchFamily="34" charset="-122"/>
+                <a:cs typeface="Be Vietnam Pro" pitchFamily="34" charset="-120"/>
+              </a:rPr>
+              <a:t>Tổng</a:t>
+            </a:r>
+            <a:r>
+              <a:rPr lang="en-US" sz="2250" dirty="0" spc="-14" kern="0">
                 <a:solidFill>
                   <a:srgbClr val="14161C"/>
                 </a:solidFill>
@@ -19529,7 +19175,7 @@
               <a:t> trọng</a:t>
             </a:r>
             <a:r>
-              <a:rPr lang="en-US" sz="2250" dirty="0" spc="-2" kern="0">
+              <a:rPr lang="en-US" sz="2250" dirty="0" spc="-3" kern="0">
                 <a:solidFill>
                   <a:srgbClr val="14161C"/>
                 </a:solidFill>
@@ -19540,15 +19186,26 @@
               <a:t> số</a:t>
             </a:r>
             <a:r>
-              <a:rPr lang="en-US" sz="2250" dirty="0" spc="-9" kern="0">
-                <a:solidFill>
-                  <a:srgbClr val="14161C"/>
-                </a:solidFill>
-                <a:latin typeface="Be Vietnam Pro" pitchFamily="34" charset="0"/>
-                <a:ea typeface="Be Vietnam Pro" pitchFamily="34" charset="-122"/>
-                <a:cs typeface="Be Vietnam Pro" pitchFamily="34" charset="-120"/>
-              </a:rPr>
-              <a:t> ngắn nhất</a:t>
+              <a:rPr lang="en-US" sz="2250" dirty="0" spc="2" kern="0">
+                <a:solidFill>
+                  <a:srgbClr val="14161C"/>
+                </a:solidFill>
+                <a:latin typeface="Be Vietnam Pro" pitchFamily="34" charset="0"/>
+                <a:ea typeface="Be Vietnam Pro" pitchFamily="34" charset="-122"/>
+                <a:cs typeface="Be Vietnam Pro" pitchFamily="34" charset="-120"/>
+              </a:rPr>
+              <a:t> nhỏ</a:t>
+            </a:r>
+            <a:r>
+              <a:rPr lang="en-US" sz="2250" dirty="0" spc="-6" kern="0">
+                <a:solidFill>
+                  <a:srgbClr val="14161C"/>
+                </a:solidFill>
+                <a:latin typeface="Be Vietnam Pro" pitchFamily="34" charset="0"/>
+                <a:ea typeface="Be Vietnam Pro" pitchFamily="34" charset="-122"/>
+                <a:cs typeface="Be Vietnam Pro" pitchFamily="34" charset="-120"/>
+              </a:rPr>
+              <a:t> nhất:</a:t>
             </a:r>
             <a:endParaRPr lang="en-US" sz="2250" dirty="0"/>
           </a:p>
@@ -19560,15 +19217,15 @@
               <a:buNone/>
             </a:pPr>
             <a:r>
-              <a:rPr lang="en-US" sz="2250" dirty="0" spc="6" kern="0">
-                <a:solidFill>
-                  <a:srgbClr val="14161C"/>
-                </a:solidFill>
-                <a:latin typeface="Be Vietnam Pro" pitchFamily="34" charset="0"/>
-                <a:ea typeface="Be Vietnam Pro" pitchFamily="34" charset="-122"/>
-                <a:cs typeface="Be Vietnam Pro" pitchFamily="34" charset="-120"/>
-              </a:rPr>
-              <a:t>giữa</a:t>
+              <a:rPr lang="en-US" sz="2250" dirty="0" spc="0" kern="0">
+                <a:solidFill>
+                  <a:srgbClr val="14161C"/>
+                </a:solidFill>
+                <a:latin typeface="Be Vietnam Pro" pitchFamily="34" charset="0"/>
+                <a:ea typeface="Be Vietnam Pro" pitchFamily="34" charset="-122"/>
+                <a:cs typeface="Be Vietnam Pro" pitchFamily="34" charset="-120"/>
+              </a:rPr>
+              <a:t>A,</a:t>
             </a:r>
             <a:r>
               <a:rPr lang="en-US" sz="2250" dirty="0" spc="-2" kern="0">
@@ -19579,18 +19236,84 @@
                 <a:ea typeface="Be Vietnam Pro" pitchFamily="34" charset="-122"/>
                 <a:cs typeface="Be Vietnam Pro" pitchFamily="34" charset="-120"/>
               </a:rPr>
-              <a:t> hai</a:t>
-            </a:r>
-            <a:r>
-              <a:rPr lang="en-US" sz="2250" dirty="0" spc="4" kern="0">
-                <a:solidFill>
-                  <a:srgbClr val="14161C"/>
-                </a:solidFill>
-                <a:latin typeface="Be Vietnam Pro" pitchFamily="34" charset="0"/>
-                <a:ea typeface="Be Vietnam Pro" pitchFamily="34" charset="-122"/>
-                <a:cs typeface="Be Vietnam Pro" pitchFamily="34" charset="-120"/>
-              </a:rPr>
-              <a:t> nút.</a:t>
+              <a:t> C,</a:t>
+            </a:r>
+            <a:r>
+              <a:rPr lang="en-US" sz="2250" dirty="0" spc="1" kern="0">
+                <a:solidFill>
+                  <a:srgbClr val="14161C"/>
+                </a:solidFill>
+                <a:latin typeface="Be Vietnam Pro" pitchFamily="34" charset="0"/>
+                <a:ea typeface="Be Vietnam Pro" pitchFamily="34" charset="-122"/>
+                <a:cs typeface="Be Vietnam Pro" pitchFamily="34" charset="-120"/>
+              </a:rPr>
+              <a:t> B,</a:t>
+            </a:r>
+            <a:r>
+              <a:rPr lang="en-US" sz="2250" dirty="0" spc="2" kern="0">
+                <a:solidFill>
+                  <a:srgbClr val="14161C"/>
+                </a:solidFill>
+                <a:latin typeface="Be Vietnam Pro" pitchFamily="34" charset="0"/>
+                <a:ea typeface="Be Vietnam Pro" pitchFamily="34" charset="-122"/>
+                <a:cs typeface="Be Vietnam Pro" pitchFamily="34" charset="-120"/>
+              </a:rPr>
+              <a:t> D</a:t>
+            </a:r>
+            <a:r>
+              <a:rPr lang="en-US" sz="2250" dirty="0" spc="0" kern="0">
+                <a:solidFill>
+                  <a:srgbClr val="14161C"/>
+                </a:solidFill>
+                <a:latin typeface="Be Vietnam Pro" pitchFamily="34" charset="0"/>
+                <a:ea typeface="Be Vietnam Pro" pitchFamily="34" charset="-122"/>
+                <a:cs typeface="Be Vietnam Pro" pitchFamily="34" charset="-120"/>
+              </a:rPr>
+              <a:t> dài</a:t>
+            </a:r>
+            <a:r>
+              <a:rPr lang="en-US" sz="2250" dirty="0" spc="-2" kern="0">
+                <a:solidFill>
+                  <a:srgbClr val="14161C"/>
+                </a:solidFill>
+                <a:latin typeface="Be Vietnam Pro" pitchFamily="34" charset="0"/>
+                <a:ea typeface="Be Vietnam Pro" pitchFamily="34" charset="-122"/>
+                <a:cs typeface="Be Vietnam Pro" pitchFamily="34" charset="-120"/>
+              </a:rPr>
+              <a:t> 4,</a:t>
+            </a:r>
+            <a:r>
+              <a:rPr lang="en-US" sz="2250" dirty="0" spc="1" kern="0">
+                <a:solidFill>
+                  <a:srgbClr val="14161C"/>
+                </a:solidFill>
+                <a:latin typeface="Be Vietnam Pro" pitchFamily="34" charset="0"/>
+                <a:ea typeface="Be Vietnam Pro" pitchFamily="34" charset="-122"/>
+                <a:cs typeface="Be Vietnam Pro" pitchFamily="34" charset="-120"/>
+              </a:rPr>
+              <a:t> không</a:t>
+            </a:r>
+            <a:r>
+              <a:rPr lang="en-US" sz="2250" dirty="0" spc="0" kern="0">
+                <a:solidFill>
+                  <a:srgbClr val="14161C"/>
+                </a:solidFill>
+                <a:latin typeface="Be Vietnam Pro" pitchFamily="34" charset="0"/>
+                <a:ea typeface="Be Vietnam Pro" pitchFamily="34" charset="-122"/>
+                <a:cs typeface="Be Vietnam Pro" pitchFamily="34" charset="-120"/>
+              </a:rPr>
+              <a:t> phải</a:t>
+            </a:r>
+            <a:r>
+              <a:rPr lang="en-US" sz="2250" dirty="0" spc="2" kern="0">
+                <a:solidFill>
+                  <a:srgbClr val="14161C"/>
+                </a:solidFill>
+                <a:latin typeface="Be Vietnam Pro" pitchFamily="34" charset="0"/>
+                <a:ea typeface="Be Vietnam Pro" pitchFamily="34" charset="-122"/>
+                <a:cs typeface="Be Vietnam Pro" pitchFamily="34" charset="-120"/>
+              </a:rPr>
+              <a:t> 5.</a:t>
             </a:r>
             <a:endParaRPr lang="en-US" sz="2250" dirty="0"/>
           </a:p>
@@ -19624,15 +19347,37 @@
               <a:buNone/>
             </a:pPr>
             <a:r>
-              <a:rPr lang="en-US" sz="2250" dirty="0" spc="0" kern="0">
-                <a:solidFill>
-                  <a:srgbClr val="14161C"/>
-                </a:solidFill>
-                <a:latin typeface="Be Vietnam Pro" pitchFamily="34" charset="0"/>
-                <a:ea typeface="Be Vietnam Pro" pitchFamily="34" charset="-122"/>
-                <a:cs typeface="Be Vietnam Pro" pitchFamily="34" charset="-120"/>
-              </a:rPr>
-              <a:t>Nguồn</a:t>
+              <a:rPr lang="en-US" sz="2250" dirty="0" spc="2" kern="0">
+                <a:solidFill>
+                  <a:srgbClr val="14161C"/>
+                </a:solidFill>
+                <a:latin typeface="Be Vietnam Pro" pitchFamily="34" charset="0"/>
+                <a:ea typeface="Be Vietnam Pro" pitchFamily="34" charset="-122"/>
+                <a:cs typeface="Be Vietnam Pro" pitchFamily="34" charset="-120"/>
+              </a:rPr>
+              <a:t>SHA-256 luôn</a:t>
+            </a:r>
+            <a:r>
+              <a:rPr lang="en-US" sz="2250" dirty="0" spc="-32" kern="0">
+                <a:solidFill>
+                  <a:srgbClr val="14161C"/>
+                </a:solidFill>
+                <a:latin typeface="Be Vietnam Pro" pitchFamily="34" charset="0"/>
+                <a:ea typeface="Be Vietnam Pro" pitchFamily="34" charset="-122"/>
+                <a:cs typeface="Be Vietnam Pro" pitchFamily="34" charset="-120"/>
+              </a:rPr>
+              <a:t> ra</a:t>
+            </a:r>
+            <a:r>
+              <a:rPr lang="en-US" sz="2250" dirty="0" spc="2" kern="0">
+                <a:solidFill>
+                  <a:srgbClr val="14161C"/>
+                </a:solidFill>
+                <a:latin typeface="Be Vietnam Pro" pitchFamily="34" charset="0"/>
+                <a:ea typeface="Be Vietnam Pro" pitchFamily="34" charset="-122"/>
+                <a:cs typeface="Be Vietnam Pro" pitchFamily="34" charset="-120"/>
+              </a:rPr>
+              <a:t> 64</a:t>
             </a:r>
             <a:r>
               <a:rPr lang="en-US" sz="2250" dirty="0" spc="1" kern="0">
@@ -19643,29 +19388,18 @@
                 <a:ea typeface="Be Vietnam Pro" pitchFamily="34" charset="-122"/>
                 <a:cs typeface="Be Vietnam Pro" pitchFamily="34" charset="-120"/>
               </a:rPr>
-              <a:t> chỉ</a:t>
-            </a:r>
-            <a:r>
-              <a:rPr lang="en-US" sz="2250" dirty="0" spc="0" kern="0">
-                <a:solidFill>
-                  <a:srgbClr val="14161C"/>
-                </a:solidFill>
-                <a:latin typeface="Be Vietnam Pro" pitchFamily="34" charset="0"/>
-                <a:ea typeface="Be Vietnam Pro" pitchFamily="34" charset="-122"/>
-                <a:cs typeface="Be Vietnam Pro" pitchFamily="34" charset="-120"/>
-              </a:rPr>
-              <a:t> nêu</a:t>
-            </a:r>
-            <a:r>
-              <a:rPr lang="en-US" sz="2250" dirty="0" spc="-7" kern="0">
-                <a:solidFill>
-                  <a:srgbClr val="14161C"/>
-                </a:solidFill>
-                <a:latin typeface="Be Vietnam Pro" pitchFamily="34" charset="0"/>
-                <a:ea typeface="Be Vietnam Pro" pitchFamily="34" charset="-122"/>
-                <a:cs typeface="Be Vietnam Pro" pitchFamily="34" charset="-120"/>
-              </a:rPr>
-              <a:t> tên.</a:t>
+              <a:t> ký</a:t>
+            </a:r>
+            <a:r>
+              <a:rPr lang="en-US" sz="2250" dirty="0" spc="4" kern="0">
+                <a:solidFill>
+                  <a:srgbClr val="14161C"/>
+                </a:solidFill>
+                <a:latin typeface="Be Vietnam Pro" pitchFamily="34" charset="0"/>
+                <a:ea typeface="Be Vietnam Pro" pitchFamily="34" charset="-122"/>
+                <a:cs typeface="Be Vietnam Pro" pitchFamily="34" charset="-120"/>
+              </a:rPr>
+              <a:t> tự</a:t>
             </a:r>
             <a:endParaRPr lang="en-US" sz="2250" dirty="0"/>
           </a:p>
@@ -19677,83 +19411,6 @@
               <a:buNone/>
             </a:pPr>
             <a:r>
-              <a:rPr lang="en-US" sz="2250" dirty="0" spc="-3" kern="0">
-                <a:solidFill>
-                  <a:srgbClr val="14161C"/>
-                </a:solidFill>
-                <a:latin typeface="Be Vietnam Pro" pitchFamily="34" charset="0"/>
-                <a:ea typeface="Be Vietnam Pro" pitchFamily="34" charset="-122"/>
-                <a:cs typeface="Be Vietnam Pro" pitchFamily="34" charset="-120"/>
-              </a:rPr>
-              <a:t>Bài</a:t>
-            </a:r>
-            <a:r>
-              <a:rPr lang="en-US" sz="2250" dirty="0" spc="1" kern="0">
-                <a:solidFill>
-                  <a:srgbClr val="14161C"/>
-                </a:solidFill>
-                <a:latin typeface="Be Vietnam Pro" pitchFamily="34" charset="0"/>
-                <a:ea typeface="Be Vietnam Pro" pitchFamily="34" charset="-122"/>
-                <a:cs typeface="Be Vietnam Pro" pitchFamily="34" charset="-120"/>
-              </a:rPr>
-              <a:t> không</a:t>
-            </a:r>
-            <a:r>
-              <a:rPr lang="en-US" sz="2250" dirty="0" spc="5" kern="0">
-                <a:solidFill>
-                  <a:srgbClr val="14161C"/>
-                </a:solidFill>
-                <a:latin typeface="Be Vietnam Pro" pitchFamily="34" charset="0"/>
-                <a:ea typeface="Be Vietnam Pro" pitchFamily="34" charset="-122"/>
-                <a:cs typeface="Be Vietnam Pro" pitchFamily="34" charset="-120"/>
-              </a:rPr>
-              <a:t> có</a:t>
-            </a:r>
-            <a:r>
-              <a:rPr lang="en-US" sz="2250" dirty="0" spc="-13" kern="0">
-                <a:solidFill>
-                  <a:srgbClr val="14161C"/>
-                </a:solidFill>
-                <a:latin typeface="Be Vietnam Pro" pitchFamily="34" charset="0"/>
-                <a:ea typeface="Be Vietnam Pro" pitchFamily="34" charset="-122"/>
-                <a:cs typeface="Be Vietnam Pro" pitchFamily="34" charset="-120"/>
-              </a:rPr>
-              <a:t> tài</a:t>
-            </a:r>
-            <a:r>
-              <a:rPr lang="en-US" sz="2250" dirty="0" spc="-2" kern="0">
-                <a:solidFill>
-                  <a:srgbClr val="14161C"/>
-                </a:solidFill>
-                <a:latin typeface="Be Vietnam Pro" pitchFamily="34" charset="0"/>
-                <a:ea typeface="Be Vietnam Pro" pitchFamily="34" charset="-122"/>
-                <a:cs typeface="Be Vietnam Pro" pitchFamily="34" charset="-120"/>
-              </a:rPr>
-              <a:t> liệu</a:t>
-            </a:r>
-            <a:r>
-              <a:rPr lang="en-US" sz="2250" dirty="0" spc="16" kern="0">
-                <a:solidFill>
-                  <a:srgbClr val="14161C"/>
-                </a:solidFill>
-                <a:latin typeface="Be Vietnam Pro" pitchFamily="34" charset="0"/>
-                <a:ea typeface="Be Vietnam Pro" pitchFamily="34" charset="-122"/>
-                <a:cs typeface="Be Vietnam Pro" pitchFamily="34" charset="-120"/>
-              </a:rPr>
-              <a:t> để</a:t>
-            </a:r>
-            <a:r>
-              <a:rPr lang="en-US" sz="2250" dirty="0" spc="13" kern="0">
-                <a:solidFill>
-                  <a:srgbClr val="14161C"/>
-                </a:solidFill>
-                <a:latin typeface="Be Vietnam Pro" pitchFamily="34" charset="0"/>
-                <a:ea typeface="Be Vietnam Pro" pitchFamily="34" charset="-122"/>
-                <a:cs typeface="Be Vietnam Pro" pitchFamily="34" charset="-120"/>
-              </a:rPr>
-              <a:t> đối</a:t>
-            </a:r>
-            <a:r>
               <a:rPr lang="en-US" sz="2250" dirty="0" spc="0" kern="0">
                 <a:solidFill>
                   <a:srgbClr val="14161C"/>
@@ -19762,7 +19419,29 @@
                 <a:ea typeface="Be Vietnam Pro" pitchFamily="34" charset="-122"/>
                 <a:cs typeface="Be Vietnam Pro" pitchFamily="34" charset="-120"/>
               </a:rPr>
-              <a:t> chiếu.</a:t>
+              <a:t>thập</a:t>
+            </a:r>
+            <a:r>
+              <a:rPr lang="en-US" sz="2250" dirty="0" spc="3" kern="0">
+                <a:solidFill>
+                  <a:srgbClr val="14161C"/>
+                </a:solidFill>
+                <a:latin typeface="Be Vietnam Pro" pitchFamily="34" charset="0"/>
+                <a:ea typeface="Be Vietnam Pro" pitchFamily="34" charset="-122"/>
+                <a:cs typeface="Be Vietnam Pro" pitchFamily="34" charset="-120"/>
+              </a:rPr>
+              <a:t> lục</a:t>
+            </a:r>
+            <a:r>
+              <a:rPr lang="en-US" sz="2250" dirty="0" spc="2" kern="0">
+                <a:solidFill>
+                  <a:srgbClr val="14161C"/>
+                </a:solidFill>
+                <a:latin typeface="Be Vietnam Pro" pitchFamily="34" charset="0"/>
+                <a:ea typeface="Be Vietnam Pro" pitchFamily="34" charset="-122"/>
+                <a:cs typeface="Be Vietnam Pro" pitchFamily="34" charset="-120"/>
+              </a:rPr>
+              <a:t> phân.</a:t>
             </a:r>
             <a:endParaRPr lang="en-US" sz="2250" dirty="0"/>
           </a:p>
@@ -20763,10 +20442,10 @@
                 <a:ea typeface="Be Vietnam Pro" pitchFamily="34" charset="-122"/>
                 <a:cs typeface="Be Vietnam Pro" pitchFamily="34" charset="-120"/>
               </a:rPr>
-              <a:t> chập:</a:t>
-            </a:r>
-            <a:r>
-              <a:rPr lang="en-US" sz="2250" dirty="0" spc="-5" kern="0">
+              <a:t> chập: dùng phép</a:t>
+            </a:r>
+            <a:r>
+              <a:rPr lang="en-US" sz="2250" dirty="0" spc="1" kern="0">
                 <a:solidFill>
                   <a:srgbClr val="C4C8D6"/>
                 </a:solidFill>
@@ -20774,10 +20453,10 @@
                 <a:ea typeface="Be Vietnam Pro" pitchFamily="34" charset="-122"/>
                 <a:cs typeface="Be Vietnam Pro" pitchFamily="34" charset="-120"/>
               </a:rPr>
-              <a:t> loại</a:t>
-            </a:r>
-            <a:r>
-              <a:rPr lang="en-US" sz="2250" dirty="0" spc="-1" kern="0">
+              <a:t> tích</a:t>
+            </a:r>
+            <a:r>
+              <a:rPr lang="en-US" sz="2250" dirty="0" spc="0" kern="0">
                 <a:solidFill>
                   <a:srgbClr val="C4C8D6"/>
                 </a:solidFill>
@@ -20785,10 +20464,10 @@
                 <a:ea typeface="Be Vietnam Pro" pitchFamily="34" charset="-122"/>
                 <a:cs typeface="Be Vietnam Pro" pitchFamily="34" charset="-120"/>
               </a:rPr>
-              <a:t> mạng</a:t>
-            </a:r>
-            <a:r>
-              <a:rPr lang="en-US" sz="2250" dirty="0" spc="12" kern="0">
+              <a:t> chập,</a:t>
+            </a:r>
+            <a:r>
+              <a:rPr lang="en-US" sz="2250" dirty="0" spc="6" kern="0">
                 <a:solidFill>
                   <a:srgbClr val="C4C8D6"/>
                 </a:solidFill>
@@ -20796,32 +20475,10 @@
                 <a:ea typeface="Be Vietnam Pro" pitchFamily="34" charset="-122"/>
                 <a:cs typeface="Be Vietnam Pro" pitchFamily="34" charset="-120"/>
               </a:rPr>
-              <a:t> đặc</a:t>
-            </a:r>
-            <a:r>
-              <a:rPr lang="en-US" sz="2250" dirty="0" spc="-4" kern="0">
-                <a:solidFill>
-                  <a:srgbClr val="C4C8D6"/>
-                </a:solidFill>
-                <a:latin typeface="Be Vietnam Pro" pitchFamily="34" charset="0"/>
-                <a:ea typeface="Be Vietnam Pro" pitchFamily="34" charset="-122"/>
-                <a:cs typeface="Be Vietnam Pro" pitchFamily="34" charset="-120"/>
-              </a:rPr>
-              <a:t> biệt</a:t>
-            </a:r>
-            <a:r>
-              <a:rPr lang="en-US" sz="2250" dirty="0" spc="-1" kern="0">
-                <a:solidFill>
-                  <a:srgbClr val="C4C8D6"/>
-                </a:solidFill>
-                <a:latin typeface="Be Vietnam Pro" pitchFamily="34" charset="0"/>
-                <a:ea typeface="Be Vietnam Pro" pitchFamily="34" charset="-122"/>
-                <a:cs typeface="Be Vietnam Pro" pitchFamily="34" charset="-120"/>
-              </a:rPr>
-              <a:t> mạnh</a:t>
-            </a:r>
-            <a:r>
-              <a:rPr lang="en-US" sz="2250" dirty="0" spc="-11" kern="0">
+              <a:t> thường</a:t>
+            </a:r>
+            <a:r>
+              <a:rPr lang="en-US" sz="2250" dirty="0" spc="-12" kern="0">
                 <a:solidFill>
                   <a:srgbClr val="C4C8D6"/>
                 </a:solidFill>
@@ -20964,10 +20621,10 @@
                 <a:ea typeface="Be Vietnam Pro" pitchFamily="34" charset="-122"/>
                 <a:cs typeface="Be Vietnam Pro" pitchFamily="34" charset="-120"/>
               </a:rPr>
-              <a:t>ByteByteGo: bài</a:t>
-            </a:r>
-            <a:r>
-              <a:rPr lang="en-US" sz="2100" dirty="0" spc="-1" kern="0">
+              <a:t>ByteByteGo:</a:t>
+            </a:r>
+            <a:r>
+              <a:rPr lang="en-US" sz="2100" dirty="0" spc="0" kern="0">
                 <a:solidFill>
                   <a:srgbClr val="C4C8D6"/>
                 </a:solidFill>
@@ -20975,10 +20632,10 @@
                 <a:ea typeface="Be Vietnam Pro" pitchFamily="34" charset="-122"/>
                 <a:cs typeface="Be Vietnam Pro" pitchFamily="34" charset="-120"/>
               </a:rPr>
-              <a:t> nguồn,</a:t>
-            </a:r>
-            <a:r>
-              <a:rPr lang="en-US" sz="2100" dirty="0" spc="1" kern="0">
+              <a:t> chỉ</a:t>
+            </a:r>
+            <a:r>
+              <a:rPr lang="en-US" sz="2100" dirty="0" spc="-11" kern="0">
                 <a:solidFill>
                   <a:srgbClr val="C4C8D6"/>
                 </a:solidFill>
@@ -20986,6 +20643,17 @@
                 <a:ea typeface="Be Vietnam Pro" pitchFamily="34" charset="-122"/>
                 <a:cs typeface="Be Vietnam Pro" pitchFamily="34" charset="-120"/>
               </a:rPr>
+              <a:t> lấy</a:t>
+            </a:r>
+            <a:r>
+              <a:rPr lang="en-US" sz="2100" dirty="0" spc="0" kern="0">
+                <a:solidFill>
+                  <a:srgbClr val="C4C8D6"/>
+                </a:solidFill>
+                <a:latin typeface="Be Vietnam Pro" pitchFamily="34" charset="0"/>
+                <a:ea typeface="Be Vietnam Pro" pitchFamily="34" charset="-122"/>
+                <a:cs typeface="Be Vietnam Pro" pitchFamily="34" charset="-120"/>
+              </a:rPr>
               <a:t> chín</a:t>
             </a:r>
             <a:r>
@@ -21000,7 +20668,7 @@
               <a:t> tên</a:t>
             </a:r>
             <a:r>
-              <a:rPr lang="en-US" sz="2100" dirty="0" spc="-9" kern="0">
+              <a:rPr lang="en-US" sz="2100" dirty="0" spc="-8" kern="0">
                 <a:solidFill>
                   <a:srgbClr val="C4C8D6"/>
                 </a:solidFill>
@@ -21011,7 +20679,7 @@
               <a:t> thuật</a:t>
             </a:r>
             <a:r>
-              <a:rPr lang="en-US" sz="2100" dirty="0" spc="-12" kern="0">
+              <a:rPr lang="en-US" sz="2100" dirty="0" spc="-13" kern="0">
                 <a:solidFill>
                   <a:srgbClr val="C4C8D6"/>
                 </a:solidFill>
@@ -21020,50 +20688,6 @@
                 <a:cs typeface="Be Vietnam Pro" pitchFamily="34" charset="-120"/>
               </a:rPr>
               <a:t> toán</a:t>
-            </a:r>
-            <a:r>
-              <a:rPr lang="en-US" sz="2100" dirty="0" spc="-17" kern="0">
-                <a:solidFill>
-                  <a:srgbClr val="C4C8D6"/>
-                </a:solidFill>
-                <a:latin typeface="Be Vietnam Pro" pitchFamily="34" charset="0"/>
-                <a:ea typeface="Be Vietnam Pro" pitchFamily="34" charset="-122"/>
-                <a:cs typeface="Be Vietnam Pro" pitchFamily="34" charset="-120"/>
-              </a:rPr>
-              <a:t> và</a:t>
-            </a:r>
-            <a:r>
-              <a:rPr lang="en-US" sz="2100" dirty="0" spc="-2" kern="0">
-                <a:solidFill>
-                  <a:srgbClr val="C4C8D6"/>
-                </a:solidFill>
-                <a:latin typeface="Be Vietnam Pro" pitchFamily="34" charset="0"/>
-                <a:ea typeface="Be Vietnam Pro" pitchFamily="34" charset="-122"/>
-                <a:cs typeface="Be Vietnam Pro" pitchFamily="34" charset="-120"/>
-              </a:rPr>
-              <a:t> câu</a:t>
-            </a:r>
-            <a:r>
-              <a:rPr lang="en-US" sz="2100" dirty="0" spc="-4" kern="0">
-                <a:solidFill>
-                  <a:srgbClr val="C4C8D6"/>
-                </a:solidFill>
-                <a:latin typeface="Be Vietnam Pro" pitchFamily="34" charset="0"/>
-                <a:ea typeface="Be Vietnam Pro" pitchFamily="34" charset="-122"/>
-                <a:cs typeface="Be Vietnam Pro" pitchFamily="34" charset="-120"/>
-              </a:rPr>
-              <a:t> mở</a:t>
-            </a:r>
-            <a:r>
-              <a:rPr lang="en-US" sz="2100" dirty="0" spc="10" kern="0">
-                <a:solidFill>
-                  <a:srgbClr val="C4C8D6"/>
-                </a:solidFill>
-                <a:latin typeface="Be Vietnam Pro" pitchFamily="34" charset="0"/>
-                <a:ea typeface="Be Vietnam Pro" pitchFamily="34" charset="-122"/>
-                <a:cs typeface="Be Vietnam Pro" pitchFamily="34" charset="-120"/>
-              </a:rPr>
-              <a:t> đầu</a:t>
             </a:r>
             <a:endParaRPr lang="en-US" sz="2100" dirty="0"/>
           </a:p>
@@ -21121,6 +20745,17 @@
               <a:t> SymPy,</a:t>
             </a:r>
             <a:r>
+              <a:rPr lang="en-US" sz="2100" dirty="0" spc="-1" kern="0">
+                <a:solidFill>
+                  <a:srgbClr val="C4C8D6"/>
+                </a:solidFill>
+                <a:latin typeface="Be Vietnam Pro" pitchFamily="34" charset="0"/>
+                <a:ea typeface="Be Vietnam Pro" pitchFamily="34" charset="-122"/>
+                <a:cs typeface="Be Vietnam Pro" pitchFamily="34" charset="-120"/>
+              </a:rPr>
+              <a:t> zlib,</a:t>
+            </a:r>
+            <a:r>
               <a:rPr lang="en-US" sz="2100" dirty="0" spc="-31" kern="0">
                 <a:solidFill>
                   <a:srgbClr val="C4C8D6"/>
@@ -21165,7 +20800,7 @@
               <a:t> trong</a:t>
             </a:r>
             <a:r>
-              <a:rPr lang="en-US" sz="2100" dirty="0" spc="-1" kern="0">
+              <a:rPr lang="en-US" sz="2100" dirty="0" spc="0" kern="0">
                 <a:solidFill>
                   <a:srgbClr val="C4C8D6"/>
                 </a:solidFill>
@@ -21176,7 +20811,7 @@
               <a:t> kho</a:t>
             </a:r>
             <a:r>
-              <a:rPr lang="en-US" sz="2100" dirty="0" spc="-2" kern="0">
+              <a:rPr lang="en-US" sz="2100" dirty="0" spc="-3" kern="0">
                 <a:solidFill>
                   <a:srgbClr val="C4C8D6"/>
                 </a:solidFill>
@@ -21267,7 +20902,18 @@
                 <a:ea typeface="Be Vietnam Pro" pitchFamily="34" charset="-122"/>
                 <a:cs typeface="Be Vietnam Pro" pitchFamily="34" charset="-120"/>
               </a:rPr>
-              <a:t> 2026-10-18.</a:t>
+              <a:t> 2026-10-19.</a:t>
+            </a:r>
+            <a:r>
+              <a:rPr lang="en-US" sz="1950" dirty="0" spc="1" kern="0">
+                <a:solidFill>
+                  <a:srgbClr val="9AA0B5"/>
+                </a:solidFill>
+                <a:latin typeface="Be Vietnam Pro" pitchFamily="34" charset="0"/>
+                <a:ea typeface="Be Vietnam Pro" pitchFamily="34" charset="-122"/>
+                <a:cs typeface="Be Vietnam Pro" pitchFamily="34" charset="-120"/>
+              </a:rPr>
+              <a:t> Phép</a:t>
             </a:r>
             <a:r>
               <a:rPr lang="en-US" sz="1950" dirty="0" spc="0" kern="0">
@@ -21278,10 +20924,10 @@
                 <a:ea typeface="Be Vietnam Pro" pitchFamily="34" charset="-122"/>
                 <a:cs typeface="Be Vietnam Pro" pitchFamily="34" charset="-120"/>
               </a:rPr>
-              <a:t> Hình</a:t>
-            </a:r>
-            <a:r>
-              <a:rPr lang="en-US" sz="1950" dirty="0" spc="2" kern="0">
+              <a:t> thử</a:t>
+            </a:r>
+            <a:r>
+              <a:rPr lang="en-US" sz="1950" dirty="0" spc="-2" kern="0">
                 <a:solidFill>
                   <a:srgbClr val="9AA0B5"/>
                 </a:solidFill>
@@ -21289,10 +20935,10 @@
                 <a:ea typeface="Be Vietnam Pro" pitchFamily="34" charset="-122"/>
                 <a:cs typeface="Be Vietnam Pro" pitchFamily="34" charset="-120"/>
               </a:rPr>
-              <a:t> minh</a:t>
-            </a:r>
-            <a:r>
-              <a:rPr lang="en-US" sz="1950" dirty="0" spc="-3" kern="0">
+              <a:t> do</a:t>
+            </a:r>
+            <a:r>
+              <a:rPr lang="en-US" sz="1950" dirty="0" spc="6" kern="0">
                 <a:solidFill>
                   <a:srgbClr val="9AA0B5"/>
                 </a:solidFill>
@@ -21300,10 +20946,10 @@
                 <a:ea typeface="Be Vietnam Pro" pitchFamily="34" charset="-122"/>
                 <a:cs typeface="Be Vietnam Pro" pitchFamily="34" charset="-120"/>
               </a:rPr>
-              <a:t> họa</a:t>
-            </a:r>
-            <a:r>
-              <a:rPr lang="en-US" sz="1950" dirty="0" spc="-2" kern="0">
+              <a:t> người</a:t>
+            </a:r>
+            <a:r>
+              <a:rPr lang="en-US" sz="1950" dirty="0" spc="0" kern="0">
                 <a:solidFill>
                   <a:srgbClr val="9AA0B5"/>
                 </a:solidFill>
@@ -21311,7 +20957,7 @@
                 <a:ea typeface="Be Vietnam Pro" pitchFamily="34" charset="-122"/>
                 <a:cs typeface="Be Vietnam Pro" pitchFamily="34" charset="-120"/>
               </a:rPr>
-              <a:t> là</a:t>
+              <a:t> biên</a:t>
             </a:r>
             <a:r>
               <a:rPr lang="en-US" sz="1950" dirty="0" spc="-4" kern="0">
@@ -21322,10 +20968,10 @@
                 <a:ea typeface="Be Vietnam Pro" pitchFamily="34" charset="-122"/>
                 <a:cs typeface="Be Vietnam Pro" pitchFamily="34" charset="-120"/>
               </a:rPr>
-              <a:t> thiết</a:t>
-            </a:r>
-            <a:r>
-              <a:rPr lang="en-US" sz="1950" dirty="0" spc="-32" kern="0">
+              <a:t> soạn</a:t>
+            </a:r>
+            <a:r>
+              <a:rPr lang="en-US" sz="1950" dirty="0" spc="-8" kern="0">
                 <a:solidFill>
                   <a:srgbClr val="9AA0B5"/>
                 </a:solidFill>
@@ -21333,18 +20979,7 @@
                 <a:ea typeface="Be Vietnam Pro" pitchFamily="34" charset="-122"/>
                 <a:cs typeface="Be Vietnam Pro" pitchFamily="34" charset="-120"/>
               </a:rPr>
-              <a:t> kế</a:t>
-            </a:r>
-            <a:r>
-              <a:rPr lang="en-US" sz="1950" dirty="0" spc="-1" kern="0">
-                <a:solidFill>
-                  <a:srgbClr val="9AA0B5"/>
-                </a:solidFill>
-                <a:latin typeface="Be Vietnam Pro" pitchFamily="34" charset="0"/>
-                <a:ea typeface="Be Vietnam Pro" pitchFamily="34" charset="-122"/>
-                <a:cs typeface="Be Vietnam Pro" pitchFamily="34" charset="-120"/>
-              </a:rPr>
-              <a:t> mới.</a:t>
+              <a:t> chạy.</a:t>
             </a:r>
             <a:endParaRPr lang="en-US" sz="1950" dirty="0"/>
           </a:p>

--- a/system-design-101/vi/lessons/sd-10-024/slides/sd-10-024.pptx
+++ b/system-design-101/vi/lessons/sd-10-024/slides/sd-10-024.pptx
@@ -6786,7 +6786,18 @@
                 <a:ea typeface="Be Vietnam Pro" pitchFamily="34" charset="-122"/>
                 <a:cs typeface="Be Vietnam Pro" pitchFamily="34" charset="-120"/>
               </a:rPr>
-              <a:t>Java:</a:t>
+              <a:t>Java,</a:t>
+            </a:r>
+            <a:r>
+              <a:rPr lang="en-US" sz="2100" dirty="0" spc="-1" kern="0">
+                <a:solidFill>
+                  <a:srgbClr val="C4C8D6"/>
+                </a:solidFill>
+                <a:latin typeface="Be Vietnam Pro" pitchFamily="34" charset="0"/>
+                <a:ea typeface="Be Vietnam Pro" pitchFamily="34" charset="-122"/>
+                <a:cs typeface="Be Vietnam Pro" pitchFamily="34" charset="-120"/>
+              </a:rPr>
+              <a:t> mảng</a:t>
             </a:r>
             <a:r>
               <a:rPr lang="en-US" sz="2100" dirty="0" spc="-6" kern="0">
@@ -6797,18 +6808,7 @@
                 <a:ea typeface="Be Vietnam Pro" pitchFamily="34" charset="-122"/>
                 <a:cs typeface="Be Vietnam Pro" pitchFamily="34" charset="-120"/>
               </a:rPr>
-              <a:t> Dual-Pivot</a:t>
-            </a:r>
-            <a:r>
-              <a:rPr lang="en-US" sz="2100" dirty="0" spc="-5" kern="0">
-                <a:solidFill>
-                  <a:srgbClr val="C4C8D6"/>
-                </a:solidFill>
-                <a:latin typeface="Be Vietnam Pro" pitchFamily="34" charset="0"/>
-                <a:ea typeface="Be Vietnam Pro" pitchFamily="34" charset="-122"/>
-                <a:cs typeface="Be Vietnam Pro" pitchFamily="34" charset="-120"/>
-              </a:rPr>
-              <a:t> Quicksort</a:t>
+              <a:t> số: Dual-Pivot Quicksort</a:t>
             </a:r>
             <a:endParaRPr lang="en-US" sz="2100" dirty="0"/>
           </a:p>
@@ -11594,15 +11594,15 @@
               <a:t>Băm</a:t>
             </a:r>
             <a:r>
-              <a:rPr lang="en-US" sz="2250" b="1" dirty="0" spc="2" kern="0">
-                <a:solidFill>
-                  <a:srgbClr val="14161C"/>
-                </a:solidFill>
-                <a:latin typeface="Be Vietnam Pro" pitchFamily="34" charset="0"/>
-                <a:ea typeface="Be Vietnam Pro" pitchFamily="34" charset="-122"/>
-                <a:cs typeface="Be Vietnam Pro" pitchFamily="34" charset="-120"/>
-              </a:rPr>
-              <a:t> SHA</a:t>
+              <a:rPr lang="en-US" sz="2250" b="1" dirty="0" spc="0" kern="0">
+                <a:solidFill>
+                  <a:srgbClr val="14161C"/>
+                </a:solidFill>
+                <a:latin typeface="Be Vietnam Pro" pitchFamily="34" charset="0"/>
+                <a:ea typeface="Be Vietnam Pro" pitchFamily="34" charset="-122"/>
+                <a:cs typeface="Be Vietnam Pro" pitchFamily="34" charset="-120"/>
+              </a:rPr>
+              <a:t> SHA-256</a:t>
             </a:r>
             <a:endParaRPr lang="en-US" sz="2250" dirty="0"/>
           </a:p>

--- a/system-design-101/vi/lessons/sd-10-024/slides/sd-10-024.pptx
+++ b/system-design-101/vi/lessons/sd-10-024/slides/sd-10-024.pptx
@@ -3247,18 +3247,7 @@
                 <a:ea typeface="Be Vietnam Pro" pitchFamily="34" charset="-122"/>
                 <a:cs typeface="Be Vietnam Pro" pitchFamily="34" charset="-120"/>
               </a:rPr>
-              <a:t> tên,</a:t>
-            </a:r>
-            <a:r>
-              <a:rPr lang="en-US" sz="3000" dirty="0" spc="0" kern="0">
-                <a:solidFill>
-                  <a:srgbClr val="C4C8D6"/>
-                </a:solidFill>
-                <a:latin typeface="Be Vietnam Pro" pitchFamily="34" charset="0"/>
-                <a:ea typeface="Be Vietnam Pro" pitchFamily="34" charset="-122"/>
-                <a:cs typeface="Be Vietnam Pro" pitchFamily="34" charset="-120"/>
-              </a:rPr>
-              <a:t> chín</a:t>
+              <a:t> tên, bảy</a:t>
             </a:r>
             <a:r>
               <a:rPr lang="en-US" sz="3000" dirty="0" spc="3" kern="0">

--- a/system-design-101/vi/lessons/sd-10-024/slides/sd-10-024.pptx
+++ b/system-design-101/vi/lessons/sd-10-024/slides/sd-10-024.pptx
@@ -6264,6 +6264,39 @@
               <a:buNone/>
             </a:pPr>
             <a:r>
+              <a:rPr lang="en-US" sz="2550" dirty="0" spc="2" kern="0">
+                <a:solidFill>
+                  <a:srgbClr val="F3EEE3"/>
+                </a:solidFill>
+                <a:latin typeface="Be Vietnam Pro" pitchFamily="34" charset="0"/>
+                <a:ea typeface="Be Vietnam Pro" pitchFamily="34" charset="-122"/>
+                <a:cs typeface="Be Vietnam Pro" pitchFamily="34" charset="-120"/>
+              </a:rPr>
+              <a:t>Cả</a:t>
+            </a:r>
+            <a:r>
+              <a:rPr lang="en-US" sz="2550" dirty="0" spc="-5" kern="0">
+                <a:solidFill>
+                  <a:srgbClr val="F3EEE3"/>
+                </a:solidFill>
+                <a:latin typeface="Be Vietnam Pro" pitchFamily="34" charset="0"/>
+                <a:ea typeface="Be Vietnam Pro" pitchFamily="34" charset="-122"/>
+                <a:cs typeface="Be Vietnam Pro" pitchFamily="34" charset="-120"/>
+              </a:rPr>
+              <a:t> ba</a:t>
+            </a:r>
+            <a:r>
+              <a:rPr lang="en-US" sz="2550" dirty="0" spc="-11" kern="0">
+                <a:solidFill>
+                  <a:srgbClr val="F3EEE3"/>
+                </a:solidFill>
+                <a:latin typeface="Be Vietnam Pro" pitchFamily="34" charset="0"/>
+                <a:ea typeface="Be Vietnam Pro" pitchFamily="34" charset="-122"/>
+                <a:cs typeface="Be Vietnam Pro" pitchFamily="34" charset="-120"/>
+              </a:rPr>
+              <a:t> tên</a:t>
+            </a:r>
+            <a:r>
               <a:rPr lang="en-US" sz="2550" dirty="0" spc="-1" kern="0">
                 <a:solidFill>
                   <a:srgbClr val="F3EEE3"/>
@@ -6272,10 +6305,10 @@
                 <a:ea typeface="Be Vietnam Pro" pitchFamily="34" charset="-122"/>
                 <a:cs typeface="Be Vietnam Pro" pitchFamily="34" charset="-120"/>
               </a:rPr>
-              <a:t>Mỗi</a:t>
-            </a:r>
-            <a:r>
-              <a:rPr lang="en-US" sz="2550" dirty="0" spc="-11" kern="0">
+              <a:t> ở</a:t>
+            </a:r>
+            <a:r>
+              <a:rPr lang="en-US" sz="2550" dirty="0" spc="0" kern="0">
                 <a:solidFill>
                   <a:srgbClr val="F3EEE3"/>
                 </a:solidFill>
@@ -6283,7 +6316,29 @@
                 <a:ea typeface="Be Vietnam Pro" pitchFamily="34" charset="-122"/>
                 <a:cs typeface="Be Vietnam Pro" pitchFamily="34" charset="-120"/>
               </a:rPr>
-              <a:t> tên</a:t>
+              <a:t> nhóm</a:t>
+            </a:r>
+            <a:r>
+              <a:rPr lang="en-US" sz="2550" dirty="0" spc="-10" kern="0">
+                <a:solidFill>
+                  <a:srgbClr val="F3EEE3"/>
+                </a:solidFill>
+                <a:latin typeface="Be Vietnam Pro" pitchFamily="34" charset="0"/>
+                <a:ea typeface="Be Vietnam Pro" pitchFamily="34" charset="-122"/>
+                <a:cs typeface="Be Vietnam Pro" pitchFamily="34" charset="-120"/>
+              </a:rPr>
+              <a:t> này</a:t>
+            </a:r>
+            <a:r>
+              <a:rPr lang="en-US" sz="2550" dirty="0" spc="15" kern="0">
+                <a:solidFill>
+                  <a:srgbClr val="F3EEE3"/>
+                </a:solidFill>
+                <a:latin typeface="Be Vietnam Pro" pitchFamily="34" charset="0"/>
+                <a:ea typeface="Be Vietnam Pro" pitchFamily="34" charset="-122"/>
+                <a:cs typeface="Be Vietnam Pro" pitchFamily="34" charset="-120"/>
+              </a:rPr>
+              <a:t> đều</a:t>
             </a:r>
             <a:r>
               <a:rPr lang="en-US" sz="2550" dirty="0" spc="0" kern="0">

--- a/system-design-101/vi/lessons/sd-10-024/slides/sd-10-024.pptx
+++ b/system-design-101/vi/lessons/sd-10-024/slides/sd-10-024.pptx
@@ -10881,10 +10881,10 @@
                 <a:ea typeface="Be Vietnam Pro" pitchFamily="34" charset="-122"/>
                 <a:cs typeface="Be Vietnam Pro" pitchFamily="34" charset="-120"/>
               </a:rPr>
-              <a:t>SHA-256: luôn</a:t>
-            </a:r>
-            <a:r>
-              <a:rPr lang="en-US" sz="2700" dirty="0" spc="-40" kern="0">
+              <a:t>SHA-256:</a:t>
+            </a:r>
+            <a:r>
+              <a:rPr lang="en-US" sz="2700" dirty="0" spc="0" kern="0">
                 <a:solidFill>
                   <a:srgbClr val="F3EEE3"/>
                 </a:solidFill>
@@ -10892,7 +10892,29 @@
                 <a:ea typeface="Be Vietnam Pro" pitchFamily="34" charset="-122"/>
                 <a:cs typeface="Be Vietnam Pro" pitchFamily="34" charset="-120"/>
               </a:rPr>
-              <a:t> ra</a:t>
+              <a:t> 64</a:t>
+            </a:r>
+            <a:r>
+              <a:rPr lang="en-US" sz="2700" dirty="0" spc="-2" kern="0">
+                <a:solidFill>
+                  <a:srgbClr val="F3EEE3"/>
+                </a:solidFill>
+                <a:latin typeface="Be Vietnam Pro" pitchFamily="34" charset="0"/>
+                <a:ea typeface="Be Vietnam Pro" pitchFamily="34" charset="-122"/>
+                <a:cs typeface="Be Vietnam Pro" pitchFamily="34" charset="-120"/>
+              </a:rPr>
+              <a:t> ký</a:t>
+            </a:r>
+            <a:r>
+              <a:rPr lang="en-US" sz="2700" dirty="0" spc="-1" kern="0">
+                <a:solidFill>
+                  <a:srgbClr val="F3EEE3"/>
+                </a:solidFill>
+                <a:latin typeface="Be Vietnam Pro" pitchFamily="34" charset="0"/>
+                <a:ea typeface="Be Vietnam Pro" pitchFamily="34" charset="-122"/>
+                <a:cs typeface="Be Vietnam Pro" pitchFamily="34" charset="-120"/>
+              </a:rPr>
+              <a:t> tự</a:t>
             </a:r>
             <a:r>
               <a:rPr lang="en-US" sz="2700" dirty="0" spc="0" kern="0">
@@ -10903,7 +10925,18 @@
                 <a:ea typeface="Be Vietnam Pro" pitchFamily="34" charset="-122"/>
                 <a:cs typeface="Be Vietnam Pro" pitchFamily="34" charset="-120"/>
               </a:rPr>
-              <a:t> 64</a:t>
+              <a:t> thập</a:t>
+            </a:r>
+            <a:r>
+              <a:rPr lang="en-US" sz="2700" dirty="0" spc="-1" kern="0">
+                <a:solidFill>
+                  <a:srgbClr val="F3EEE3"/>
+                </a:solidFill>
+                <a:latin typeface="Be Vietnam Pro" pitchFamily="34" charset="0"/>
+                <a:ea typeface="Be Vietnam Pro" pitchFamily="34" charset="-122"/>
+                <a:cs typeface="Be Vietnam Pro" pitchFamily="34" charset="-120"/>
+              </a:rPr>
+              <a:t> lục</a:t>
             </a:r>
             <a:r>
               <a:rPr lang="en-US" sz="2700" dirty="0" spc="-2" kern="0">
@@ -10914,18 +10947,7 @@
                 <a:ea typeface="Be Vietnam Pro" pitchFamily="34" charset="-122"/>
                 <a:cs typeface="Be Vietnam Pro" pitchFamily="34" charset="-120"/>
               </a:rPr>
-              <a:t> ký</a:t>
-            </a:r>
-            <a:r>
-              <a:rPr lang="en-US" sz="2700" dirty="0" spc="-1" kern="0">
-                <a:solidFill>
-                  <a:srgbClr val="F3EEE3"/>
-                </a:solidFill>
-                <a:latin typeface="Be Vietnam Pro" pitchFamily="34" charset="0"/>
-                <a:ea typeface="Be Vietnam Pro" pitchFamily="34" charset="-122"/>
-                <a:cs typeface="Be Vietnam Pro" pitchFamily="34" charset="-120"/>
-              </a:rPr>
-              <a:t> tự.</a:t>
+              <a:t> phân.</a:t>
             </a:r>
             <a:endParaRPr lang="en-US" sz="2700" dirty="0"/>
           </a:p>
@@ -11742,6 +11764,17 @@
                 <a:cs typeface="Be Vietnam Pro" pitchFamily="34" charset="-120"/>
               </a:rPr>
               <a:t> tự</a:t>
+            </a:r>
+            <a:r>
+              <a:rPr lang="en-US" sz="2100" b="1" dirty="0" spc="-20" kern="0">
+                <a:solidFill>
+                  <a:srgbClr val="F3EEE3"/>
+                </a:solidFill>
+                <a:latin typeface="Be Vietnam Pro" pitchFamily="34" charset="0"/>
+                <a:ea typeface="Be Vietnam Pro" pitchFamily="34" charset="-122"/>
+                <a:cs typeface="Be Vietnam Pro" pitchFamily="34" charset="-120"/>
+              </a:rPr>
+              <a:t> hex</a:t>
             </a:r>
             <a:endParaRPr lang="en-US" sz="2100" dirty="0"/>
           </a:p>

--- a/system-design-101/vi/lessons/sd-10-024/slides/sd-10-024.pptx
+++ b/system-design-101/vi/lessons/sd-10-024/slides/sd-10-024.pptx
@@ -4850,15 +4850,59 @@
               <a:buNone/>
             </a:pPr>
             <a:r>
-              <a:rPr lang="en-US" sz="2850" dirty="0" spc="-16" kern="0">
-                <a:solidFill>
-                  <a:srgbClr val="14161C"/>
-                </a:solidFill>
-                <a:latin typeface="Be Vietnam Pro" pitchFamily="34" charset="0"/>
-                <a:ea typeface="Be Vietnam Pro" pitchFamily="34" charset="-122"/>
-                <a:cs typeface="Be Vietnam Pro" pitchFamily="34" charset="-120"/>
-              </a:rPr>
-              <a:t>Bảy</a:t>
+              <a:rPr lang="en-US" sz="2850" dirty="0" spc="-1" kern="0">
+                <a:solidFill>
+                  <a:srgbClr val="14161C"/>
+                </a:solidFill>
+                <a:latin typeface="Be Vietnam Pro" pitchFamily="34" charset="0"/>
+                <a:ea typeface="Be Vietnam Pro" pitchFamily="34" charset="-122"/>
+                <a:cs typeface="Be Vietnam Pro" pitchFamily="34" charset="-120"/>
+              </a:rPr>
+              <a:t>Bài</a:t>
+            </a:r>
+            <a:r>
+              <a:rPr lang="en-US" sz="2850" dirty="0" spc="20" kern="0">
+                <a:solidFill>
+                  <a:srgbClr val="14161C"/>
+                </a:solidFill>
+                <a:latin typeface="Be Vietnam Pro" pitchFamily="34" charset="0"/>
+                <a:ea typeface="Be Vietnam Pro" pitchFamily="34" charset="-122"/>
+                <a:cs typeface="Be Vietnam Pro" pitchFamily="34" charset="-120"/>
+              </a:rPr>
+              <a:t> đã</a:t>
+            </a:r>
+            <a:r>
+              <a:rPr lang="en-US" sz="2850" dirty="0" spc="-9" kern="0">
+                <a:solidFill>
+                  <a:srgbClr val="14161C"/>
+                </a:solidFill>
+                <a:latin typeface="Be Vietnam Pro" pitchFamily="34" charset="0"/>
+                <a:ea typeface="Be Vietnam Pro" pitchFamily="34" charset="-122"/>
+                <a:cs typeface="Be Vietnam Pro" pitchFamily="34" charset="-120"/>
+              </a:rPr>
+              <a:t> chạy</a:t>
+            </a:r>
+            <a:r>
+              <a:rPr lang="en-US" sz="2850" dirty="0" spc="-1" kern="0">
+                <a:solidFill>
+                  <a:srgbClr val="14161C"/>
+                </a:solidFill>
+                <a:latin typeface="Be Vietnam Pro" pitchFamily="34" charset="0"/>
+                <a:ea typeface="Be Vietnam Pro" pitchFamily="34" charset="-122"/>
+                <a:cs typeface="Be Vietnam Pro" pitchFamily="34" charset="-120"/>
+              </a:rPr>
+              <a:t> thử</a:t>
+            </a:r>
+            <a:r>
+              <a:rPr lang="en-US" sz="2850" dirty="0" spc="-14" kern="0">
+                <a:solidFill>
+                  <a:srgbClr val="14161C"/>
+                </a:solidFill>
+                <a:latin typeface="Be Vietnam Pro" pitchFamily="34" charset="0"/>
+                <a:ea typeface="Be Vietnam Pro" pitchFamily="34" charset="-122"/>
+                <a:cs typeface="Be Vietnam Pro" pitchFamily="34" charset="-120"/>
+              </a:rPr>
+              <a:t> bảy</a:t>
             </a:r>
             <a:r>
               <a:rPr lang="en-US" sz="2850" dirty="0" spc="-19" kern="0">
@@ -4883,7 +4927,7 @@
               <a:t> chín</a:t>
             </a:r>
             <a:r>
-              <a:rPr lang="en-US" sz="2850" dirty="0" spc="-11" kern="0">
+              <a:rPr lang="en-US" sz="2850" dirty="0" spc="-10" kern="0">
                 <a:solidFill>
                   <a:srgbClr val="14161C"/>
                 </a:solidFill>
@@ -4894,81 +4938,15 @@
               <a:t> thuật</a:t>
             </a:r>
             <a:r>
-              <a:rPr lang="en-US" sz="2850" dirty="0" spc="-14" kern="0">
-                <a:solidFill>
-                  <a:srgbClr val="14161C"/>
-                </a:solidFill>
-                <a:latin typeface="Be Vietnam Pro" pitchFamily="34" charset="0"/>
-                <a:ea typeface="Be Vietnam Pro" pitchFamily="34" charset="-122"/>
-                <a:cs typeface="Be Vietnam Pro" pitchFamily="34" charset="-120"/>
-              </a:rPr>
-              <a:t> toán</a:t>
-            </a:r>
-            <a:r>
-              <a:rPr lang="en-US" sz="2850" dirty="0" spc="-1" kern="0">
-                <a:solidFill>
-                  <a:srgbClr val="14161C"/>
-                </a:solidFill>
-                <a:latin typeface="Be Vietnam Pro" pitchFamily="34" charset="0"/>
-                <a:ea typeface="Be Vietnam Pro" pitchFamily="34" charset="-122"/>
-                <a:cs typeface="Be Vietnam Pro" pitchFamily="34" charset="-120"/>
-              </a:rPr>
-              <a:t> thử</a:t>
-            </a:r>
-            <a:r>
-              <a:rPr lang="en-US" sz="2850" dirty="0" spc="9" kern="0">
-                <a:solidFill>
-                  <a:srgbClr val="14161C"/>
-                </a:solidFill>
-                <a:latin typeface="Be Vietnam Pro" pitchFamily="34" charset="0"/>
-                <a:ea typeface="Be Vietnam Pro" pitchFamily="34" charset="-122"/>
-                <a:cs typeface="Be Vietnam Pro" pitchFamily="34" charset="-120"/>
-              </a:rPr>
-              <a:t> được</a:t>
-            </a:r>
-            <a:r>
-              <a:rPr lang="en-US" sz="2850" dirty="0" spc="-5" kern="0">
-                <a:solidFill>
-                  <a:srgbClr val="14161C"/>
-                </a:solidFill>
-                <a:latin typeface="Be Vietnam Pro" pitchFamily="34" charset="0"/>
-                <a:ea typeface="Be Vietnam Pro" pitchFamily="34" charset="-122"/>
-                <a:cs typeface="Be Vietnam Pro" pitchFamily="34" charset="-120"/>
-              </a:rPr>
-              <a:t> bằng</a:t>
-            </a:r>
-            <a:r>
-              <a:rPr lang="en-US" sz="2850" dirty="0" spc="-11" kern="0">
-                <a:solidFill>
-                  <a:srgbClr val="14161C"/>
-                </a:solidFill>
-                <a:latin typeface="Be Vietnam Pro" pitchFamily="34" charset="0"/>
-                <a:ea typeface="Be Vietnam Pro" pitchFamily="34" charset="-122"/>
-                <a:cs typeface="Be Vietnam Pro" pitchFamily="34" charset="-120"/>
-              </a:rPr>
-              <a:t> vài</a:t>
-            </a:r>
-            <a:r>
-              <a:rPr lang="en-US" sz="2850" dirty="0" spc="-3" kern="0">
-                <a:solidFill>
-                  <a:srgbClr val="14161C"/>
-                </a:solidFill>
-                <a:latin typeface="Be Vietnam Pro" pitchFamily="34" charset="0"/>
-                <a:ea typeface="Be Vietnam Pro" pitchFamily="34" charset="-122"/>
-                <a:cs typeface="Be Vietnam Pro" pitchFamily="34" charset="-120"/>
-              </a:rPr>
-              <a:t> dòng</a:t>
-            </a:r>
-            <a:r>
-              <a:rPr lang="en-US" sz="2850" dirty="0" spc="1" kern="0">
-                <a:solidFill>
-                  <a:srgbClr val="14161C"/>
-                </a:solidFill>
-                <a:latin typeface="Be Vietnam Pro" pitchFamily="34" charset="0"/>
-                <a:ea typeface="Be Vietnam Pro" pitchFamily="34" charset="-122"/>
-                <a:cs typeface="Be Vietnam Pro" pitchFamily="34" charset="-120"/>
-              </a:rPr>
-              <a:t> mã.</a:t>
+              <a:rPr lang="en-US" sz="2850" dirty="0" spc="-12" kern="0">
+                <a:solidFill>
+                  <a:srgbClr val="14161C"/>
+                </a:solidFill>
+                <a:latin typeface="Be Vietnam Pro" pitchFamily="34" charset="0"/>
+                <a:ea typeface="Be Vietnam Pro" pitchFamily="34" charset="-122"/>
+                <a:cs typeface="Be Vietnam Pro" pitchFamily="34" charset="-120"/>
+              </a:rPr>
+              <a:t> toán.</a:t>
             </a:r>
             <a:endParaRPr lang="en-US" sz="2850" dirty="0"/>
           </a:p>
